--- a/V2授课PPT/W17-第18次课-LLM故障诊断（下）：优.pptx
+++ b/V2授课PPT/W17-第18次课-LLM故障诊断（下）：优.pptx
@@ -12,6 +12,8 @@
     <p:sldId id="319" r:id="rId71"/>
     <p:sldId id="367" r:id="rId16"/>
     <p:sldId id="368" r:id="rId17"/>
+    <p:sldId id="369" r:id="rId18"/>
+    <p:sldId id="370" r:id="rId19"/>
     <p:sldId id="366" r:id="rId15"/>
     <p:sldId id="364" r:id="rId116"/>
     <p:sldId id="365" r:id="rId117"/>
@@ -4670,6 +4672,2142 @@
 </p:sld>
 </file>
 
+<file path=ppt/slides/slide11.xml><?xml version="1.0" encoding="utf-8"?>
+<p:sld xmlns:a="http://schemas.openxmlformats.org/drawingml/2006/main" xmlns:p="http://schemas.openxmlformats.org/presentationml/2006/main" xmlns:r="http://schemas.openxmlformats.org/officeDocument/2006/relationships">
+  <p:cSld>
+    <p:spTree>
+      <p:nvGrpSpPr>
+        <p:cNvPr id="1" name=""/>
+        <p:cNvGrpSpPr/>
+        <p:nvPr/>
+      </p:nvGrpSpPr>
+      <p:grpSpPr/>
+      <p:sp>
+        <p:nvSpPr>
+          <p:cNvPr id="2" name="Rectangle 1"/>
+          <p:cNvSpPr/>
+          <p:nvPr/>
+        </p:nvSpPr>
+        <p:spPr>
+          <a:xfrm>
+            <a:off x="0" y="0"/>
+            <a:ext cx="12192000" cy="1150000"/>
+          </a:xfrm>
+          <a:prstGeom prst="rect">
+            <a:avLst/>
+          </a:prstGeom>
+          <a:solidFill>
+            <a:srgbClr val="010328"/>
+          </a:solidFill>
+          <a:ln>
+            <a:noFill/>
+          </a:ln>
+          <a:effectLst/>
+        </p:spPr>
+        <p:style>
+          <a:lnRef idx="1">
+            <a:schemeClr val="accent1"/>
+          </a:lnRef>
+          <a:fillRef idx="3">
+            <a:schemeClr val="accent1"/>
+          </a:fillRef>
+          <a:effectRef idx="2">
+            <a:schemeClr val="accent1"/>
+          </a:effectRef>
+          <a:fontRef idx="minor">
+            <a:schemeClr val="lt1"/>
+          </a:fontRef>
+        </p:style>
+        <p:txBody>
+          <a:bodyPr rtlCol="0" anchor="ctr"/>
+          <a:lstStyle/>
+          <a:p>
+            <a:pPr algn="ctr"/>
+          </a:p>
+        </p:txBody>
+      </p:sp>
+      <p:sp>
+        <p:nvSpPr>
+          <p:cNvPr id="3" name="Rectangle 2"/>
+          <p:cNvSpPr/>
+          <p:nvPr/>
+        </p:nvSpPr>
+        <p:spPr>
+          <a:xfrm>
+            <a:off x="0" y="1150000"/>
+            <a:ext cx="2600000" cy="70000"/>
+          </a:xfrm>
+          <a:prstGeom prst="rect">
+            <a:avLst/>
+          </a:prstGeom>
+          <a:solidFill>
+            <a:srgbClr val="F5670F"/>
+          </a:solidFill>
+          <a:ln>
+            <a:noFill/>
+          </a:ln>
+          <a:effectLst/>
+        </p:spPr>
+        <p:style>
+          <a:lnRef idx="1">
+            <a:schemeClr val="accent1"/>
+          </a:lnRef>
+          <a:fillRef idx="3">
+            <a:schemeClr val="accent1"/>
+          </a:fillRef>
+          <a:effectRef idx="2">
+            <a:schemeClr val="accent1"/>
+          </a:effectRef>
+          <a:fontRef idx="minor">
+            <a:schemeClr val="lt1"/>
+          </a:fontRef>
+        </p:style>
+        <p:txBody>
+          <a:bodyPr rtlCol="0" anchor="ctr"/>
+          <a:lstStyle/>
+          <a:p>
+            <a:pPr algn="ctr"/>
+          </a:p>
+        </p:txBody>
+      </p:sp>
+      <p:sp>
+        <p:nvSpPr>
+          <p:cNvPr id="4" name="TextBox 3"/>
+          <p:cNvSpPr txBox="1"/>
+          <p:nvPr/>
+        </p:nvSpPr>
+        <p:spPr>
+          <a:xfrm>
+            <a:off x="700000" y="300000"/>
+            <a:ext cx="10792000" cy="700000"/>
+          </a:xfrm>
+          <a:prstGeom prst="rect">
+            <a:avLst/>
+          </a:prstGeom>
+          <a:noFill/>
+        </p:spPr>
+        <p:txBody>
+          <a:bodyPr wrap="square" anchor="t">
+            <a:spAutoFit/>
+          </a:bodyPr>
+          <a:lstStyle/>
+          <a:p>
+            <a:pPr algn="l">
+              <a:lnSpc>
+                <a:spcPct val="110000"/>
+              </a:lnSpc>
+              <a:spcAft>
+                <a:spcPts val="600"/>
+              </a:spcAft>
+            </a:pPr>
+            <a:r>
+              <a:rPr sz="2400" b="1">
+                <a:solidFill>
+                  <a:srgbClr val="FFFFFF"/>
+                </a:solidFill>
+                <a:latin typeface="微软雅黑"/>
+              </a:rPr>
+              <a:t>实测验收 · m41_prompt_lab</a:t>
+            </a:r>
+          </a:p>
+        </p:txBody>
+      </p:sp>
+      <p:sp>
+        <p:nvSpPr>
+          <p:cNvPr id="11" name="Rectangle 10"/>
+          <p:cNvSpPr/>
+          <p:nvPr/>
+        </p:nvSpPr>
+        <p:spPr>
+          <a:xfrm>
+            <a:off x="500000" y="6500000"/>
+            <a:ext cx="11100000" cy="20000"/>
+          </a:xfrm>
+          <a:prstGeom prst="rect">
+            <a:avLst/>
+          </a:prstGeom>
+          <a:solidFill>
+            <a:srgbClr val="C9D4EE"/>
+          </a:solidFill>
+          <a:ln>
+            <a:noFill/>
+          </a:ln>
+          <a:effectLst/>
+        </p:spPr>
+        <p:style>
+          <a:lnRef idx="1">
+            <a:schemeClr val="accent1"/>
+          </a:lnRef>
+          <a:fillRef idx="3">
+            <a:schemeClr val="accent1"/>
+          </a:fillRef>
+          <a:effectRef idx="2">
+            <a:schemeClr val="accent1"/>
+          </a:effectRef>
+          <a:fontRef idx="minor">
+            <a:schemeClr val="lt1"/>
+          </a:fontRef>
+        </p:style>
+        <p:txBody>
+          <a:bodyPr rtlCol="0" anchor="ctr"/>
+          <a:lstStyle/>
+          <a:p>
+            <a:pPr algn="ctr"/>
+          </a:p>
+        </p:txBody>
+      </p:sp>
+      <p:sp>
+        <p:nvSpPr>
+          <p:cNvPr id="12" name="TextBox 11"/>
+          <p:cNvSpPr txBox="1"/>
+          <p:nvPr/>
+        </p:nvSpPr>
+        <p:spPr>
+          <a:xfrm>
+            <a:off x="500000" y="6540000"/>
+            <a:ext cx="7000000" cy="300000"/>
+          </a:xfrm>
+          <a:prstGeom prst="rect">
+            <a:avLst/>
+          </a:prstGeom>
+          <a:noFill/>
+        </p:spPr>
+        <p:txBody>
+          <a:bodyPr wrap="square" anchor="t">
+            <a:spAutoFit/>
+          </a:bodyPr>
+          <a:lstStyle/>
+          <a:p>
+            <a:pPr algn="l">
+              <a:lnSpc>
+                <a:spcPct val="110000"/>
+              </a:lnSpc>
+              <a:spcAft>
+                <a:spcPts val="600"/>
+              </a:spcAft>
+            </a:pPr>
+            <a:r>
+              <a:rPr sz="1000" b="0">
+                <a:solidFill>
+                  <a:srgbClr val="8A97B5"/>
+                </a:solidFill>
+                <a:latin typeface="微软雅黑"/>
+              </a:rPr>
+              <a:t>两江智造集团 · AI应用基础48课时版</a:t>
+            </a:r>
+          </a:p>
+        </p:txBody>
+      </p:sp>
+      <p:sp>
+        <p:nvSpPr>
+          <p:cNvPr id="13" name="TextBox 12"/>
+          <p:cNvSpPr txBox="1"/>
+          <p:nvPr/>
+        </p:nvSpPr>
+        <p:spPr>
+          <a:xfrm>
+            <a:off x="10600000" y="6540000"/>
+            <a:ext cx="1000000" cy="300000"/>
+          </a:xfrm>
+          <a:prstGeom prst="rect">
+            <a:avLst/>
+          </a:prstGeom>
+          <a:noFill/>
+        </p:spPr>
+        <p:txBody>
+          <a:bodyPr wrap="square" anchor="t">
+            <a:spAutoFit/>
+          </a:bodyPr>
+          <a:lstStyle/>
+          <a:p>
+            <a:pPr algn="r">
+              <a:lnSpc>
+                <a:spcPct val="110000"/>
+              </a:lnSpc>
+              <a:spcAft>
+                <a:spcPts val="600"/>
+              </a:spcAft>
+            </a:pPr>
+            <a:r>
+              <a:rPr sz="1000" b="0">
+                <a:solidFill>
+                  <a:srgbClr val="8A97B5"/>
+                </a:solidFill>
+                <a:latin typeface="微软雅黑"/>
+              </a:rPr>
+              <a:t>8 / 12</a:t>
+            </a:r>
+          </a:p>
+        </p:txBody>
+      </p:sp>
+      <p:sp>
+        <p:nvSpPr>
+          <p:cNvPr id="14" name="Rectangle 13"/>
+          <p:cNvSpPr/>
+          <p:nvPr/>
+        </p:nvSpPr>
+        <p:spPr>
+          <a:xfrm>
+            <a:off x="0" y="1371600"/>
+            <a:ext cx="12188952" cy="713232"/>
+          </a:xfrm>
+          <a:prstGeom prst="rect">
+            <a:avLst/>
+          </a:prstGeom>
+          <a:solidFill>
+            <a:srgbClr val="F2F5F9"/>
+          </a:solidFill>
+          <a:ln>
+            <a:noFill/>
+          </a:ln>
+          <a:effectLst/>
+        </p:spPr>
+        <p:style>
+          <a:lnRef idx="1">
+            <a:schemeClr val="accent1"/>
+          </a:lnRef>
+          <a:fillRef idx="3">
+            <a:schemeClr val="accent1"/>
+          </a:fillRef>
+          <a:effectRef idx="2">
+            <a:schemeClr val="accent1"/>
+          </a:effectRef>
+          <a:fontRef idx="minor">
+            <a:schemeClr val="lt1"/>
+          </a:fontRef>
+        </p:style>
+        <p:txBody>
+          <a:bodyPr rtlCol="0" anchor="ctr" wrap="square"/>
+          <a:lstStyle/>
+          <a:p>
+            <a:pPr algn="ctr"/>
+          </a:p>
+        </p:txBody>
+      </p:sp>
+      <p:sp>
+        <p:nvSpPr>
+          <p:cNvPr id="15" name="TextBox 14"/>
+          <p:cNvSpPr txBox="1"/>
+          <p:nvPr/>
+        </p:nvSpPr>
+        <p:spPr>
+          <a:xfrm>
+            <a:off x="457200" y="1426464"/>
+            <a:ext cx="2651760" cy="566928"/>
+          </a:xfrm>
+          <a:prstGeom prst="rect">
+            <a:avLst/>
+          </a:prstGeom>
+          <a:noFill/>
+        </p:spPr>
+        <p:txBody>
+          <a:bodyPr wrap="square">
+            <a:spAutoFit/>
+          </a:bodyPr>
+          <a:lstStyle/>
+          <a:p>
+            <a:r>
+              <a:rPr sz="1400" b="1">
+                <a:solidFill>
+                  <a:srgbClr val="2E7D46"/>
+                </a:solidFill>
+                <a:latin typeface="微软雅黑"/>
+              </a:rPr>
+              <a:t>实测达成档位</a:t>
+            </a:r>
+          </a:p>
+          <a:p>
+            <a:r>
+              <a:rPr sz="1400" b="1">
+                <a:solidFill>
+                  <a:srgbClr val="2E7D46"/>
+                </a:solidFill>
+                <a:latin typeface="微软雅黑"/>
+              </a:rPr>
+              <a:t>优(A)</a:t>
+            </a:r>
+          </a:p>
+        </p:txBody>
+      </p:sp>
+      <p:sp>
+        <p:nvSpPr>
+          <p:cNvPr id="16" name="Rectangle 15"/>
+          <p:cNvSpPr/>
+          <p:nvPr/>
+        </p:nvSpPr>
+        <p:spPr>
+          <a:xfrm>
+            <a:off x="3200400" y="1426464"/>
+            <a:ext cx="1627632" cy="603504"/>
+          </a:xfrm>
+          <a:prstGeom prst="rect">
+            <a:avLst/>
+          </a:prstGeom>
+          <a:solidFill>
+            <a:srgbClr val="FFFFFF"/>
+          </a:solidFill>
+          <a:ln>
+            <a:solidFill>
+              <a:srgbClr val="D6DCE4"/>
+            </a:solidFill>
+          </a:ln>
+          <a:effectLst/>
+        </p:spPr>
+        <p:style>
+          <a:lnRef idx="1">
+            <a:schemeClr val="accent1"/>
+          </a:lnRef>
+          <a:fillRef idx="3">
+            <a:schemeClr val="accent1"/>
+          </a:fillRef>
+          <a:effectRef idx="2">
+            <a:schemeClr val="accent1"/>
+          </a:effectRef>
+          <a:fontRef idx="minor">
+            <a:schemeClr val="lt1"/>
+          </a:fontRef>
+        </p:style>
+        <p:txBody>
+          <a:bodyPr rtlCol="0" anchor="ctr" wrap="square"/>
+          <a:lstStyle/>
+          <a:p>
+            <a:pPr algn="ctr"/>
+          </a:p>
+        </p:txBody>
+      </p:sp>
+      <p:sp>
+        <p:nvSpPr>
+          <p:cNvPr id="17" name="TextBox 16"/>
+          <p:cNvSpPr txBox="1"/>
+          <p:nvPr/>
+        </p:nvSpPr>
+        <p:spPr>
+          <a:xfrm>
+            <a:off x="3246120" y="1463040"/>
+            <a:ext cx="1536192" cy="548640"/>
+          </a:xfrm>
+          <a:prstGeom prst="rect">
+            <a:avLst/>
+          </a:prstGeom>
+          <a:noFill/>
+        </p:spPr>
+        <p:txBody>
+          <a:bodyPr wrap="square">
+            <a:spAutoFit/>
+          </a:bodyPr>
+          <a:lstStyle/>
+          <a:p>
+            <a:r>
+              <a:rPr sz="900" b="0">
+                <a:solidFill>
+                  <a:srgbClr val="35506E"/>
+                </a:solidFill>
+                <a:latin typeface="微软雅黑"/>
+              </a:rPr>
+              <a:t>实测提升 +50%</a:t>
+            </a:r>
+          </a:p>
+        </p:txBody>
+      </p:sp>
+      <p:sp>
+        <p:nvSpPr>
+          <p:cNvPr id="18" name="Rectangle 17"/>
+          <p:cNvSpPr/>
+          <p:nvPr/>
+        </p:nvSpPr>
+        <p:spPr>
+          <a:xfrm>
+            <a:off x="4901184" y="1426464"/>
+            <a:ext cx="1627632" cy="603504"/>
+          </a:xfrm>
+          <a:prstGeom prst="rect">
+            <a:avLst/>
+          </a:prstGeom>
+          <a:solidFill>
+            <a:srgbClr val="FFFFFF"/>
+          </a:solidFill>
+          <a:ln>
+            <a:solidFill>
+              <a:srgbClr val="D6DCE4"/>
+            </a:solidFill>
+          </a:ln>
+          <a:effectLst/>
+        </p:spPr>
+        <p:style>
+          <a:lnRef idx="1">
+            <a:schemeClr val="accent1"/>
+          </a:lnRef>
+          <a:fillRef idx="3">
+            <a:schemeClr val="accent1"/>
+          </a:fillRef>
+          <a:effectRef idx="2">
+            <a:schemeClr val="accent1"/>
+          </a:effectRef>
+          <a:fontRef idx="minor">
+            <a:schemeClr val="lt1"/>
+          </a:fontRef>
+        </p:style>
+        <p:txBody>
+          <a:bodyPr rtlCol="0" anchor="ctr" wrap="square"/>
+          <a:lstStyle/>
+          <a:p>
+            <a:pPr algn="ctr"/>
+          </a:p>
+        </p:txBody>
+      </p:sp>
+      <p:sp>
+        <p:nvSpPr>
+          <p:cNvPr id="19" name="TextBox 18"/>
+          <p:cNvSpPr txBox="1"/>
+          <p:nvPr/>
+        </p:nvSpPr>
+        <p:spPr>
+          <a:xfrm>
+            <a:off x="4946904" y="1463040"/>
+            <a:ext cx="1536192" cy="548640"/>
+          </a:xfrm>
+          <a:prstGeom prst="rect">
+            <a:avLst/>
+          </a:prstGeom>
+          <a:noFill/>
+        </p:spPr>
+        <p:txBody>
+          <a:bodyPr wrap="square">
+            <a:spAutoFit/>
+          </a:bodyPr>
+          <a:lstStyle/>
+          <a:p>
+            <a:r>
+              <a:rPr sz="900" b="0">
+                <a:solidFill>
+                  <a:srgbClr val="35506E"/>
+                </a:solidFill>
+                <a:latin typeface="微软雅黑"/>
+              </a:rPr>
+              <a:t>对比表 3 行</a:t>
+            </a:r>
+          </a:p>
+        </p:txBody>
+      </p:sp>
+      <p:sp>
+        <p:nvSpPr>
+          <p:cNvPr id="20" name="Rectangle 19"/>
+          <p:cNvSpPr/>
+          <p:nvPr/>
+        </p:nvSpPr>
+        <p:spPr>
+          <a:xfrm>
+            <a:off x="6601968" y="1426464"/>
+            <a:ext cx="1627632" cy="603504"/>
+          </a:xfrm>
+          <a:prstGeom prst="rect">
+            <a:avLst/>
+          </a:prstGeom>
+          <a:solidFill>
+            <a:srgbClr val="FFFFFF"/>
+          </a:solidFill>
+          <a:ln>
+            <a:solidFill>
+              <a:srgbClr val="D6DCE4"/>
+            </a:solidFill>
+          </a:ln>
+          <a:effectLst/>
+        </p:spPr>
+        <p:style>
+          <a:lnRef idx="1">
+            <a:schemeClr val="accent1"/>
+          </a:lnRef>
+          <a:fillRef idx="3">
+            <a:schemeClr val="accent1"/>
+          </a:fillRef>
+          <a:effectRef idx="2">
+            <a:schemeClr val="accent1"/>
+          </a:effectRef>
+          <a:fontRef idx="minor">
+            <a:schemeClr val="lt1"/>
+          </a:fontRef>
+        </p:style>
+        <p:txBody>
+          <a:bodyPr rtlCol="0" anchor="ctr" wrap="square"/>
+          <a:lstStyle/>
+          <a:p>
+            <a:pPr algn="ctr"/>
+          </a:p>
+        </p:txBody>
+      </p:sp>
+      <p:sp>
+        <p:nvSpPr>
+          <p:cNvPr id="21" name="TextBox 20"/>
+          <p:cNvSpPr txBox="1"/>
+          <p:nvPr/>
+        </p:nvSpPr>
+        <p:spPr>
+          <a:xfrm>
+            <a:off x="6647688" y="1463040"/>
+            <a:ext cx="1536192" cy="548640"/>
+          </a:xfrm>
+          <a:prstGeom prst="rect">
+            <a:avLst/>
+          </a:prstGeom>
+          <a:noFill/>
+        </p:spPr>
+        <p:txBody>
+          <a:bodyPr wrap="square">
+            <a:spAutoFit/>
+          </a:bodyPr>
+          <a:lstStyle/>
+          <a:p>
+            <a:r>
+              <a:rPr sz="900" b="0">
+                <a:solidFill>
+                  <a:srgbClr val="35506E"/>
+                </a:solidFill>
+                <a:latin typeface="微软雅黑"/>
+              </a:rPr>
+              <a:t>断服降级话术命中=是</a:t>
+            </a:r>
+          </a:p>
+        </p:txBody>
+      </p:sp>
+      <p:sp>
+        <p:nvSpPr>
+          <p:cNvPr id="22" name="Rectangle 21"/>
+          <p:cNvSpPr/>
+          <p:nvPr/>
+        </p:nvSpPr>
+        <p:spPr>
+          <a:xfrm>
+            <a:off x="8302752" y="1426464"/>
+            <a:ext cx="1627632" cy="603504"/>
+          </a:xfrm>
+          <a:prstGeom prst="rect">
+            <a:avLst/>
+          </a:prstGeom>
+          <a:solidFill>
+            <a:srgbClr val="FFFFFF"/>
+          </a:solidFill>
+          <a:ln>
+            <a:solidFill>
+              <a:srgbClr val="D6DCE4"/>
+            </a:solidFill>
+          </a:ln>
+          <a:effectLst/>
+        </p:spPr>
+        <p:style>
+          <a:lnRef idx="1">
+            <a:schemeClr val="accent1"/>
+          </a:lnRef>
+          <a:fillRef idx="3">
+            <a:schemeClr val="accent1"/>
+          </a:fillRef>
+          <a:effectRef idx="2">
+            <a:schemeClr val="accent1"/>
+          </a:effectRef>
+          <a:fontRef idx="minor">
+            <a:schemeClr val="lt1"/>
+          </a:fontRef>
+        </p:style>
+        <p:txBody>
+          <a:bodyPr rtlCol="0" anchor="ctr" wrap="square"/>
+          <a:lstStyle/>
+          <a:p>
+            <a:pPr algn="ctr"/>
+          </a:p>
+        </p:txBody>
+      </p:sp>
+      <p:sp>
+        <p:nvSpPr>
+          <p:cNvPr id="23" name="TextBox 22"/>
+          <p:cNvSpPr txBox="1"/>
+          <p:nvPr/>
+        </p:nvSpPr>
+        <p:spPr>
+          <a:xfrm>
+            <a:off x="8348472" y="1463040"/>
+            <a:ext cx="1536192" cy="548640"/>
+          </a:xfrm>
+          <a:prstGeom prst="rect">
+            <a:avLst/>
+          </a:prstGeom>
+          <a:noFill/>
+        </p:spPr>
+        <p:txBody>
+          <a:bodyPr wrap="square">
+            <a:spAutoFit/>
+          </a:bodyPr>
+          <a:lstStyle/>
+          <a:p>
+            <a:r>
+              <a:rPr sz="900" b="0">
+                <a:solidFill>
+                  <a:srgbClr val="35506E"/>
+                </a:solidFill>
+                <a:latin typeface="微软雅黑"/>
+              </a:rPr>
+              <a:t>决策记录完整=是</a:t>
+            </a:r>
+          </a:p>
+        </p:txBody>
+      </p:sp>
+      <p:sp>
+        <p:nvSpPr>
+          <p:cNvPr id="24" name="Rectangle 23"/>
+          <p:cNvSpPr/>
+          <p:nvPr/>
+        </p:nvSpPr>
+        <p:spPr>
+          <a:xfrm>
+            <a:off x="10003536" y="1426464"/>
+            <a:ext cx="1627632" cy="603504"/>
+          </a:xfrm>
+          <a:prstGeom prst="rect">
+            <a:avLst/>
+          </a:prstGeom>
+          <a:solidFill>
+            <a:srgbClr val="FFFFFF"/>
+          </a:solidFill>
+          <a:ln>
+            <a:solidFill>
+              <a:srgbClr val="D6DCE4"/>
+            </a:solidFill>
+          </a:ln>
+          <a:effectLst/>
+        </p:spPr>
+        <p:style>
+          <a:lnRef idx="1">
+            <a:schemeClr val="accent1"/>
+          </a:lnRef>
+          <a:fillRef idx="3">
+            <a:schemeClr val="accent1"/>
+          </a:fillRef>
+          <a:effectRef idx="2">
+            <a:schemeClr val="accent1"/>
+          </a:effectRef>
+          <a:fontRef idx="minor">
+            <a:schemeClr val="lt1"/>
+          </a:fontRef>
+        </p:style>
+        <p:txBody>
+          <a:bodyPr rtlCol="0" anchor="ctr" wrap="square"/>
+          <a:lstStyle/>
+          <a:p>
+            <a:pPr algn="ctr"/>
+          </a:p>
+        </p:txBody>
+      </p:sp>
+      <p:sp>
+        <p:nvSpPr>
+          <p:cNvPr id="25" name="TextBox 24"/>
+          <p:cNvSpPr txBox="1"/>
+          <p:nvPr/>
+        </p:nvSpPr>
+        <p:spPr>
+          <a:xfrm>
+            <a:off x="10049256" y="1463040"/>
+            <a:ext cx="1536192" cy="548640"/>
+          </a:xfrm>
+          <a:prstGeom prst="rect">
+            <a:avLst/>
+          </a:prstGeom>
+          <a:noFill/>
+        </p:spPr>
+        <p:txBody>
+          <a:bodyPr wrap="square">
+            <a:spAutoFit/>
+          </a:bodyPr>
+          <a:lstStyle/>
+          <a:p>
+            <a:r>
+              <a:rPr sz="900" b="0">
+                <a:solidFill>
+                  <a:srgbClr val="35506E"/>
+                </a:solidFill>
+                <a:latin typeface="微软雅黑"/>
+              </a:rPr>
+              <a:t>多轮 2 轮且上下文保持=是</a:t>
+            </a:r>
+          </a:p>
+        </p:txBody>
+      </p:sp>
+      <p:graphicFrame>
+        <p:nvGraphicFramePr>
+          <p:cNvPr id="26" name="Table 25"/>
+          <p:cNvGraphicFramePr>
+            <a:graphicFrameLocks noGrp="1"/>
+          </p:cNvGraphicFramePr>
+          <p:nvPr/>
+        </p:nvGraphicFramePr>
+        <p:xfrm>
+          <a:off x="457200" y="2212848"/>
+          <a:ext cx="11274552" cy="2834640"/>
+        </p:xfrm>
+        <a:graphic>
+          <a:graphicData uri="http://schemas.openxmlformats.org/drawingml/2006/table">
+            <a:tbl>
+              <a:tblPr firstRow="1" bandRow="1">
+                <a:tableStyleId>{5C22544A-7EE6-4342-B048-85BDC9FD1C3A}</a:tableStyleId>
+              </a:tblPr>
+              <a:tblGrid>
+                <a:gridCol w="1188720"/>
+                <a:gridCol w="5120640"/>
+                <a:gridCol w="3886200"/>
+                <a:gridCol w="1078992"/>
+              </a:tblGrid>
+              <a:tr h="566928">
+                <a:tc>
+                  <a:txBody>
+                    <a:bodyPr/>
+                    <a:lstStyle/>
+                    <a:p>
+                      <a:r>
+                        <a:rPr sz="1050" b="1">
+                          <a:solidFill>
+                            <a:srgbClr val="FFFFFF"/>
+                          </a:solidFill>
+                          <a:latin typeface="微软雅黑"/>
+                        </a:rPr>
+                        <a:t>档位</a:t>
+                      </a:r>
+                    </a:p>
+                  </a:txBody>
+                  <a:tcPr>
+                    <a:solidFill>
+                      <a:srgbClr val="010328"/>
+                    </a:solidFill>
+                  </a:tcPr>
+                </a:tc>
+                <a:tc>
+                  <a:txBody>
+                    <a:bodyPr/>
+                    <a:lstStyle/>
+                    <a:p>
+                      <a:r>
+                        <a:rPr sz="1050" b="1">
+                          <a:solidFill>
+                            <a:srgbClr val="FFFFFF"/>
+                          </a:solidFill>
+                          <a:latin typeface="微软雅黑"/>
+                        </a:rPr>
+                        <a:t>工单验收标准（原文）</a:t>
+                      </a:r>
+                    </a:p>
+                  </a:txBody>
+                  <a:tcPr>
+                    <a:solidFill>
+                      <a:srgbClr val="010328"/>
+                    </a:solidFill>
+                  </a:tcPr>
+                </a:tc>
+                <a:tc>
+                  <a:txBody>
+                    <a:bodyPr/>
+                    <a:lstStyle/>
+                    <a:p>
+                      <a:r>
+                        <a:rPr sz="1050" b="1">
+                          <a:solidFill>
+                            <a:srgbClr val="FFFFFF"/>
+                          </a:solidFill>
+                          <a:latin typeface="微软雅黑"/>
+                        </a:rPr>
+                        <a:t>本次实测判定</a:t>
+                      </a:r>
+                    </a:p>
+                  </a:txBody>
+                  <a:tcPr>
+                    <a:solidFill>
+                      <a:srgbClr val="010328"/>
+                    </a:solidFill>
+                  </a:tcPr>
+                </a:tc>
+                <a:tc>
+                  <a:txBody>
+                    <a:bodyPr/>
+                    <a:lstStyle/>
+                    <a:p>
+                      <a:r>
+                        <a:rPr sz="1050" b="1">
+                          <a:solidFill>
+                            <a:srgbClr val="FFFFFF"/>
+                          </a:solidFill>
+                          <a:latin typeface="微软雅黑"/>
+                        </a:rPr>
+                        <a:t>判定</a:t>
+                      </a:r>
+                    </a:p>
+                  </a:txBody>
+                  <a:tcPr>
+                    <a:solidFill>
+                      <a:srgbClr val="010328"/>
+                    </a:solidFill>
+                  </a:tcPr>
+                </a:tc>
+              </a:tr>
+              <a:tr h="566928">
+                <a:tc>
+                  <a:txBody>
+                    <a:bodyPr/>
+                    <a:lstStyle/>
+                    <a:p>
+                      <a:r>
+                        <a:rPr sz="1000" b="1">
+                          <a:solidFill>
+                            <a:srgbClr val="2B2F36"/>
+                          </a:solidFill>
+                          <a:latin typeface="微软雅黑"/>
+                        </a:rPr>
+                        <a:t>及格(D)</a:t>
+                      </a:r>
+                    </a:p>
+                  </a:txBody>
+                  <a:tcPr>
+                    <a:solidFill>
+                      <a:srgbClr val="FFFFFF"/>
+                    </a:solidFill>
+                  </a:tcPr>
+                </a:tc>
+                <a:tc>
+                  <a:txBody>
+                    <a:bodyPr/>
+                    <a:lstStyle/>
+                    <a:p>
+                      <a:r>
+                        <a:rPr sz="950" b="0">
+                          <a:solidFill>
+                            <a:srgbClr val="2B2F36"/>
+                          </a:solidFill>
+                          <a:latin typeface="微软雅黑"/>
+                        </a:rPr>
+                        <a:t>能出回答</a:t>
+                      </a:r>
+                    </a:p>
+                  </a:txBody>
+                  <a:tcPr>
+                    <a:solidFill>
+                      <a:srgbClr val="FFFFFF"/>
+                    </a:solidFill>
+                  </a:tcPr>
+                </a:tc>
+                <a:tc>
+                  <a:txBody>
+                    <a:bodyPr/>
+                    <a:lstStyle/>
+                    <a:p>
+                      <a:r>
+                        <a:rPr sz="950" b="0">
+                          <a:solidFill>
+                            <a:srgbClr val="2B2F36"/>
+                          </a:solidFill>
+                          <a:latin typeface="微软雅黑"/>
+                        </a:rPr>
+                        <a:t>规范率门槛≥70% [达标] ｜ 功能OK</a:t>
+                      </a:r>
+                    </a:p>
+                  </a:txBody>
+                  <a:tcPr>
+                    <a:solidFill>
+                      <a:srgbClr val="FFFFFF"/>
+                    </a:solidFill>
+                  </a:tcPr>
+                </a:tc>
+                <a:tc>
+                  <a:txBody>
+                    <a:bodyPr/>
+                    <a:lstStyle/>
+                    <a:p>
+                      <a:r>
+                        <a:rPr sz="1000" b="1">
+                          <a:solidFill>
+                            <a:srgbClr val="2E7D46"/>
+                          </a:solidFill>
+                          <a:latin typeface="微软雅黑"/>
+                        </a:rPr>
+                        <a:t>✓ 达标</a:t>
+                      </a:r>
+                    </a:p>
+                  </a:txBody>
+                  <a:tcPr>
+                    <a:solidFill>
+                      <a:srgbClr val="FFFFFF"/>
+                    </a:solidFill>
+                  </a:tcPr>
+                </a:tc>
+              </a:tr>
+              <a:tr h="566928">
+                <a:tc>
+                  <a:txBody>
+                    <a:bodyPr/>
+                    <a:lstStyle/>
+                    <a:p>
+                      <a:r>
+                        <a:rPr sz="1000" b="1">
+                          <a:solidFill>
+                            <a:srgbClr val="2B2F36"/>
+                          </a:solidFill>
+                          <a:latin typeface="微软雅黑"/>
+                        </a:rPr>
+                        <a:t>良好(C)</a:t>
+                      </a:r>
+                    </a:p>
+                  </a:txBody>
+                  <a:tcPr>
+                    <a:solidFill>
+                      <a:srgbClr val="F7F9FB"/>
+                    </a:solidFill>
+                  </a:tcPr>
+                </a:tc>
+                <a:tc>
+                  <a:txBody>
+                    <a:bodyPr/>
+                    <a:lstStyle/>
+                    <a:p>
+                      <a:r>
+                        <a:rPr sz="950" b="0">
+                          <a:solidFill>
+                            <a:srgbClr val="2B2F36"/>
+                          </a:solidFill>
+                          <a:latin typeface="微软雅黑"/>
+                        </a:rPr>
+                        <a:t>提升≥20%加对比表</a:t>
+                      </a:r>
+                    </a:p>
+                  </a:txBody>
+                  <a:tcPr>
+                    <a:solidFill>
+                      <a:srgbClr val="F7F9FB"/>
+                    </a:solidFill>
+                  </a:tcPr>
+                </a:tc>
+                <a:tc>
+                  <a:txBody>
+                    <a:bodyPr/>
+                    <a:lstStyle/>
+                    <a:p>
+                      <a:r>
+                        <a:rPr sz="950" b="0">
+                          <a:solidFill>
+                            <a:srgbClr val="2B2F36"/>
+                          </a:solidFill>
+                          <a:latin typeface="微软雅黑"/>
+                        </a:rPr>
+                        <a:t>提升门槛≥20% ｜ 功能OK</a:t>
+                      </a:r>
+                    </a:p>
+                  </a:txBody>
+                  <a:tcPr>
+                    <a:solidFill>
+                      <a:srgbClr val="F7F9FB"/>
+                    </a:solidFill>
+                  </a:tcPr>
+                </a:tc>
+                <a:tc>
+                  <a:txBody>
+                    <a:bodyPr/>
+                    <a:lstStyle/>
+                    <a:p>
+                      <a:r>
+                        <a:rPr sz="1000" b="1">
+                          <a:solidFill>
+                            <a:srgbClr val="2E7D46"/>
+                          </a:solidFill>
+                          <a:latin typeface="微软雅黑"/>
+                        </a:rPr>
+                        <a:t>✓ 达标</a:t>
+                      </a:r>
+                    </a:p>
+                  </a:txBody>
+                  <a:tcPr>
+                    <a:solidFill>
+                      <a:srgbClr val="F7F9FB"/>
+                    </a:solidFill>
+                  </a:tcPr>
+                </a:tc>
+              </a:tr>
+              <a:tr h="566928">
+                <a:tc>
+                  <a:txBody>
+                    <a:bodyPr/>
+                    <a:lstStyle/>
+                    <a:p>
+                      <a:r>
+                        <a:rPr sz="1000" b="1">
+                          <a:solidFill>
+                            <a:srgbClr val="2B2F36"/>
+                          </a:solidFill>
+                          <a:latin typeface="微软雅黑"/>
+                        </a:rPr>
+                        <a:t>优秀(B)</a:t>
+                      </a:r>
+                    </a:p>
+                  </a:txBody>
+                  <a:tcPr>
+                    <a:solidFill>
+                      <a:srgbClr val="FFFFFF"/>
+                    </a:solidFill>
+                  </a:tcPr>
+                </a:tc>
+                <a:tc>
+                  <a:txBody>
+                    <a:bodyPr/>
+                    <a:lstStyle/>
+                    <a:p>
+                      <a:r>
+                        <a:rPr sz="950" b="0">
+                          <a:solidFill>
+                            <a:srgbClr val="2B2F36"/>
+                          </a:solidFill>
+                          <a:latin typeface="微软雅黑"/>
+                        </a:rPr>
+                        <a:t>断服不崩溃有降级话术；决策记录完整</a:t>
+                      </a:r>
+                    </a:p>
+                  </a:txBody>
+                  <a:tcPr>
+                    <a:solidFill>
+                      <a:srgbClr val="FFFFFF"/>
+                    </a:solidFill>
+                  </a:tcPr>
+                </a:tc>
+                <a:tc>
+                  <a:txBody>
+                    <a:bodyPr/>
+                    <a:lstStyle/>
+                    <a:p>
+                      <a:r>
+                        <a:rPr sz="950" b="0">
+                          <a:solidFill>
+                            <a:srgbClr val="2B2F36"/>
+                          </a:solidFill>
+                          <a:latin typeface="微软雅黑"/>
+                        </a:rPr>
+                        <a:t>功能OK</a:t>
+                      </a:r>
+                    </a:p>
+                  </a:txBody>
+                  <a:tcPr>
+                    <a:solidFill>
+                      <a:srgbClr val="FFFFFF"/>
+                    </a:solidFill>
+                  </a:tcPr>
+                </a:tc>
+                <a:tc>
+                  <a:txBody>
+                    <a:bodyPr/>
+                    <a:lstStyle/>
+                    <a:p>
+                      <a:r>
+                        <a:rPr sz="1000" b="1">
+                          <a:solidFill>
+                            <a:srgbClr val="2E7D46"/>
+                          </a:solidFill>
+                          <a:latin typeface="微软雅黑"/>
+                        </a:rPr>
+                        <a:t>✓ 达标</a:t>
+                      </a:r>
+                    </a:p>
+                  </a:txBody>
+                  <a:tcPr>
+                    <a:solidFill>
+                      <a:srgbClr val="FFFFFF"/>
+                    </a:solidFill>
+                  </a:tcPr>
+                </a:tc>
+              </a:tr>
+              <a:tr h="566928">
+                <a:tc>
+                  <a:txBody>
+                    <a:bodyPr/>
+                    <a:lstStyle/>
+                    <a:p>
+                      <a:r>
+                        <a:rPr sz="1000" b="1">
+                          <a:solidFill>
+                            <a:srgbClr val="2B2F36"/>
+                          </a:solidFill>
+                          <a:latin typeface="微软雅黑"/>
+                        </a:rPr>
+                        <a:t>优(A)</a:t>
+                      </a:r>
+                    </a:p>
+                  </a:txBody>
+                  <a:tcPr>
+                    <a:solidFill>
+                      <a:srgbClr val="F7F9FB"/>
+                    </a:solidFill>
+                  </a:tcPr>
+                </a:tc>
+                <a:tc>
+                  <a:txBody>
+                    <a:bodyPr/>
+                    <a:lstStyle/>
+                    <a:p>
+                      <a:r>
+                        <a:rPr sz="950" b="0">
+                          <a:solidFill>
+                            <a:srgbClr val="2B2F36"/>
+                          </a:solidFill>
+                          <a:latin typeface="微软雅黑"/>
+                        </a:rPr>
+                        <a:t>提升≥35%或多轮对话</a:t>
+                      </a:r>
+                    </a:p>
+                  </a:txBody>
+                  <a:tcPr>
+                    <a:solidFill>
+                      <a:srgbClr val="F7F9FB"/>
+                    </a:solidFill>
+                  </a:tcPr>
+                </a:tc>
+                <a:tc>
+                  <a:txBody>
+                    <a:bodyPr/>
+                    <a:lstStyle/>
+                    <a:p>
+                      <a:r>
+                        <a:rPr sz="950" b="0">
+                          <a:solidFill>
+                            <a:srgbClr val="2B2F36"/>
+                          </a:solidFill>
+                          <a:latin typeface="微软雅黑"/>
+                        </a:rPr>
+                        <a:t>提升门槛≥35%（或多轮） ｜ 功能OK</a:t>
+                      </a:r>
+                    </a:p>
+                  </a:txBody>
+                  <a:tcPr>
+                    <a:solidFill>
+                      <a:srgbClr val="F7F9FB"/>
+                    </a:solidFill>
+                  </a:tcPr>
+                </a:tc>
+                <a:tc>
+                  <a:txBody>
+                    <a:bodyPr/>
+                    <a:lstStyle/>
+                    <a:p>
+                      <a:r>
+                        <a:rPr sz="1000" b="1">
+                          <a:solidFill>
+                            <a:srgbClr val="2E7D46"/>
+                          </a:solidFill>
+                          <a:latin typeface="微软雅黑"/>
+                        </a:rPr>
+                        <a:t>✓ 达标</a:t>
+                      </a:r>
+                    </a:p>
+                  </a:txBody>
+                  <a:tcPr>
+                    <a:solidFill>
+                      <a:srgbClr val="F7F9FB"/>
+                    </a:solidFill>
+                  </a:tcPr>
+                </a:tc>
+              </a:tr>
+            </a:tbl>
+          </a:graphicData>
+        </a:graphic>
+      </p:graphicFrame>
+      <p:sp>
+        <p:nvSpPr>
+          <p:cNvPr id="27" name="Rectangle 26"/>
+          <p:cNvSpPr/>
+          <p:nvPr/>
+        </p:nvSpPr>
+        <p:spPr>
+          <a:xfrm>
+            <a:off x="457200" y="5138928"/>
+            <a:ext cx="11274552" cy="1261872"/>
+          </a:xfrm>
+          <a:prstGeom prst="rect">
+            <a:avLst/>
+          </a:prstGeom>
+          <a:solidFill>
+            <a:srgbClr val="FFF7E8"/>
+          </a:solidFill>
+          <a:ln>
+            <a:solidFill>
+              <a:srgbClr val="E8C88A"/>
+            </a:solidFill>
+          </a:ln>
+          <a:effectLst/>
+        </p:spPr>
+        <p:style>
+          <a:lnRef idx="1">
+            <a:schemeClr val="accent1"/>
+          </a:lnRef>
+          <a:fillRef idx="3">
+            <a:schemeClr val="accent1"/>
+          </a:fillRef>
+          <a:effectRef idx="2">
+            <a:schemeClr val="accent1"/>
+          </a:effectRef>
+          <a:fontRef idx="minor">
+            <a:schemeClr val="lt1"/>
+          </a:fontRef>
+        </p:style>
+        <p:txBody>
+          <a:bodyPr rtlCol="0" anchor="ctr" wrap="square"/>
+          <a:lstStyle/>
+          <a:p>
+            <a:pPr algn="ctr"/>
+          </a:p>
+        </p:txBody>
+      </p:sp>
+      <p:sp>
+        <p:nvSpPr>
+          <p:cNvPr id="28" name="TextBox 27"/>
+          <p:cNvSpPr txBox="1"/>
+          <p:nvPr/>
+        </p:nvSpPr>
+        <p:spPr>
+          <a:xfrm>
+            <a:off x="621792" y="5212080"/>
+            <a:ext cx="10927080" cy="1133856"/>
+          </a:xfrm>
+          <a:prstGeom prst="rect">
+            <a:avLst/>
+          </a:prstGeom>
+          <a:noFill/>
+        </p:spPr>
+        <p:txBody>
+          <a:bodyPr wrap="square">
+            <a:spAutoFit/>
+          </a:bodyPr>
+          <a:lstStyle/>
+          <a:p>
+            <a:r>
+              <a:rPr sz="950" b="0">
+                <a:solidFill>
+                  <a:srgbClr val="6B4E16"/>
+                </a:solidFill>
+                <a:latin typeface="微软雅黑"/>
+              </a:rPr>
+              <a:t>人工答辩项 1 条（代码不代判，答辩现场确认，逐条见下页 report.txt 截图）</a:t>
+            </a:r>
+          </a:p>
+          <a:p>
+            <a:r>
+              <a:rPr sz="950" b="0">
+                <a:solidFill>
+                  <a:srgbClr val="6B4E16"/>
+                </a:solidFill>
+                <a:latin typeface="微软雅黑"/>
+              </a:rPr>
+              <a:t>档位是算出来的：判定值由 run.py 本次真跑产生；工单未给数字的门槛在报告里标注为「兜底口径·非工单数字」。</a:t>
+            </a:r>
+          </a:p>
+          <a:p>
+            <a:r>
+              <a:rPr sz="950" b="0">
+                <a:solidFill>
+                  <a:srgbClr val="6B4E16"/>
+                </a:solidFill>
+                <a:latin typeface="微软雅黑"/>
+              </a:rPr>
+              <a:t>实测值共 6 项，本页只列前 5 项，其余见下页 report.txt 截图。</a:t>
+            </a:r>
+          </a:p>
+        </p:txBody>
+      </p:sp>
+    </p:spTree>
+  </p:cSld>
+  <p:clrMapOvr>
+    <a:masterClrMapping/>
+  </p:clrMapOvr>
+</p:sld>
+</file>
+
+<file path=ppt/slides/slide12.xml><?xml version="1.0" encoding="utf-8"?>
+<p:sld xmlns:a="http://schemas.openxmlformats.org/drawingml/2006/main" xmlns:p="http://schemas.openxmlformats.org/presentationml/2006/main" xmlns:r="http://schemas.openxmlformats.org/officeDocument/2006/relationships">
+  <p:cSld>
+    <p:spTree>
+      <p:nvGrpSpPr>
+        <p:cNvPr id="1" name=""/>
+        <p:cNvGrpSpPr/>
+        <p:nvPr/>
+      </p:nvGrpSpPr>
+      <p:grpSpPr/>
+      <p:sp>
+        <p:nvSpPr>
+          <p:cNvPr id="2" name="Rectangle 1"/>
+          <p:cNvSpPr/>
+          <p:nvPr/>
+        </p:nvSpPr>
+        <p:spPr>
+          <a:xfrm>
+            <a:off x="0" y="0"/>
+            <a:ext cx="12192000" cy="1150000"/>
+          </a:xfrm>
+          <a:prstGeom prst="rect">
+            <a:avLst/>
+          </a:prstGeom>
+          <a:solidFill>
+            <a:srgbClr val="010328"/>
+          </a:solidFill>
+          <a:ln>
+            <a:noFill/>
+          </a:ln>
+          <a:effectLst/>
+        </p:spPr>
+        <p:style>
+          <a:lnRef idx="1">
+            <a:schemeClr val="accent1"/>
+          </a:lnRef>
+          <a:fillRef idx="3">
+            <a:schemeClr val="accent1"/>
+          </a:fillRef>
+          <a:effectRef idx="2">
+            <a:schemeClr val="accent1"/>
+          </a:effectRef>
+          <a:fontRef idx="minor">
+            <a:schemeClr val="lt1"/>
+          </a:fontRef>
+        </p:style>
+        <p:txBody>
+          <a:bodyPr rtlCol="0" anchor="ctr"/>
+          <a:lstStyle/>
+          <a:p>
+            <a:pPr algn="ctr"/>
+          </a:p>
+        </p:txBody>
+      </p:sp>
+      <p:sp>
+        <p:nvSpPr>
+          <p:cNvPr id="3" name="Rectangle 2"/>
+          <p:cNvSpPr/>
+          <p:nvPr/>
+        </p:nvSpPr>
+        <p:spPr>
+          <a:xfrm>
+            <a:off x="0" y="1150000"/>
+            <a:ext cx="2600000" cy="70000"/>
+          </a:xfrm>
+          <a:prstGeom prst="rect">
+            <a:avLst/>
+          </a:prstGeom>
+          <a:solidFill>
+            <a:srgbClr val="F5670F"/>
+          </a:solidFill>
+          <a:ln>
+            <a:noFill/>
+          </a:ln>
+          <a:effectLst/>
+        </p:spPr>
+        <p:style>
+          <a:lnRef idx="1">
+            <a:schemeClr val="accent1"/>
+          </a:lnRef>
+          <a:fillRef idx="3">
+            <a:schemeClr val="accent1"/>
+          </a:fillRef>
+          <a:effectRef idx="2">
+            <a:schemeClr val="accent1"/>
+          </a:effectRef>
+          <a:fontRef idx="minor">
+            <a:schemeClr val="lt1"/>
+          </a:fontRef>
+        </p:style>
+        <p:txBody>
+          <a:bodyPr rtlCol="0" anchor="ctr"/>
+          <a:lstStyle/>
+          <a:p>
+            <a:pPr algn="ctr"/>
+          </a:p>
+        </p:txBody>
+      </p:sp>
+      <p:sp>
+        <p:nvSpPr>
+          <p:cNvPr id="4" name="TextBox 3"/>
+          <p:cNvSpPr txBox="1"/>
+          <p:nvPr/>
+        </p:nvSpPr>
+        <p:spPr>
+          <a:xfrm>
+            <a:off x="700000" y="300000"/>
+            <a:ext cx="10792000" cy="700000"/>
+          </a:xfrm>
+          <a:prstGeom prst="rect">
+            <a:avLst/>
+          </a:prstGeom>
+          <a:noFill/>
+        </p:spPr>
+        <p:txBody>
+          <a:bodyPr wrap="square" anchor="t">
+            <a:spAutoFit/>
+          </a:bodyPr>
+          <a:lstStyle/>
+          <a:p>
+            <a:pPr algn="l">
+              <a:lnSpc>
+                <a:spcPct val="110000"/>
+              </a:lnSpc>
+              <a:spcAft>
+                <a:spcPts val="600"/>
+              </a:spcAft>
+            </a:pPr>
+            <a:r>
+              <a:rPr sz="2400" b="1">
+                <a:solidFill>
+                  <a:srgbClr val="FFFFFF"/>
+                </a:solidFill>
+                <a:latin typeface="微软雅黑"/>
+              </a:rPr>
+              <a:t>实跑截图证据 · m41_prompt_lab</a:t>
+            </a:r>
+          </a:p>
+        </p:txBody>
+      </p:sp>
+      <p:sp>
+        <p:nvSpPr>
+          <p:cNvPr id="11" name="Rectangle 10"/>
+          <p:cNvSpPr/>
+          <p:nvPr/>
+        </p:nvSpPr>
+        <p:spPr>
+          <a:xfrm>
+            <a:off x="500000" y="6500000"/>
+            <a:ext cx="11100000" cy="20000"/>
+          </a:xfrm>
+          <a:prstGeom prst="rect">
+            <a:avLst/>
+          </a:prstGeom>
+          <a:solidFill>
+            <a:srgbClr val="C9D4EE"/>
+          </a:solidFill>
+          <a:ln>
+            <a:noFill/>
+          </a:ln>
+          <a:effectLst/>
+        </p:spPr>
+        <p:style>
+          <a:lnRef idx="1">
+            <a:schemeClr val="accent1"/>
+          </a:lnRef>
+          <a:fillRef idx="3">
+            <a:schemeClr val="accent1"/>
+          </a:fillRef>
+          <a:effectRef idx="2">
+            <a:schemeClr val="accent1"/>
+          </a:effectRef>
+          <a:fontRef idx="minor">
+            <a:schemeClr val="lt1"/>
+          </a:fontRef>
+        </p:style>
+        <p:txBody>
+          <a:bodyPr rtlCol="0" anchor="ctr"/>
+          <a:lstStyle/>
+          <a:p>
+            <a:pPr algn="ctr"/>
+          </a:p>
+        </p:txBody>
+      </p:sp>
+      <p:sp>
+        <p:nvSpPr>
+          <p:cNvPr id="12" name="TextBox 11"/>
+          <p:cNvSpPr txBox="1"/>
+          <p:nvPr/>
+        </p:nvSpPr>
+        <p:spPr>
+          <a:xfrm>
+            <a:off x="500000" y="6540000"/>
+            <a:ext cx="7000000" cy="300000"/>
+          </a:xfrm>
+          <a:prstGeom prst="rect">
+            <a:avLst/>
+          </a:prstGeom>
+          <a:noFill/>
+        </p:spPr>
+        <p:txBody>
+          <a:bodyPr wrap="square" anchor="t">
+            <a:spAutoFit/>
+          </a:bodyPr>
+          <a:lstStyle/>
+          <a:p>
+            <a:pPr algn="l">
+              <a:lnSpc>
+                <a:spcPct val="110000"/>
+              </a:lnSpc>
+              <a:spcAft>
+                <a:spcPts val="600"/>
+              </a:spcAft>
+            </a:pPr>
+            <a:r>
+              <a:rPr sz="1000" b="0">
+                <a:solidFill>
+                  <a:srgbClr val="8A97B5"/>
+                </a:solidFill>
+                <a:latin typeface="微软雅黑"/>
+              </a:rPr>
+              <a:t>两江智造集团 · AI应用基础48课时版</a:t>
+            </a:r>
+          </a:p>
+        </p:txBody>
+      </p:sp>
+      <p:sp>
+        <p:nvSpPr>
+          <p:cNvPr id="13" name="TextBox 12"/>
+          <p:cNvSpPr txBox="1"/>
+          <p:nvPr/>
+        </p:nvSpPr>
+        <p:spPr>
+          <a:xfrm>
+            <a:off x="10600000" y="6540000"/>
+            <a:ext cx="1000000" cy="300000"/>
+          </a:xfrm>
+          <a:prstGeom prst="rect">
+            <a:avLst/>
+          </a:prstGeom>
+          <a:noFill/>
+        </p:spPr>
+        <p:txBody>
+          <a:bodyPr wrap="square" anchor="t">
+            <a:spAutoFit/>
+          </a:bodyPr>
+          <a:lstStyle/>
+          <a:p>
+            <a:pPr algn="r">
+              <a:lnSpc>
+                <a:spcPct val="110000"/>
+              </a:lnSpc>
+              <a:spcAft>
+                <a:spcPts val="600"/>
+              </a:spcAft>
+            </a:pPr>
+            <a:r>
+              <a:rPr sz="1000" b="0">
+                <a:solidFill>
+                  <a:srgbClr val="8A97B5"/>
+                </a:solidFill>
+                <a:latin typeface="微软雅黑"/>
+              </a:rPr>
+              <a:t>9 / 12</a:t>
+            </a:r>
+          </a:p>
+        </p:txBody>
+      </p:sp>
+      <p:sp>
+        <p:nvSpPr>
+          <p:cNvPr id="14" name="Rectangle 13"/>
+          <p:cNvSpPr/>
+          <p:nvPr/>
+        </p:nvSpPr>
+        <p:spPr>
+          <a:xfrm>
+            <a:off x="457200" y="1481328"/>
+            <a:ext cx="5486400" cy="2304288"/>
+          </a:xfrm>
+          <a:prstGeom prst="rect">
+            <a:avLst/>
+          </a:prstGeom>
+          <a:solidFill>
+            <a:srgbClr val="FFFFFF"/>
+          </a:solidFill>
+          <a:ln>
+            <a:solidFill>
+              <a:srgbClr val="D6DCE4"/>
+            </a:solidFill>
+          </a:ln>
+          <a:effectLst/>
+        </p:spPr>
+        <p:style>
+          <a:lnRef idx="1">
+            <a:schemeClr val="accent1"/>
+          </a:lnRef>
+          <a:fillRef idx="3">
+            <a:schemeClr val="accent1"/>
+          </a:fillRef>
+          <a:effectRef idx="2">
+            <a:schemeClr val="accent1"/>
+          </a:effectRef>
+          <a:fontRef idx="minor">
+            <a:schemeClr val="lt1"/>
+          </a:fontRef>
+        </p:style>
+        <p:txBody>
+          <a:bodyPr rtlCol="0" anchor="ctr" wrap="square"/>
+          <a:lstStyle/>
+          <a:p>
+            <a:pPr algn="ctr"/>
+          </a:p>
+        </p:txBody>
+      </p:sp>
+      <p:sp>
+        <p:nvSpPr>
+          <p:cNvPr id="15" name="TextBox 14"/>
+          <p:cNvSpPr txBox="1"/>
+          <p:nvPr/>
+        </p:nvSpPr>
+        <p:spPr>
+          <a:xfrm>
+            <a:off x="530352" y="1517904"/>
+            <a:ext cx="5340096" cy="237744"/>
+          </a:xfrm>
+          <a:prstGeom prst="rect">
+            <a:avLst/>
+          </a:prstGeom>
+          <a:noFill/>
+        </p:spPr>
+        <p:txBody>
+          <a:bodyPr wrap="square">
+            <a:spAutoFit/>
+          </a:bodyPr>
+          <a:lstStyle/>
+          <a:p>
+            <a:r>
+              <a:rPr sz="950" b="1">
+                <a:solidFill>
+                  <a:srgbClr val="010328"/>
+                </a:solidFill>
+                <a:latin typeface="微软雅黑"/>
+              </a:rPr>
+              <a:t>① run.py 实跑终端输出（逐字捕获）</a:t>
+            </a:r>
+          </a:p>
+        </p:txBody>
+      </p:sp>
+      <p:pic>
+        <p:nvPicPr>
+          <p:cNvPr id="16" name="Picture 15" descr="shot_run.png"/>
+          <p:cNvPicPr>
+            <a:picLocks noChangeAspect="1"/>
+          </p:cNvPicPr>
+          <p:nvPr/>
+        </p:nvPicPr>
+        <p:blipFill>
+          <a:blip r:embed="rId2"/>
+          <a:stretch>
+            <a:fillRect/>
+          </a:stretch>
+        </p:blipFill>
+        <p:spPr>
+          <a:xfrm>
+            <a:off x="964038" y="1773936"/>
+            <a:ext cx="4472722" cy="1956816"/>
+          </a:xfrm>
+          <a:prstGeom prst="rect">
+            <a:avLst/>
+          </a:prstGeom>
+        </p:spPr>
+      </p:pic>
+      <p:sp>
+        <p:nvSpPr>
+          <p:cNvPr id="17" name="Rectangle 16"/>
+          <p:cNvSpPr/>
+          <p:nvPr/>
+        </p:nvSpPr>
+        <p:spPr>
+          <a:xfrm>
+            <a:off x="6327648" y="1481328"/>
+            <a:ext cx="5486400" cy="2304288"/>
+          </a:xfrm>
+          <a:prstGeom prst="rect">
+            <a:avLst/>
+          </a:prstGeom>
+          <a:solidFill>
+            <a:srgbClr val="FFFFFF"/>
+          </a:solidFill>
+          <a:ln>
+            <a:solidFill>
+              <a:srgbClr val="D6DCE4"/>
+            </a:solidFill>
+          </a:ln>
+          <a:effectLst/>
+        </p:spPr>
+        <p:style>
+          <a:lnRef idx="1">
+            <a:schemeClr val="accent1"/>
+          </a:lnRef>
+          <a:fillRef idx="3">
+            <a:schemeClr val="accent1"/>
+          </a:fillRef>
+          <a:effectRef idx="2">
+            <a:schemeClr val="accent1"/>
+          </a:effectRef>
+          <a:fontRef idx="minor">
+            <a:schemeClr val="lt1"/>
+          </a:fontRef>
+        </p:style>
+        <p:txBody>
+          <a:bodyPr rtlCol="0" anchor="ctr" wrap="square"/>
+          <a:lstStyle/>
+          <a:p>
+            <a:pPr algn="ctr"/>
+          </a:p>
+        </p:txBody>
+      </p:sp>
+      <p:sp>
+        <p:nvSpPr>
+          <p:cNvPr id="18" name="TextBox 17"/>
+          <p:cNvSpPr txBox="1"/>
+          <p:nvPr/>
+        </p:nvSpPr>
+        <p:spPr>
+          <a:xfrm>
+            <a:off x="6400800" y="1517904"/>
+            <a:ext cx="5340096" cy="237744"/>
+          </a:xfrm>
+          <a:prstGeom prst="rect">
+            <a:avLst/>
+          </a:prstGeom>
+          <a:noFill/>
+        </p:spPr>
+        <p:txBody>
+          <a:bodyPr wrap="square">
+            <a:spAutoFit/>
+          </a:bodyPr>
+          <a:lstStyle/>
+          <a:p>
+            <a:r>
+              <a:rPr sz="950" b="1">
+                <a:solidFill>
+                  <a:srgbClr val="010328"/>
+                </a:solidFill>
+                <a:latin typeface="微软雅黑"/>
+              </a:rPr>
+              <a:t>② pytest 全绿终端输出（逐字捕获）</a:t>
+            </a:r>
+          </a:p>
+        </p:txBody>
+      </p:sp>
+      <p:pic>
+        <p:nvPicPr>
+          <p:cNvPr id="19" name="Picture 18" descr="shot_test.png"/>
+          <p:cNvPicPr>
+            <a:picLocks noChangeAspect="1"/>
+          </p:cNvPicPr>
+          <p:nvPr/>
+        </p:nvPicPr>
+        <p:blipFill>
+          <a:blip r:embed="rId3"/>
+          <a:stretch>
+            <a:fillRect/>
+          </a:stretch>
+        </p:blipFill>
+        <p:spPr>
+          <a:xfrm>
+            <a:off x="6834486" y="1773936"/>
+            <a:ext cx="4472722" cy="1956816"/>
+          </a:xfrm>
+          <a:prstGeom prst="rect">
+            <a:avLst/>
+          </a:prstGeom>
+        </p:spPr>
+      </p:pic>
+      <p:sp>
+        <p:nvSpPr>
+          <p:cNvPr id="20" name="Rectangle 19"/>
+          <p:cNvSpPr/>
+          <p:nvPr/>
+        </p:nvSpPr>
+        <p:spPr>
+          <a:xfrm>
+            <a:off x="457200" y="3877056"/>
+            <a:ext cx="5486400" cy="2304288"/>
+          </a:xfrm>
+          <a:prstGeom prst="rect">
+            <a:avLst/>
+          </a:prstGeom>
+          <a:solidFill>
+            <a:srgbClr val="FFFFFF"/>
+          </a:solidFill>
+          <a:ln>
+            <a:solidFill>
+              <a:srgbClr val="D6DCE4"/>
+            </a:solidFill>
+          </a:ln>
+          <a:effectLst/>
+        </p:spPr>
+        <p:style>
+          <a:lnRef idx="1">
+            <a:schemeClr val="accent1"/>
+          </a:lnRef>
+          <a:fillRef idx="3">
+            <a:schemeClr val="accent1"/>
+          </a:fillRef>
+          <a:effectRef idx="2">
+            <a:schemeClr val="accent1"/>
+          </a:effectRef>
+          <a:fontRef idx="minor">
+            <a:schemeClr val="lt1"/>
+          </a:fontRef>
+        </p:style>
+        <p:txBody>
+          <a:bodyPr rtlCol="0" anchor="ctr" wrap="square"/>
+          <a:lstStyle/>
+          <a:p>
+            <a:pPr algn="ctr"/>
+          </a:p>
+        </p:txBody>
+      </p:sp>
+      <p:sp>
+        <p:nvSpPr>
+          <p:cNvPr id="21" name="TextBox 20"/>
+          <p:cNvSpPr txBox="1"/>
+          <p:nvPr/>
+        </p:nvSpPr>
+        <p:spPr>
+          <a:xfrm>
+            <a:off x="530352" y="3913632"/>
+            <a:ext cx="5340096" cy="237744"/>
+          </a:xfrm>
+          <a:prstGeom prst="rect">
+            <a:avLst/>
+          </a:prstGeom>
+          <a:noFill/>
+        </p:spPr>
+        <p:txBody>
+          <a:bodyPr wrap="square">
+            <a:spAutoFit/>
+          </a:bodyPr>
+          <a:lstStyle/>
+          <a:p>
+            <a:r>
+              <a:rPr sz="950" b="1">
+                <a:solidFill>
+                  <a:srgbClr val="010328"/>
+                </a:solidFill>
+                <a:latin typeface="微软雅黑"/>
+              </a:rPr>
+              <a:t>③ report.txt「验收档位判定（实测）」段</a:t>
+            </a:r>
+          </a:p>
+        </p:txBody>
+      </p:sp>
+      <p:pic>
+        <p:nvPicPr>
+          <p:cNvPr id="22" name="Picture 21" descr="shot_report.png"/>
+          <p:cNvPicPr>
+            <a:picLocks noChangeAspect="1"/>
+          </p:cNvPicPr>
+          <p:nvPr/>
+        </p:nvPicPr>
+        <p:blipFill>
+          <a:blip r:embed="rId4"/>
+          <a:stretch>
+            <a:fillRect/>
+          </a:stretch>
+        </p:blipFill>
+        <p:spPr>
+          <a:xfrm>
+            <a:off x="964038" y="4169664"/>
+            <a:ext cx="4472722" cy="1956816"/>
+          </a:xfrm>
+          <a:prstGeom prst="rect">
+            <a:avLst/>
+          </a:prstGeom>
+        </p:spPr>
+      </p:pic>
+      <p:sp>
+        <p:nvSpPr>
+          <p:cNvPr id="23" name="Rectangle 22"/>
+          <p:cNvSpPr/>
+          <p:nvPr/>
+        </p:nvSpPr>
+        <p:spPr>
+          <a:xfrm>
+            <a:off x="6327648" y="3877056"/>
+            <a:ext cx="5486400" cy="2304288"/>
+          </a:xfrm>
+          <a:prstGeom prst="rect">
+            <a:avLst/>
+          </a:prstGeom>
+          <a:solidFill>
+            <a:srgbClr val="F7F9FB"/>
+          </a:solidFill>
+          <a:ln>
+            <a:solidFill>
+              <a:srgbClr val="D6DCE4"/>
+            </a:solidFill>
+          </a:ln>
+          <a:effectLst/>
+        </p:spPr>
+        <p:style>
+          <a:lnRef idx="1">
+            <a:schemeClr val="accent1"/>
+          </a:lnRef>
+          <a:fillRef idx="3">
+            <a:schemeClr val="accent1"/>
+          </a:fillRef>
+          <a:effectRef idx="2">
+            <a:schemeClr val="accent1"/>
+          </a:effectRef>
+          <a:fontRef idx="minor">
+            <a:schemeClr val="lt1"/>
+          </a:fontRef>
+        </p:style>
+        <p:txBody>
+          <a:bodyPr rtlCol="0" anchor="ctr" wrap="square"/>
+          <a:lstStyle/>
+          <a:p>
+            <a:pPr algn="ctr"/>
+          </a:p>
+        </p:txBody>
+      </p:sp>
+      <p:sp>
+        <p:nvSpPr>
+          <p:cNvPr id="24" name="TextBox 23"/>
+          <p:cNvSpPr txBox="1"/>
+          <p:nvPr/>
+        </p:nvSpPr>
+        <p:spPr>
+          <a:xfrm>
+            <a:off x="6400800" y="3913632"/>
+            <a:ext cx="5340096" cy="237744"/>
+          </a:xfrm>
+          <a:prstGeom prst="rect">
+            <a:avLst/>
+          </a:prstGeom>
+          <a:noFill/>
+        </p:spPr>
+        <p:txBody>
+          <a:bodyPr wrap="square">
+            <a:spAutoFit/>
+          </a:bodyPr>
+          <a:lstStyle/>
+          <a:p>
+            <a:r>
+              <a:rPr sz="950" b="1">
+                <a:solidFill>
+                  <a:srgbClr val="010328"/>
+                </a:solidFill>
+                <a:latin typeface="微软雅黑"/>
+              </a:rPr>
+              <a:t>④ 采集口径（可复现）</a:t>
+            </a:r>
+          </a:p>
+        </p:txBody>
+      </p:sp>
+      <p:sp>
+        <p:nvSpPr>
+          <p:cNvPr id="25" name="TextBox 24"/>
+          <p:cNvSpPr txBox="1"/>
+          <p:nvPr/>
+        </p:nvSpPr>
+        <p:spPr>
+          <a:xfrm>
+            <a:off x="6437376" y="4187952"/>
+            <a:ext cx="5266944" cy="1920240"/>
+          </a:xfrm>
+          <a:prstGeom prst="rect">
+            <a:avLst/>
+          </a:prstGeom>
+          <a:noFill/>
+        </p:spPr>
+        <p:txBody>
+          <a:bodyPr wrap="square">
+            <a:spAutoFit/>
+          </a:bodyPr>
+          <a:lstStyle/>
+          <a:p>
+            <a:r>
+              <a:rPr sz="950" b="0">
+                <a:solidFill>
+                  <a:srgbClr val="2B2F36"/>
+                </a:solidFill>
+                <a:latin typeface="微软雅黑"/>
+              </a:rPr>
+              <a:t>项目：05-AI应用基础48课时版/工程化项目/m41_prompt_lab/</a:t>
+            </a:r>
+          </a:p>
+          <a:p>
+            <a:r>
+              <a:rPr sz="950" b="0">
+                <a:solidFill>
+                  <a:srgbClr val="2B2F36"/>
+                </a:solidFill>
+                <a:latin typeface="微软雅黑"/>
+              </a:rPr>
+              <a:t>命令：/opt/anaconda3/bin/python run.py ｜ /opt/anaconda3/bin/python -m pytest -q</a:t>
+            </a:r>
+          </a:p>
+          <a:p>
+            <a:r>
+              <a:rPr sz="950" b="0">
+                <a:solidFill>
+                  <a:srgbClr val="2B2F36"/>
+                </a:solidFill>
+                <a:latin typeface="微软雅黑"/>
+              </a:rPr>
+              <a:t>采集：工具/ppt97/capture97.py（2026-10-28 10:48 真跑逐字捕获输出）</a:t>
+            </a:r>
+          </a:p>
+          <a:p>
+            <a:r>
+              <a:rPr sz="950" b="0">
+                <a:solidFill>
+                  <a:srgbClr val="2B2F36"/>
+                </a:solidFill>
+                <a:latin typeface="微软雅黑"/>
+              </a:rPr>
+              <a:t>渲染：工具/ppt97/terminal_png.py（终端截图，不改写任何数字）</a:t>
+            </a:r>
+          </a:p>
+          <a:p>
+            <a:r>
+              <a:rPr sz="950" b="0">
+                <a:solidFill>
+                  <a:srgbClr val="2B2F36"/>
+                </a:solidFill>
+                <a:latin typeface="微软雅黑"/>
+              </a:rPr>
+              <a:t>退出码：run=0 ｜ pytest=0</a:t>
+            </a:r>
+          </a:p>
+          <a:p>
+            <a:r>
+              <a:rPr sz="950" b="0">
+                <a:solidFill>
+                  <a:srgbClr val="2B2F36"/>
+                </a:solidFill>
+                <a:latin typeface="微软雅黑"/>
+              </a:rPr>
+              <a:t>档位判定取自 output/report.txt「验收档位判定（实测）」段</a:t>
+            </a:r>
+          </a:p>
+        </p:txBody>
+      </p:sp>
+      <p:sp>
+        <p:nvSpPr>
+          <p:cNvPr id="26" name="TextBox 25"/>
+          <p:cNvSpPr txBox="1"/>
+          <p:nvPr/>
+        </p:nvSpPr>
+        <p:spPr>
+          <a:xfrm>
+            <a:off x="457200" y="6254496"/>
+            <a:ext cx="11247120" cy="201168"/>
+          </a:xfrm>
+          <a:prstGeom prst="rect">
+            <a:avLst/>
+          </a:prstGeom>
+          <a:noFill/>
+        </p:spPr>
+        <p:txBody>
+          <a:bodyPr wrap="square">
+            <a:spAutoFit/>
+          </a:bodyPr>
+          <a:lstStyle/>
+          <a:p>
+            <a:r>
+              <a:rPr sz="900" b="0">
+                <a:solidFill>
+                  <a:srgbClr val="7A8698"/>
+                </a:solidFill>
+                <a:latin typeface="微软雅黑"/>
+              </a:rPr>
+              <a:t>截图内容逐字取自 工具/ppt97/evidence/m41_prompt_lab/（capture97.py 真跑捕获，未改写数字）</a:t>
+            </a:r>
+          </a:p>
+        </p:txBody>
+      </p:sp>
+    </p:spTree>
+  </p:cSld>
+  <p:clrMapOvr>
+    <a:masterClrMapping/>
+  </p:clrMapOvr>
+</p:sld>
+</file>
+
 <file path=ppt/slides/slide2.xml><?xml version="1.0" encoding="utf-8"?>
 <p:sld xmlns:a="http://schemas.openxmlformats.org/drawingml/2006/main" xmlns:p="http://schemas.openxmlformats.org/presentationml/2006/main" xmlns:r="http://schemas.openxmlformats.org/officeDocument/2006/relationships">
   <p:cSld>
@@ -5143,7 +7281,7 @@
                 </a:solidFill>
                 <a:latin typeface="微软雅黑"/>
               </a:rPr>
-              <a:t>2 / 10</a:t>
+              <a:t>2 / 12</a:t>
             </a:r>
           </a:p>
         </p:txBody>
@@ -5617,7 +7755,7 @@
                 </a:solidFill>
                 <a:latin typeface="微软雅黑"/>
               </a:rPr>
-              <a:t>3 / 10</a:t>
+              <a:t>3 / 12</a:t>
             </a:r>
           </a:p>
         </p:txBody>
@@ -6409,7 +8547,7 @@
                 </a:solidFill>
                 <a:latin typeface="微软雅黑"/>
               </a:rPr>
-              <a:t>4 / 10</a:t>
+              <a:t>4 / 12</a:t>
             </a:r>
           </a:p>
         </p:txBody>
@@ -7080,7 +9218,7 @@
                 </a:solidFill>
                 <a:latin typeface="微软雅黑"/>
               </a:rPr>
-              <a:t>5 / 10</a:t>
+              <a:t>5 / 12</a:t>
             </a:r>
           </a:p>
         </p:txBody>
@@ -7356,7 +9494,7 @@
                 </a:solidFill>
                 <a:latin typeface="微软雅黑"/>
               </a:rPr>
-              <a:t>6 / 10</a:t>
+              <a:t>6 / 12</a:t>
             </a:r>
           </a:p>
         </p:txBody>
@@ -7528,142 +9666,77 @@
                   <a:srgbClr val="0545E8"/>
                 </a:solidFill>
               </a:rPr>
-              <a:t>① 参考实现真实运行输出（本工单完成态）</a:t>
-            </a:r>
-          </a:p>
-          <a:p>
-            <a:pPr algn="l">
-              <a:spcBef>
-                <a:spcPts val="100"/>
-              </a:spcBef>
-            </a:pPr>
-            <a:r>
-              <a:rPr sz="1000" b="0">
-                <a:solidFill>
-                  <a:srgbClr val="010328"/>
-                </a:solidFill>
-              </a:rPr>
-              <a:t>=== 工单 M4-1 LLM 故障诊断·三版 Prompt 对比 · 完成态 ===</a:t>
-            </a:r>
-          </a:p>
-          <a:p>
-            <a:pPr algn="l">
-              <a:spcBef>
-                <a:spcPts val="100"/>
-              </a:spcBef>
-            </a:pPr>
-            <a:r>
-              <a:rPr sz="1000" b="0">
-                <a:solidFill>
-                  <a:srgbClr val="010328"/>
-                </a:solidFill>
-              </a:rPr>
-              <a:t>问题（仅给症状，不含诊断关键词）: 3号泵振动在爬升，运转声音发闷，帮我看看。</a:t>
-            </a:r>
-          </a:p>
-          <a:p>
-            <a:pPr algn="l">
-              <a:spcBef>
-                <a:spcPts val="100"/>
-              </a:spcBef>
-            </a:pPr>
-            <a:r>
-              <a:rPr sz="1000" b="0">
-                <a:solidFill>
-                  <a:srgbClr val="010328"/>
-                </a:solidFill>
-              </a:rPr>
-              <a:t>[朴素] 质量分=0.5  较朴素 +0%</a:t>
-            </a:r>
-          </a:p>
-          <a:p>
-            <a:pPr algn="l">
-              <a:spcBef>
-                <a:spcPts val="100"/>
-              </a:spcBef>
-            </a:pPr>
-            <a:r>
-              <a:rPr sz="1000" b="0">
-                <a:solidFill>
-                  <a:srgbClr val="010328"/>
-                </a:solidFill>
-              </a:rPr>
-              <a:t>  回答: 建议：检查电源。</a:t>
-            </a:r>
-          </a:p>
-          <a:p>
-            <a:pPr algn="l">
-              <a:spcBef>
-                <a:spcPts val="100"/>
-              </a:spcBef>
-            </a:pPr>
-            <a:r>
-              <a:rPr sz="1000" b="0">
-                <a:solidFill>
-                  <a:srgbClr val="010328"/>
-                </a:solidFill>
-              </a:rPr>
-              <a:t>[角色] 质量分=1.0  较朴素 +50%</a:t>
-            </a:r>
-          </a:p>
-          <a:p>
-            <a:pPr algn="l">
-              <a:spcBef>
-                <a:spcPts val="100"/>
-              </a:spcBef>
-            </a:pPr>
-            <a:r>
-              <a:rPr sz="1000" b="0">
-                <a:solidFill>
-                  <a:srgbClr val="010328"/>
-                </a:solidFill>
-              </a:rPr>
-              <a:t>  回答: 建议：更换轴承（依据：3号泵振动在爬升，运转声…）</a:t>
-            </a:r>
-          </a:p>
-          <a:p>
-            <a:pPr algn="l">
-              <a:spcBef>
-                <a:spcPts val="100"/>
-              </a:spcBef>
-            </a:pPr>
-            <a:r>
-              <a:rPr sz="1000" b="0">
-                <a:solidFill>
-                  <a:srgbClr val="010328"/>
-                </a:solidFill>
-              </a:rPr>
-              <a:t>[示例] 质量分=1.0  较朴素 +50%</a:t>
-            </a:r>
-          </a:p>
-          <a:p>
-            <a:pPr algn="l">
-              <a:spcBef>
-                <a:spcPts val="100"/>
-              </a:spcBef>
-            </a:pPr>
-            <a:r>
-              <a:rPr sz="1000" b="0">
-                <a:solidFill>
-                  <a:srgbClr val="010328"/>
-                </a:solidFill>
-              </a:rPr>
-              <a:t>  回答: 建议：更换轴承（依据：3号泵振动在爬升，运转声…）</a:t>
-            </a:r>
-          </a:p>
-          <a:p>
-            <a:pPr algn="l">
-              <a:spcBef>
-                <a:spcPts val="100"/>
-              </a:spcBef>
-            </a:pPr>
-            <a:r>
-              <a:rPr sz="1000" b="0">
-                <a:solidFill>
-                  <a:srgbClr val="010328"/>
-                </a:solidFill>
-              </a:rPr>
-              <a:t>说明: 本演示走 starter 的离线规则通道（口径一致、零依赖）；设 OPENAI_BASE_URL 或起 工具/mock…</a:t>
+              <a:t>① 本次真跑实测输出（逐字取自 output/report.txt）</a:t>
+            </a:r>
+          </a:p>
+          <a:p>
+            <a:r>
+              <a:rPr sz="1400" b="1">
+                <a:solidFill>
+                  <a:srgbClr val="0545E8"/>
+                </a:solidFill>
+              </a:rPr>
+              <a:t>实测达成档位: 优(A) ｜ 实测提升 +50% ｜ 对比表 3 行 ｜ 断服降级话术命中=是 ｜ 决策记录完整=是 ｜ 多轮 2 轮且上下文保持=是 ｜ 代码规范率实测 95.5%</a:t>
+            </a:r>
+          </a:p>
+          <a:p>
+            <a:r>
+              <a:rPr sz="1400" b="1">
+                <a:solidFill>
+                  <a:srgbClr val="0545E8"/>
+                </a:solidFill>
+              </a:rPr>
+              <a:t>及格(D)    规范率门槛≥70% [达标] ｜ 功能OK ｜ 能出回答</a:t>
+            </a:r>
+          </a:p>
+          <a:p>
+            <a:r>
+              <a:rPr sz="1400" b="1">
+                <a:solidFill>
+                  <a:srgbClr val="0545E8"/>
+                </a:solidFill>
+              </a:rPr>
+              <a:t>良好(C)    提升门槛≥20% ｜ 功能OK ｜ 提升≥20%加对比表</a:t>
+            </a:r>
+          </a:p>
+          <a:p>
+            <a:r>
+              <a:rPr sz="1400" b="1">
+                <a:solidFill>
+                  <a:srgbClr val="0545E8"/>
+                </a:solidFill>
+              </a:rPr>
+              <a:t>优秀(B)    功能OK ｜ 断服不崩溃有降级话术；决策记录完整</a:t>
+            </a:r>
+          </a:p>
+          <a:p>
+            <a:r>
+              <a:rPr sz="1400" b="1">
+                <a:solidFill>
+                  <a:srgbClr val="0545E8"/>
+                </a:solidFill>
+              </a:rPr>
+              <a:t>优(A)     提升门槛≥35%（或多轮）｜ 功能OK ｜ 提升≥35%或多轮对话</a:t>
+            </a:r>
+          </a:p>
+          <a:p>
+            <a:r>
+              <a:rPr sz="1400" b="1">
+                <a:solidFill>
+                  <a:srgbClr val="0545E8"/>
+                </a:solidFill>
+              </a:rPr>
+              <a:t>人工答辩项 1 条，教师答辩时确认：企业元验收栏：功能可用□ 参数留痕□ 数据可信□（师傅签字）</a:t>
+            </a:r>
+          </a:p>
+          <a:p>
+            <a:r>
+              <a:rPr sz="1400" b="1">
+                <a:solidFill>
+                  <a:srgbClr val="0545E8"/>
+                </a:solidFill>
+              </a:rPr>
+              <a:t>本演示走离线规则通道；设 OPENAI_BASE_URL 与 OPENAI_API_KEY 环境变量即切真机 HTTP 通道（urllib+超时，重试耗尽自动降级，不硬编码任何密钥）</a:t>
             </a:r>
           </a:p>
         </p:txBody>
@@ -8037,7 +10110,7 @@
                 </a:solidFill>
                 <a:latin typeface="微软雅黑"/>
               </a:rPr>
-              <a:t>7 / 10</a:t>
+              <a:t>7 / 12</a:t>
             </a:r>
           </a:p>
         </p:txBody>
@@ -8652,7 +10725,7 @@
                 </a:solidFill>
                 <a:latin typeface="微软雅黑"/>
               </a:rPr>
-              <a:t>8 / 10</a:t>
+              <a:t>10 / 12</a:t>
             </a:r>
           </a:p>
         </p:txBody>
@@ -9417,7 +11490,7 @@
                 </a:solidFill>
                 <a:latin typeface="微软雅黑"/>
               </a:rPr>
-              <a:t>9 / 10</a:t>
+              <a:t>11 / 12</a:t>
             </a:r>
           </a:p>
         </p:txBody>

--- a/V2授课PPT/W17-第18次课-LLM故障诊断（下）：优.pptx
+++ b/V2授课PPT/W17-第18次课-LLM故障诊断（下）：优.pptx
@@ -13,6 +13,8 @@
     <p:sldId id="374" r:id="rId23"/>
     <p:sldId id="375" r:id="rId24"/>
     <p:sldId id="376" r:id="rId25"/>
+    <p:sldId id="377" r:id="rId14"/>
+    <p:sldId id="378" r:id="rId27"/>
     <p:sldId id="319" r:id="rId71"/>
     <p:sldId id="367" r:id="rId16"/>
     <p:sldId id="368" r:id="rId17"/>
@@ -4420,14 +4422,14 @@
       </p:sp>
       <p:sp>
         <p:nvSpPr>
-          <p:cNvPr id="4" name="TextBox 3"/>
+          <p:cNvPr id="6" name="TextBox 5"/>
           <p:cNvSpPr txBox="1"/>
           <p:nvPr/>
         </p:nvSpPr>
         <p:spPr>
           <a:xfrm>
-            <a:off x="700000" y="300000"/>
-            <a:ext cx="10792000" cy="700000"/>
+            <a:off x="1500000" y="300000"/>
+            <a:ext cx="9992000" cy="700000"/>
           </a:xfrm>
           <a:prstGeom prst="rect">
             <a:avLst/>
@@ -4455,14 +4457,14 @@
                 </a:solidFill>
                 <a:latin typeface="微软雅黑"/>
               </a:rPr>
-              <a:t>工单完成效果图 · 先看终点（本课目标预览）</a:t>
-            </a:r>
-          </a:p>
-        </p:txBody>
-      </p:sp>
-      <p:sp>
-        <p:nvSpPr>
-          <p:cNvPr id="11" name="Rectangle 10"/>
+              <a:t>下次课预告 · 带着问题去下一讲</a:t>
+            </a:r>
+          </a:p>
+        </p:txBody>
+      </p:sp>
+      <p:sp>
+        <p:nvSpPr>
+          <p:cNvPr id="17" name="Rectangle 16"/>
           <p:cNvSpPr/>
           <p:nvPr/>
         </p:nvSpPr>
@@ -4506,7 +4508,7 @@
       </p:sp>
       <p:sp>
         <p:nvSpPr>
-          <p:cNvPr id="12" name="TextBox 11"/>
+          <p:cNvPr id="18" name="TextBox 17"/>
           <p:cNvSpPr txBox="1"/>
           <p:nvPr/>
         </p:nvSpPr>
@@ -4548,7 +4550,7 @@
       </p:sp>
       <p:sp>
         <p:nvSpPr>
-          <p:cNvPr id="13" name="TextBox 12"/>
+          <p:cNvPr id="19" name="TextBox 18"/>
           <p:cNvSpPr txBox="1"/>
           <p:nvPr/>
         </p:nvSpPr>
@@ -4583,33 +4585,65 @@
                 </a:solidFill>
                 <a:latin typeface="微软雅黑"/>
               </a:rPr>
-              <a:t>10 / 18</a:t>
-            </a:r>
-          </a:p>
-        </p:txBody>
-      </p:sp>
-      <p:sp>
-        <p:nvSpPr>
-          <p:cNvPr id="14" name="Rounded Rectangle 13"/>
+              <a:t>10 / 20</a:t>
+            </a:r>
+          </a:p>
+        </p:txBody>
+      </p:sp>
+      <p:sp>
+        <p:nvSpPr>
+          <p:cNvPr id="20" name="TextBox 19"/>
+          <p:cNvSpPr txBox="1"/>
+          <p:nvPr/>
+        </p:nvSpPr>
+        <p:spPr>
+          <a:xfrm>
+            <a:off x="457200" y="1389888"/>
+            <a:ext cx="11274552" cy="274320"/>
+          </a:xfrm>
+          <a:prstGeom prst="rect">
+            <a:avLst/>
+          </a:prstGeom>
+          <a:noFill/>
+        </p:spPr>
+        <p:txBody>
+          <a:bodyPr wrap="square">
+            <a:spAutoFit/>
+          </a:bodyPr>
+          <a:lstStyle/>
+          <a:p>
+            <a:r>
+              <a:rPr sz="1050" b="0">
+                <a:solidFill>
+                  <a:srgbClr val="6B7280"/>
+                </a:solidFill>
+                <a:latin typeface="微软雅黑"/>
+              </a:rPr>
+              <a:t>带着问题去下一讲——预习任务与自测问题逐字取自课程安排，课前完成。</a:t>
+            </a:r>
+          </a:p>
+        </p:txBody>
+      </p:sp>
+      <p:sp>
+        <p:nvSpPr>
+          <p:cNvPr id="21" name="Rectangle 20"/>
           <p:cNvSpPr/>
           <p:nvPr/>
         </p:nvSpPr>
         <p:spPr>
           <a:xfrm>
-            <a:off x="758952" y="1801368"/>
-            <a:ext cx="10899648" cy="2286000"/>
-          </a:xfrm>
-          <a:prstGeom prst="roundRect">
-            <a:avLst>
-              <a:gd name="adj" fmla="val 6000"/>
-            </a:avLst>
+            <a:off x="457200" y="1920240"/>
+            <a:ext cx="11274552" cy="960120"/>
+          </a:xfrm>
+          <a:prstGeom prst="rect">
+            <a:avLst/>
           </a:prstGeom>
           <a:solidFill>
-            <a:srgbClr val="F3F6FD"/>
+            <a:srgbClr val="F7F9FC"/>
           </a:solidFill>
-          <a:ln w="9525">
+          <a:ln>
             <a:solidFill>
-              <a:srgbClr val="C9D4EE"/>
+              <a:srgbClr val="D6DCE4"/>
             </a:solidFill>
           </a:ln>
           <a:effectLst/>
@@ -4629,34 +4663,32 @@
           </a:fontRef>
         </p:style>
         <p:txBody>
-          <a:bodyPr rtlCol="0" anchor="ctr"/>
-          <a:lstStyle/>
-          <a:p/>
-        </p:txBody>
-      </p:sp>
-      <p:sp>
-        <p:nvSpPr>
-          <p:cNvPr id="15" name="Rounded Rectangle 14"/>
+          <a:bodyPr rtlCol="0" anchor="ctr" wrap="square"/>
+          <a:lstStyle/>
+          <a:p>
+            <a:pPr algn="ctr"/>
+          </a:p>
+        </p:txBody>
+      </p:sp>
+      <p:sp>
+        <p:nvSpPr>
+          <p:cNvPr id="22" name="Rectangle 21"/>
           <p:cNvSpPr/>
           <p:nvPr/>
         </p:nvSpPr>
         <p:spPr>
           <a:xfrm>
-            <a:off x="758952" y="4178808"/>
-            <a:ext cx="10899648" cy="1051560"/>
-          </a:xfrm>
-          <a:prstGeom prst="roundRect">
-            <a:avLst>
-              <a:gd name="adj" fmla="val 6000"/>
-            </a:avLst>
+            <a:off x="457200" y="1920240"/>
+            <a:ext cx="82296" cy="960120"/>
+          </a:xfrm>
+          <a:prstGeom prst="rect">
+            <a:avLst/>
           </a:prstGeom>
           <a:solidFill>
-            <a:srgbClr val="FFFFFF"/>
+            <a:srgbClr val="2F5D8C"/>
           </a:solidFill>
-          <a:ln w="9525">
-            <a:solidFill>
-              <a:srgbClr val="C9D4EE"/>
-            </a:solidFill>
+          <a:ln>
+            <a:noFill/>
           </a:ln>
           <a:effectLst/>
         </p:spPr>
@@ -4675,33 +4707,67 @@
           </a:fontRef>
         </p:style>
         <p:txBody>
-          <a:bodyPr rtlCol="0" anchor="ctr"/>
-          <a:lstStyle/>
-          <a:p/>
-        </p:txBody>
-      </p:sp>
-      <p:sp>
-        <p:nvSpPr>
-          <p:cNvPr id="16" name="Rounded Rectangle 15"/>
+          <a:bodyPr rtlCol="0" anchor="ctr" wrap="square"/>
+          <a:lstStyle/>
+          <a:p>
+            <a:pPr algn="ctr"/>
+          </a:p>
+        </p:txBody>
+      </p:sp>
+      <p:sp>
+        <p:nvSpPr>
+          <p:cNvPr id="23" name="TextBox 22"/>
+          <p:cNvSpPr txBox="1"/>
+          <p:nvPr/>
+        </p:nvSpPr>
+        <p:spPr>
+          <a:xfrm>
+            <a:off x="685800" y="2084832"/>
+            <a:ext cx="10881360" cy="685800"/>
+          </a:xfrm>
+          <a:prstGeom prst="rect">
+            <a:avLst/>
+          </a:prstGeom>
+          <a:noFill/>
+        </p:spPr>
+        <p:txBody>
+          <a:bodyPr wrap="square">
+            <a:spAutoFit/>
+          </a:bodyPr>
+          <a:lstStyle/>
+          <a:p>
+            <a:r>
+              <a:rPr sz="1050" b="0">
+                <a:solidFill>
+                  <a:srgbClr val="2B2F36"/>
+                </a:solidFill>
+                <a:latin typeface="微软雅黑"/>
+              </a:rPr>
+              <a:t>主题：能搭建最小RAG问答链路——应用：见工单star</a:t>
+            </a:r>
+          </a:p>
+        </p:txBody>
+      </p:sp>
+      <p:sp>
+        <p:nvSpPr>
+          <p:cNvPr id="24" name="Rectangle 23"/>
           <p:cNvSpPr/>
           <p:nvPr/>
         </p:nvSpPr>
         <p:spPr>
           <a:xfrm>
-            <a:off x="758952" y="5321808"/>
-            <a:ext cx="10899648" cy="1005840"/>
-          </a:xfrm>
-          <a:prstGeom prst="roundRect">
-            <a:avLst>
-              <a:gd name="adj" fmla="val 6000"/>
-            </a:avLst>
+            <a:off x="457200" y="3026664"/>
+            <a:ext cx="11274552" cy="960120"/>
+          </a:xfrm>
+          <a:prstGeom prst="rect">
+            <a:avLst/>
           </a:prstGeom>
           <a:solidFill>
-            <a:srgbClr val="FFFFFF"/>
+            <a:srgbClr val="F7F9FC"/>
           </a:solidFill>
-          <a:ln w="9525">
+          <a:ln>
             <a:solidFill>
-              <a:srgbClr val="C9D4EE"/>
+              <a:srgbClr val="D6DCE4"/>
             </a:solidFill>
           </a:ln>
           <a:effectLst/>
@@ -4721,21 +4787,67 @@
           </a:fontRef>
         </p:style>
         <p:txBody>
-          <a:bodyPr rtlCol="0" anchor="ctr"/>
-          <a:lstStyle/>
-          <a:p/>
-        </p:txBody>
-      </p:sp>
-      <p:sp>
-        <p:nvSpPr>
-          <p:cNvPr id="17" name="TextBox 16"/>
+          <a:bodyPr rtlCol="0" anchor="ctr" wrap="square"/>
+          <a:lstStyle/>
+          <a:p>
+            <a:pPr algn="ctr"/>
+          </a:p>
+        </p:txBody>
+      </p:sp>
+      <p:sp>
+        <p:nvSpPr>
+          <p:cNvPr id="25" name="Rectangle 24"/>
+          <p:cNvSpPr/>
+          <p:nvPr/>
+        </p:nvSpPr>
+        <p:spPr>
+          <a:xfrm>
+            <a:off x="457200" y="3026664"/>
+            <a:ext cx="82296" cy="960120"/>
+          </a:xfrm>
+          <a:prstGeom prst="rect">
+            <a:avLst/>
+          </a:prstGeom>
+          <a:solidFill>
+            <a:srgbClr val="2F5D8C"/>
+          </a:solidFill>
+          <a:ln>
+            <a:noFill/>
+          </a:ln>
+          <a:effectLst/>
+        </p:spPr>
+        <p:style>
+          <a:lnRef idx="1">
+            <a:schemeClr val="accent1"/>
+          </a:lnRef>
+          <a:fillRef idx="3">
+            <a:schemeClr val="accent1"/>
+          </a:fillRef>
+          <a:effectRef idx="2">
+            <a:schemeClr val="accent1"/>
+          </a:effectRef>
+          <a:fontRef idx="minor">
+            <a:schemeClr val="lt1"/>
+          </a:fontRef>
+        </p:style>
+        <p:txBody>
+          <a:bodyPr rtlCol="0" anchor="ctr" wrap="square"/>
+          <a:lstStyle/>
+          <a:p>
+            <a:pPr algn="ctr"/>
+          </a:p>
+        </p:txBody>
+      </p:sp>
+      <p:sp>
+        <p:nvSpPr>
+          <p:cNvPr id="26" name="TextBox 25"/>
           <p:cNvSpPr txBox="1"/>
           <p:nvPr/>
         </p:nvSpPr>
         <p:spPr>
           <a:xfrm>
-            <a:off x="960120" y="1929384"/>
-            <a:ext cx="10469880" cy="2048256"/>
+            <a:off x="685800" y="3191256"/>
+            <a:ext cx="10881360" cy="685800"/>
           </a:xfrm>
           <a:prstGeom prst="rect">
             <a:avLst/>
@@ -4743,103 +4855,123 @@
           <a:noFill/>
         </p:spPr>
         <p:txBody>
-          <a:bodyPr wrap="square" anchor="t" lIns="0" rIns="0" tIns="0" bIns="0">
+          <a:bodyPr wrap="square">
             <a:spAutoFit/>
           </a:bodyPr>
           <a:lstStyle/>
           <a:p>
-            <a:pPr algn="l"/>
-            <a:r>
-              <a:rPr sz="1150" b="1">
-                <a:solidFill>
-                  <a:srgbClr val="0545E8"/>
-                </a:solidFill>
-              </a:rPr>
-              <a:t>① 本次真跑实测输出（逐字取自 output/report.txt）</a:t>
-            </a:r>
-          </a:p>
-          <a:p>
-            <a:r>
-              <a:rPr sz="1150" b="1">
-                <a:solidFill>
-                  <a:srgbClr val="0545E8"/>
-                </a:solidFill>
-              </a:rPr>
-              <a:t>实测达成档位: 优(A) ｜ 实测提升 +50% ｜ 对比表 3 行 ｜ 断服降级话术命中=是 ｜ 决策记录完整=是 ｜ 多轮 2 轮且上下文保持=是 ｜ 代码规范率实测 95.5%</a:t>
-            </a:r>
-          </a:p>
-          <a:p>
-            <a:r>
-              <a:rPr sz="1150" b="1">
-                <a:solidFill>
-                  <a:srgbClr val="0545E8"/>
-                </a:solidFill>
-              </a:rPr>
-              <a:t>及格(D)    规范率门槛≥70% [达标] ｜ 功能OK ｜ 能出回答</a:t>
-            </a:r>
-          </a:p>
-          <a:p>
-            <a:r>
-              <a:rPr sz="1150" b="1">
-                <a:solidFill>
-                  <a:srgbClr val="0545E8"/>
-                </a:solidFill>
-              </a:rPr>
-              <a:t>良好(C)    提升门槛≥20% ｜ 功能OK ｜ 提升≥20%加对比表</a:t>
-            </a:r>
-          </a:p>
-          <a:p>
-            <a:r>
-              <a:rPr sz="1150" b="1">
-                <a:solidFill>
-                  <a:srgbClr val="0545E8"/>
-                </a:solidFill>
-              </a:rPr>
-              <a:t>优秀(B)    功能OK ｜ 断服不崩溃有降级话术；决策记录完整</a:t>
-            </a:r>
-          </a:p>
-          <a:p>
-            <a:r>
-              <a:rPr sz="1150" b="1">
-                <a:solidFill>
-                  <a:srgbClr val="0545E8"/>
-                </a:solidFill>
-              </a:rPr>
-              <a:t>优(A)     提升门槛≥35%（或多轮）｜ 功能OK ｜ 提升≥35%或多轮对话</a:t>
-            </a:r>
-          </a:p>
-          <a:p>
-            <a:r>
-              <a:rPr sz="1150" b="1">
-                <a:solidFill>
-                  <a:srgbClr val="0545E8"/>
-                </a:solidFill>
-              </a:rPr>
-              <a:t>人工答辩项 1 条，教师答辩时确认：企业元验收栏：功能可用□ 参数留痕□ 数据可信□（师傅签字）</a:t>
-            </a:r>
-          </a:p>
-          <a:p>
-            <a:r>
-              <a:rPr sz="1150" b="1">
-                <a:solidFill>
-                  <a:srgbClr val="0545E8"/>
-                </a:solidFill>
-              </a:rPr>
-              <a:t>本演示走离线规则通道；设 OPENAI_BASE_URL 与 OPENAI_API_KEY 环境变量即切真机 HTTP 通道（urllib+超时，重试耗尽自动降级，不硬编码任何密钥）</a:t>
-            </a:r>
-          </a:p>
-        </p:txBody>
-      </p:sp>
-      <p:sp>
-        <p:nvSpPr>
-          <p:cNvPr id="18" name="TextBox 17"/>
+            <a:r>
+              <a:rPr sz="1050" b="0">
+                <a:solidFill>
+                  <a:srgbClr val="2B2F36"/>
+                </a:solidFill>
+                <a:latin typeface="微软雅黑"/>
+              </a:rPr>
+              <a:t>预习快问：W17课前测①：本课工单M4-1的及格线是什么？（答：对比表完整+提升≥20%）</a:t>
+            </a:r>
+          </a:p>
+        </p:txBody>
+      </p:sp>
+      <p:sp>
+        <p:nvSpPr>
+          <p:cNvPr id="27" name="Rectangle 26"/>
+          <p:cNvSpPr/>
+          <p:nvPr/>
+        </p:nvSpPr>
+        <p:spPr>
+          <a:xfrm>
+            <a:off x="457200" y="4133087"/>
+            <a:ext cx="11274552" cy="960120"/>
+          </a:xfrm>
+          <a:prstGeom prst="rect">
+            <a:avLst/>
+          </a:prstGeom>
+          <a:solidFill>
+            <a:srgbClr val="F7F9FC"/>
+          </a:solidFill>
+          <a:ln>
+            <a:solidFill>
+              <a:srgbClr val="D6DCE4"/>
+            </a:solidFill>
+          </a:ln>
+          <a:effectLst/>
+        </p:spPr>
+        <p:style>
+          <a:lnRef idx="1">
+            <a:schemeClr val="accent1"/>
+          </a:lnRef>
+          <a:fillRef idx="3">
+            <a:schemeClr val="accent1"/>
+          </a:fillRef>
+          <a:effectRef idx="2">
+            <a:schemeClr val="accent1"/>
+          </a:effectRef>
+          <a:fontRef idx="minor">
+            <a:schemeClr val="lt1"/>
+          </a:fontRef>
+        </p:style>
+        <p:txBody>
+          <a:bodyPr rtlCol="0" anchor="ctr" wrap="square"/>
+          <a:lstStyle/>
+          <a:p>
+            <a:pPr algn="ctr"/>
+          </a:p>
+        </p:txBody>
+      </p:sp>
+      <p:sp>
+        <p:nvSpPr>
+          <p:cNvPr id="28" name="Rectangle 27"/>
+          <p:cNvSpPr/>
+          <p:nvPr/>
+        </p:nvSpPr>
+        <p:spPr>
+          <a:xfrm>
+            <a:off x="457200" y="4133087"/>
+            <a:ext cx="82296" cy="960120"/>
+          </a:xfrm>
+          <a:prstGeom prst="rect">
+            <a:avLst/>
+          </a:prstGeom>
+          <a:solidFill>
+            <a:srgbClr val="2F5D8C"/>
+          </a:solidFill>
+          <a:ln>
+            <a:noFill/>
+          </a:ln>
+          <a:effectLst/>
+        </p:spPr>
+        <p:style>
+          <a:lnRef idx="1">
+            <a:schemeClr val="accent1"/>
+          </a:lnRef>
+          <a:fillRef idx="3">
+            <a:schemeClr val="accent1"/>
+          </a:fillRef>
+          <a:effectRef idx="2">
+            <a:schemeClr val="accent1"/>
+          </a:effectRef>
+          <a:fontRef idx="minor">
+            <a:schemeClr val="lt1"/>
+          </a:fontRef>
+        </p:style>
+        <p:txBody>
+          <a:bodyPr rtlCol="0" anchor="ctr" wrap="square"/>
+          <a:lstStyle/>
+          <a:p>
+            <a:pPr algn="ctr"/>
+          </a:p>
+        </p:txBody>
+      </p:sp>
+      <p:sp>
+        <p:nvSpPr>
+          <p:cNvPr id="29" name="TextBox 28"/>
           <p:cNvSpPr txBox="1"/>
           <p:nvPr/>
         </p:nvSpPr>
         <p:spPr>
           <a:xfrm>
-            <a:off x="960120" y="4297680"/>
-            <a:ext cx="10469880" cy="868680"/>
+            <a:off x="685800" y="4297679"/>
+            <a:ext cx="10881360" cy="685800"/>
           </a:xfrm>
           <a:prstGeom prst="rect">
             <a:avLst/>
@@ -4847,48 +4979,123 @@
           <a:noFill/>
         </p:spPr>
         <p:txBody>
-          <a:bodyPr wrap="square" anchor="t" lIns="0" rIns="0" tIns="0" bIns="0">
+          <a:bodyPr wrap="square">
             <a:spAutoFit/>
           </a:bodyPr>
           <a:lstStyle/>
           <a:p>
-            <a:pPr algn="l"/>
-            <a:r>
-              <a:rPr sz="1300" b="1">
-                <a:solidFill>
-                  <a:srgbClr val="0545E8"/>
-                </a:solidFill>
-              </a:rPr>
-              <a:t>② 关键自检点（对照工单逐项核对）</a:t>
-            </a:r>
-          </a:p>
-          <a:p>
-            <a:pPr algn="l">
-              <a:spcBef>
-                <a:spcPts val="200"/>
-              </a:spcBef>
-            </a:pPr>
-            <a:r>
-              <a:rPr sz="1150" b="0">
-                <a:solidFill>
-                  <a:srgbClr val="010328"/>
-                </a:solidFill>
-              </a:rPr>
-              <a:t>□ 代码从头跑到尾不报错　□ 指标与工单及格线逐项对齐　□ 随机种子已固定（可复现）</a:t>
-            </a:r>
-          </a:p>
-        </p:txBody>
-      </p:sp>
-      <p:sp>
-        <p:nvSpPr>
-          <p:cNvPr id="19" name="TextBox 18"/>
+            <a:r>
+              <a:rPr sz="1050" b="0">
+                <a:solidFill>
+                  <a:srgbClr val="2B2F36"/>
+                </a:solidFill>
+                <a:latin typeface="微软雅黑"/>
+              </a:rPr>
+              <a:t>课前完成：导学单 + 预习自测 + starter环境自检</a:t>
+            </a:r>
+          </a:p>
+        </p:txBody>
+      </p:sp>
+      <p:sp>
+        <p:nvSpPr>
+          <p:cNvPr id="30" name="Rectangle 29"/>
+          <p:cNvSpPr/>
+          <p:nvPr/>
+        </p:nvSpPr>
+        <p:spPr>
+          <a:xfrm>
+            <a:off x="457200" y="5239512"/>
+            <a:ext cx="11274552" cy="960120"/>
+          </a:xfrm>
+          <a:prstGeom prst="rect">
+            <a:avLst/>
+          </a:prstGeom>
+          <a:solidFill>
+            <a:srgbClr val="F7F9FC"/>
+          </a:solidFill>
+          <a:ln>
+            <a:solidFill>
+              <a:srgbClr val="D6DCE4"/>
+            </a:solidFill>
+          </a:ln>
+          <a:effectLst/>
+        </p:spPr>
+        <p:style>
+          <a:lnRef idx="1">
+            <a:schemeClr val="accent1"/>
+          </a:lnRef>
+          <a:fillRef idx="3">
+            <a:schemeClr val="accent1"/>
+          </a:fillRef>
+          <a:effectRef idx="2">
+            <a:schemeClr val="accent1"/>
+          </a:effectRef>
+          <a:fontRef idx="minor">
+            <a:schemeClr val="lt1"/>
+          </a:fontRef>
+        </p:style>
+        <p:txBody>
+          <a:bodyPr rtlCol="0" anchor="ctr" wrap="square"/>
+          <a:lstStyle/>
+          <a:p>
+            <a:pPr algn="ctr"/>
+          </a:p>
+        </p:txBody>
+      </p:sp>
+      <p:sp>
+        <p:nvSpPr>
+          <p:cNvPr id="31" name="Rectangle 30"/>
+          <p:cNvSpPr/>
+          <p:nvPr/>
+        </p:nvSpPr>
+        <p:spPr>
+          <a:xfrm>
+            <a:off x="457200" y="5239512"/>
+            <a:ext cx="82296" cy="960120"/>
+          </a:xfrm>
+          <a:prstGeom prst="rect">
+            <a:avLst/>
+          </a:prstGeom>
+          <a:solidFill>
+            <a:srgbClr val="2F5D8C"/>
+          </a:solidFill>
+          <a:ln>
+            <a:noFill/>
+          </a:ln>
+          <a:effectLst/>
+        </p:spPr>
+        <p:style>
+          <a:lnRef idx="1">
+            <a:schemeClr val="accent1"/>
+          </a:lnRef>
+          <a:fillRef idx="3">
+            <a:schemeClr val="accent1"/>
+          </a:fillRef>
+          <a:effectRef idx="2">
+            <a:schemeClr val="accent1"/>
+          </a:effectRef>
+          <a:fontRef idx="minor">
+            <a:schemeClr val="lt1"/>
+          </a:fontRef>
+        </p:style>
+        <p:txBody>
+          <a:bodyPr rtlCol="0" anchor="ctr" wrap="square"/>
+          <a:lstStyle/>
+          <a:p>
+            <a:pPr algn="ctr"/>
+          </a:p>
+        </p:txBody>
+      </p:sp>
+      <p:sp>
+        <p:nvSpPr>
+          <p:cNvPr id="32" name="TextBox 31"/>
           <p:cNvSpPr txBox="1"/>
           <p:nvPr/>
         </p:nvSpPr>
         <p:spPr>
           <a:xfrm>
-            <a:off x="960120" y="5431536"/>
-            <a:ext cx="10469880" cy="841248"/>
+            <a:off x="685800" y="5404103"/>
+            <a:ext cx="10881360" cy="685800"/>
           </a:xfrm>
           <a:prstGeom prst="rect">
             <a:avLst/>
@@ -4896,34 +5103,19 @@
           <a:noFill/>
         </p:spPr>
         <p:txBody>
-          <a:bodyPr wrap="square" anchor="t" lIns="0" rIns="0" tIns="0" bIns="0">
+          <a:bodyPr wrap="square">
             <a:spAutoFit/>
           </a:bodyPr>
           <a:lstStyle/>
           <a:p>
-            <a:pPr algn="l"/>
-            <a:r>
-              <a:rPr sz="1300" b="1">
-                <a:solidFill>
-                  <a:srgbClr val="F5670F"/>
-                </a:solidFill>
-              </a:rPr>
-              <a:t>③ 提交与达标（过程性证据）</a:t>
-            </a:r>
-          </a:p>
-          <a:p>
-            <a:pPr algn="l">
-              <a:spcBef>
-                <a:spcPts val="200"/>
-              </a:spcBef>
-            </a:pPr>
-            <a:r>
-              <a:rPr sz="1100" b="0">
-                <a:solidFill>
-                  <a:srgbClr val="010328"/>
-                </a:solidFill>
-              </a:rPr>
-              <a:t>达标线 D≥60 / C≥70 / B≥80 / A≥90　｜　提交 学号_姓名_工单号 + 运行截图 + 决策记录 + Git≥1次commit</a:t>
+            <a:r>
+              <a:rPr sz="1050" b="0">
+                <a:solidFill>
+                  <a:srgbClr val="2B2F36"/>
+                </a:solidFill>
+                <a:latin typeface="微软雅黑"/>
+              </a:rPr>
+              <a:t>带着问题：来上课——Predict先于Run</a:t>
             </a:r>
           </a:p>
         </p:txBody>
@@ -5071,27 +5263,27 @@
                 </a:solidFill>
                 <a:latin typeface="微软雅黑"/>
               </a:rPr>
-              <a:t>本工单的工程化项目 · 第三种代码形态</a:t>
-            </a:r>
-          </a:p>
-        </p:txBody>
-      </p:sp>
-      <p:sp>
-        <p:nvSpPr>
-          <p:cNvPr id="11" name="Rectangle 10"/>
+              <a:t>实施任务：工单M4-1《LLM故障诊断（下）：优化与评价》</a:t>
+            </a:r>
+          </a:p>
+        </p:txBody>
+      </p:sp>
+      <p:sp>
+        <p:nvSpPr>
+          <p:cNvPr id="5" name="Rectangle 4"/>
           <p:cNvSpPr/>
           <p:nvPr/>
         </p:nvSpPr>
         <p:spPr>
           <a:xfrm>
-            <a:off x="500000" y="6500000"/>
-            <a:ext cx="11100000" cy="20000"/>
+            <a:off x="800000" y="1950000"/>
+            <a:ext cx="6300000" cy="3900000"/>
           </a:xfrm>
           <a:prstGeom prst="rect">
             <a:avLst/>
           </a:prstGeom>
           <a:solidFill>
-            <a:srgbClr val="C9D4EE"/>
+            <a:srgbClr val="F3F6FD"/>
           </a:solidFill>
           <a:ln>
             <a:noFill/>
@@ -5122,14 +5314,197 @@
       </p:sp>
       <p:sp>
         <p:nvSpPr>
-          <p:cNvPr id="12" name="TextBox 11"/>
+          <p:cNvPr id="6" name="TextBox 5"/>
           <p:cNvSpPr txBox="1"/>
           <p:nvPr/>
         </p:nvSpPr>
         <p:spPr>
           <a:xfrm>
-            <a:off x="500000" y="6540000"/>
-            <a:ext cx="7000000" cy="300000"/>
+            <a:off x="1000000" y="2100000"/>
+            <a:ext cx="5900000" cy="3600000"/>
+          </a:xfrm>
+          <a:prstGeom prst="rect">
+            <a:avLst/>
+          </a:prstGeom>
+          <a:noFill/>
+        </p:spPr>
+        <p:txBody>
+          <a:bodyPr wrap="square" anchor="t">
+            <a:spAutoFit/>
+          </a:bodyPr>
+          <a:lstStyle/>
+          <a:p>
+            <a:pPr algn="l">
+              <a:lnSpc>
+                <a:spcPct val="130000"/>
+              </a:lnSpc>
+              <a:spcAft>
+                <a:spcPts val="600"/>
+              </a:spcAft>
+            </a:pPr>
+            <a:r>
+              <a:rPr sz="1500" b="1">
+                <a:solidFill>
+                  <a:srgbClr val="0545E8"/>
+                </a:solidFill>
+                <a:latin typeface="微软雅黑"/>
+              </a:rPr>
+              <a:t>实施步骤</a:t>
+            </a:r>
+          </a:p>
+          <a:p>
+            <a:pPr algn="l">
+              <a:lnSpc>
+                <a:spcPct val="130000"/>
+              </a:lnSpc>
+              <a:spcAft>
+                <a:spcPts val="600"/>
+              </a:spcAft>
+            </a:pPr>
+            <a:r>
+              <a:rPr sz="1400" b="0">
+                <a:solidFill>
+                  <a:srgbClr val="010328"/>
+                </a:solidFill>
+                <a:latin typeface="微软雅黑"/>
+              </a:rPr>
+              <a:t>1. 错误速查复盘</a:t>
+            </a:r>
+          </a:p>
+          <a:p>
+            <a:pPr algn="l">
+              <a:lnSpc>
+                <a:spcPct val="130000"/>
+              </a:lnSpc>
+              <a:spcAft>
+                <a:spcPts val="600"/>
+              </a:spcAft>
+            </a:pPr>
+            <a:r>
+              <a:rPr sz="1400" b="0">
+                <a:solidFill>
+                  <a:srgbClr val="010328"/>
+                </a:solidFill>
+                <a:latin typeface="微软雅黑"/>
+              </a:rPr>
+              <a:t>2. 优化冲刺（B/A层）</a:t>
+            </a:r>
+          </a:p>
+          <a:p>
+            <a:pPr algn="l">
+              <a:lnSpc>
+                <a:spcPct val="130000"/>
+              </a:lnSpc>
+              <a:spcAft>
+                <a:spcPts val="600"/>
+              </a:spcAft>
+            </a:pPr>
+            <a:r>
+              <a:rPr sz="1400" b="0">
+                <a:solidFill>
+                  <a:srgbClr val="010328"/>
+                </a:solidFill>
+                <a:latin typeface="微软雅黑"/>
+              </a:rPr>
+              <a:t>3. 三层质检互查</a:t>
+            </a:r>
+          </a:p>
+          <a:p>
+            <a:pPr algn="l">
+              <a:lnSpc>
+                <a:spcPct val="130000"/>
+              </a:lnSpc>
+              <a:spcAft>
+                <a:spcPts val="600"/>
+              </a:spcAft>
+            </a:pPr>
+            <a:r>
+              <a:rPr sz="1400" b="0">
+                <a:solidFill>
+                  <a:srgbClr val="010328"/>
+                </a:solidFill>
+                <a:latin typeface="微软雅黑"/>
+              </a:rPr>
+              <a:t>4. 当堂评分与反馈</a:t>
+            </a:r>
+          </a:p>
+          <a:p>
+            <a:pPr algn="l">
+              <a:lnSpc>
+                <a:spcPct val="130000"/>
+              </a:lnSpc>
+              <a:spcAft>
+                <a:spcPts val="600"/>
+              </a:spcAft>
+            </a:pPr>
+            <a:r>
+              <a:rPr sz="1400" b="0">
+                <a:solidFill>
+                  <a:srgbClr val="010328"/>
+                </a:solidFill>
+                <a:latin typeface="微软雅黑"/>
+              </a:rPr>
+              <a:t>5. 下次课预告+微课</a:t>
+            </a:r>
+          </a:p>
+        </p:txBody>
+      </p:sp>
+      <p:sp>
+        <p:nvSpPr>
+          <p:cNvPr id="7" name="Rectangle 6"/>
+          <p:cNvSpPr/>
+          <p:nvPr/>
+        </p:nvSpPr>
+        <p:spPr>
+          <a:xfrm>
+            <a:off x="7400000" y="1950000"/>
+            <a:ext cx="4000000" cy="1850000"/>
+          </a:xfrm>
+          <a:prstGeom prst="rect">
+            <a:avLst/>
+          </a:prstGeom>
+          <a:solidFill>
+            <a:srgbClr val="E8F1E8"/>
+          </a:solidFill>
+          <a:ln>
+            <a:solidFill>
+              <a:srgbClr val="0475B6"/>
+            </a:solidFill>
+          </a:ln>
+          <a:effectLst/>
+        </p:spPr>
+        <p:style>
+          <a:lnRef idx="1">
+            <a:schemeClr val="accent1"/>
+          </a:lnRef>
+          <a:fillRef idx="3">
+            <a:schemeClr val="accent1"/>
+          </a:fillRef>
+          <a:effectRef idx="2">
+            <a:schemeClr val="accent1"/>
+          </a:effectRef>
+          <a:fontRef idx="minor">
+            <a:schemeClr val="lt1"/>
+          </a:fontRef>
+        </p:style>
+        <p:txBody>
+          <a:bodyPr rtlCol="0" anchor="ctr"/>
+          <a:lstStyle/>
+          <a:p>
+            <a:pPr algn="ctr"/>
+          </a:p>
+        </p:txBody>
+      </p:sp>
+      <p:sp>
+        <p:nvSpPr>
+          <p:cNvPr id="8" name="TextBox 7"/>
+          <p:cNvSpPr txBox="1"/>
+          <p:nvPr/>
+        </p:nvSpPr>
+        <p:spPr>
+          <a:xfrm>
+            <a:off x="7550000" y="2080000"/>
+            <a:ext cx="3750000" cy="1650000"/>
           </a:xfrm>
           <a:prstGeom prst="rect">
             <a:avLst/>
@@ -5151,6 +5526,218 @@
               </a:spcAft>
             </a:pPr>
             <a:r>
+              <a:rPr sz="1400" b="1">
+                <a:solidFill>
+                  <a:srgbClr val="0475B6"/>
+                </a:solidFill>
+                <a:latin typeface="微软雅黑"/>
+              </a:rPr>
+              <a:t>及格标准（D）</a:t>
+            </a:r>
+          </a:p>
+          <a:p>
+            <a:pPr algn="l">
+              <a:lnSpc>
+                <a:spcPct val="110000"/>
+              </a:lnSpc>
+              <a:spcAft>
+                <a:spcPts val="600"/>
+              </a:spcAft>
+            </a:pPr>
+            <a:r>
+              <a:rPr sz="1300" b="0">
+                <a:solidFill>
+                  <a:srgbClr val="010328"/>
+                </a:solidFill>
+                <a:latin typeface="微软雅黑"/>
+              </a:rPr>
+              <a:t>对比表完整+提升≥20%</a:t>
+            </a:r>
+          </a:p>
+        </p:txBody>
+      </p:sp>
+      <p:sp>
+        <p:nvSpPr>
+          <p:cNvPr id="9" name="Rectangle 8"/>
+          <p:cNvSpPr/>
+          <p:nvPr/>
+        </p:nvSpPr>
+        <p:spPr>
+          <a:xfrm>
+            <a:off x="7400000" y="3950000"/>
+            <a:ext cx="4000000" cy="1850000"/>
+          </a:xfrm>
+          <a:prstGeom prst="rect">
+            <a:avLst/>
+          </a:prstGeom>
+          <a:solidFill>
+            <a:srgbClr val="FDF0E6"/>
+          </a:solidFill>
+          <a:ln>
+            <a:solidFill>
+              <a:srgbClr val="F5670F"/>
+            </a:solidFill>
+          </a:ln>
+          <a:effectLst/>
+        </p:spPr>
+        <p:style>
+          <a:lnRef idx="1">
+            <a:schemeClr val="accent1"/>
+          </a:lnRef>
+          <a:fillRef idx="3">
+            <a:schemeClr val="accent1"/>
+          </a:fillRef>
+          <a:effectRef idx="2">
+            <a:schemeClr val="accent1"/>
+          </a:effectRef>
+          <a:fontRef idx="minor">
+            <a:schemeClr val="lt1"/>
+          </a:fontRef>
+        </p:style>
+        <p:txBody>
+          <a:bodyPr rtlCol="0" anchor="ctr"/>
+          <a:lstStyle/>
+          <a:p>
+            <a:pPr algn="ctr"/>
+          </a:p>
+        </p:txBody>
+      </p:sp>
+      <p:sp>
+        <p:nvSpPr>
+          <p:cNvPr id="10" name="TextBox 9"/>
+          <p:cNvSpPr txBox="1"/>
+          <p:nvPr/>
+        </p:nvSpPr>
+        <p:spPr>
+          <a:xfrm>
+            <a:off x="7550000" y="4080000"/>
+            <a:ext cx="3750000" cy="1650000"/>
+          </a:xfrm>
+          <a:prstGeom prst="rect">
+            <a:avLst/>
+          </a:prstGeom>
+          <a:noFill/>
+        </p:spPr>
+        <p:txBody>
+          <a:bodyPr wrap="square" anchor="t">
+            <a:spAutoFit/>
+          </a:bodyPr>
+          <a:lstStyle/>
+          <a:p>
+            <a:pPr algn="l">
+              <a:lnSpc>
+                <a:spcPct val="110000"/>
+              </a:lnSpc>
+              <a:spcAft>
+                <a:spcPts val="600"/>
+              </a:spcAft>
+            </a:pPr>
+            <a:r>
+              <a:rPr sz="1400" b="1">
+                <a:solidFill>
+                  <a:srgbClr val="F5670F"/>
+                </a:solidFill>
+                <a:latin typeface="微软雅黑"/>
+              </a:rPr>
+              <a:t>优秀标准（B+）</a:t>
+            </a:r>
+          </a:p>
+          <a:p>
+            <a:pPr algn="l">
+              <a:lnSpc>
+                <a:spcPct val="110000"/>
+              </a:lnSpc>
+              <a:spcAft>
+                <a:spcPts val="600"/>
+              </a:spcAft>
+            </a:pPr>
+            <a:r>
+              <a:rPr sz="1300" b="0">
+                <a:solidFill>
+                  <a:srgbClr val="010328"/>
+                </a:solidFill>
+                <a:latin typeface="微软雅黑"/>
+              </a:rPr>
+              <a:t>提升≥35%或自创模板</a:t>
+            </a:r>
+          </a:p>
+        </p:txBody>
+      </p:sp>
+      <p:sp>
+        <p:nvSpPr>
+          <p:cNvPr id="11" name="Rectangle 10"/>
+          <p:cNvSpPr/>
+          <p:nvPr/>
+        </p:nvSpPr>
+        <p:spPr>
+          <a:xfrm>
+            <a:off x="500000" y="6500000"/>
+            <a:ext cx="11100000" cy="20000"/>
+          </a:xfrm>
+          <a:prstGeom prst="rect">
+            <a:avLst/>
+          </a:prstGeom>
+          <a:solidFill>
+            <a:srgbClr val="C9D4EE"/>
+          </a:solidFill>
+          <a:ln>
+            <a:noFill/>
+          </a:ln>
+          <a:effectLst/>
+        </p:spPr>
+        <p:style>
+          <a:lnRef idx="1">
+            <a:schemeClr val="accent1"/>
+          </a:lnRef>
+          <a:fillRef idx="3">
+            <a:schemeClr val="accent1"/>
+          </a:fillRef>
+          <a:effectRef idx="2">
+            <a:schemeClr val="accent1"/>
+          </a:effectRef>
+          <a:fontRef idx="minor">
+            <a:schemeClr val="lt1"/>
+          </a:fontRef>
+        </p:style>
+        <p:txBody>
+          <a:bodyPr rtlCol="0" anchor="ctr"/>
+          <a:lstStyle/>
+          <a:p>
+            <a:pPr algn="ctr"/>
+          </a:p>
+        </p:txBody>
+      </p:sp>
+      <p:sp>
+        <p:nvSpPr>
+          <p:cNvPr id="12" name="TextBox 11"/>
+          <p:cNvSpPr txBox="1"/>
+          <p:nvPr/>
+        </p:nvSpPr>
+        <p:spPr>
+          <a:xfrm>
+            <a:off x="500000" y="6540000"/>
+            <a:ext cx="7000000" cy="300000"/>
+          </a:xfrm>
+          <a:prstGeom prst="rect">
+            <a:avLst/>
+          </a:prstGeom>
+          <a:noFill/>
+        </p:spPr>
+        <p:txBody>
+          <a:bodyPr wrap="square" anchor="t">
+            <a:spAutoFit/>
+          </a:bodyPr>
+          <a:lstStyle/>
+          <a:p>
+            <a:pPr algn="l">
+              <a:lnSpc>
+                <a:spcPct val="110000"/>
+              </a:lnSpc>
+              <a:spcAft>
+                <a:spcPts val="600"/>
+              </a:spcAft>
+            </a:pPr>
+            <a:r>
               <a:rPr sz="1000" b="0">
                 <a:solidFill>
                   <a:srgbClr val="8A97B5"/>
@@ -5199,346 +5786,7 @@
                 </a:solidFill>
                 <a:latin typeface="微软雅黑"/>
               </a:rPr>
-              <a:t>11 / 18</a:t>
-            </a:r>
-          </a:p>
-        </p:txBody>
-      </p:sp>
-      <p:sp>
-        <p:nvSpPr>
-          <p:cNvPr id="14" name="Rounded Rectangle 13"/>
-          <p:cNvSpPr/>
-          <p:nvPr/>
-        </p:nvSpPr>
-        <p:spPr>
-          <a:xfrm>
-            <a:off x="758952" y="1801368"/>
-            <a:ext cx="10899648" cy="2286000"/>
-          </a:xfrm>
-          <a:prstGeom prst="roundRect">
-            <a:avLst>
-              <a:gd name="adj" fmla="val 6000"/>
-            </a:avLst>
-          </a:prstGeom>
-          <a:solidFill>
-            <a:srgbClr val="F3F6FD"/>
-          </a:solidFill>
-          <a:ln w="9525">
-            <a:solidFill>
-              <a:srgbClr val="C9D4EE"/>
-            </a:solidFill>
-          </a:ln>
-          <a:effectLst/>
-        </p:spPr>
-        <p:style>
-          <a:lnRef idx="1">
-            <a:schemeClr val="accent1"/>
-          </a:lnRef>
-          <a:fillRef idx="3">
-            <a:schemeClr val="accent1"/>
-          </a:fillRef>
-          <a:effectRef idx="2">
-            <a:schemeClr val="accent1"/>
-          </a:effectRef>
-          <a:fontRef idx="minor">
-            <a:schemeClr val="lt1"/>
-          </a:fontRef>
-        </p:style>
-        <p:txBody>
-          <a:bodyPr rtlCol="0" anchor="ctr"/>
-          <a:lstStyle/>
-          <a:p/>
-        </p:txBody>
-      </p:sp>
-      <p:sp>
-        <p:nvSpPr>
-          <p:cNvPr id="15" name="Rounded Rectangle 14"/>
-          <p:cNvSpPr/>
-          <p:nvPr/>
-        </p:nvSpPr>
-        <p:spPr>
-          <a:xfrm>
-            <a:off x="758952" y="4178808"/>
-            <a:ext cx="10899648" cy="1051560"/>
-          </a:xfrm>
-          <a:prstGeom prst="roundRect">
-            <a:avLst>
-              <a:gd name="adj" fmla="val 6000"/>
-            </a:avLst>
-          </a:prstGeom>
-          <a:solidFill>
-            <a:srgbClr val="FFFFFF"/>
-          </a:solidFill>
-          <a:ln w="9525">
-            <a:solidFill>
-              <a:srgbClr val="C9D4EE"/>
-            </a:solidFill>
-          </a:ln>
-          <a:effectLst/>
-        </p:spPr>
-        <p:style>
-          <a:lnRef idx="1">
-            <a:schemeClr val="accent1"/>
-          </a:lnRef>
-          <a:fillRef idx="3">
-            <a:schemeClr val="accent1"/>
-          </a:fillRef>
-          <a:effectRef idx="2">
-            <a:schemeClr val="accent1"/>
-          </a:effectRef>
-          <a:fontRef idx="minor">
-            <a:schemeClr val="lt1"/>
-          </a:fontRef>
-        </p:style>
-        <p:txBody>
-          <a:bodyPr rtlCol="0" anchor="ctr"/>
-          <a:lstStyle/>
-          <a:p/>
-        </p:txBody>
-      </p:sp>
-      <p:sp>
-        <p:nvSpPr>
-          <p:cNvPr id="16" name="Rounded Rectangle 15"/>
-          <p:cNvSpPr/>
-          <p:nvPr/>
-        </p:nvSpPr>
-        <p:spPr>
-          <a:xfrm>
-            <a:off x="758952" y="5321808"/>
-            <a:ext cx="10899648" cy="1005840"/>
-          </a:xfrm>
-          <a:prstGeom prst="roundRect">
-            <a:avLst>
-              <a:gd name="adj" fmla="val 6000"/>
-            </a:avLst>
-          </a:prstGeom>
-          <a:solidFill>
-            <a:srgbClr val="FFFFFF"/>
-          </a:solidFill>
-          <a:ln w="9525">
-            <a:solidFill>
-              <a:srgbClr val="C9D4EE"/>
-            </a:solidFill>
-          </a:ln>
-          <a:effectLst/>
-        </p:spPr>
-        <p:style>
-          <a:lnRef idx="1">
-            <a:schemeClr val="accent1"/>
-          </a:lnRef>
-          <a:fillRef idx="3">
-            <a:schemeClr val="accent1"/>
-          </a:fillRef>
-          <a:effectRef idx="2">
-            <a:schemeClr val="accent1"/>
-          </a:effectRef>
-          <a:fontRef idx="minor">
-            <a:schemeClr val="lt1"/>
-          </a:fontRef>
-        </p:style>
-        <p:txBody>
-          <a:bodyPr rtlCol="0" anchor="ctr"/>
-          <a:lstStyle/>
-          <a:p/>
-        </p:txBody>
-      </p:sp>
-      <p:sp>
-        <p:nvSpPr>
-          <p:cNvPr id="17" name="TextBox 16"/>
-          <p:cNvSpPr txBox="1"/>
-          <p:nvPr/>
-        </p:nvSpPr>
-        <p:spPr>
-          <a:xfrm>
-            <a:off x="960120" y="1929384"/>
-            <a:ext cx="10469880" cy="2048256"/>
-          </a:xfrm>
-          <a:prstGeom prst="rect">
-            <a:avLst/>
-          </a:prstGeom>
-          <a:noFill/>
-        </p:spPr>
-        <p:txBody>
-          <a:bodyPr wrap="square" anchor="t" lIns="0" rIns="0" tIns="0" bIns="0">
-            <a:spAutoFit/>
-          </a:bodyPr>
-          <a:lstStyle/>
-          <a:p>
-            <a:pPr algn="l"/>
-            <a:r>
-              <a:rPr sz="1400" b="1">
-                <a:solidFill>
-                  <a:srgbClr val="0545E8"/>
-                </a:solidFill>
-              </a:rPr>
-              <a:t>① 项目位置与一键运行</a:t>
-            </a:r>
-          </a:p>
-          <a:p>
-            <a:pPr algn="l"/>
-            <a:r>
-              <a:rPr sz="1400" b="1">
-                <a:solidFill>
-                  <a:srgbClr val="0545E8"/>
-                </a:solidFill>
-              </a:rPr>
-              <a:t>工程化项目/m41_prompt_lab/</a:t>
-            </a:r>
-          </a:p>
-          <a:p>
-            <a:pPr algn="l"/>
-            <a:r>
-              <a:rPr sz="1400" b="1">
-                <a:solidFill>
-                  <a:srgbClr val="0545E8"/>
-                </a:solidFill>
-              </a:rPr>
-              <a:t>python run.py          # 输出 output/report.txt + result.json</a:t>
-            </a:r>
-          </a:p>
-          <a:p>
-            <a:pPr algn="l"/>
-            <a:r>
-              <a:rPr sz="1400" b="1">
-                <a:solidFill>
-                  <a:srgbClr val="0545E8"/>
-                </a:solidFill>
-              </a:rPr>
-              <a:t>python -m pytest -q    # 全量测试应全绿</a:t>
-            </a:r>
-          </a:p>
-        </p:txBody>
-      </p:sp>
-      <p:sp>
-        <p:nvSpPr>
-          <p:cNvPr id="18" name="TextBox 17"/>
-          <p:cNvSpPr txBox="1"/>
-          <p:nvPr/>
-        </p:nvSpPr>
-        <p:spPr>
-          <a:xfrm>
-            <a:off x="960120" y="4297680"/>
-            <a:ext cx="10469880" cy="868680"/>
-          </a:xfrm>
-          <a:prstGeom prst="rect">
-            <a:avLst/>
-          </a:prstGeom>
-          <a:noFill/>
-        </p:spPr>
-        <p:txBody>
-          <a:bodyPr wrap="square" anchor="t" lIns="0" rIns="0" tIns="0" bIns="0">
-            <a:spAutoFit/>
-          </a:bodyPr>
-          <a:lstStyle/>
-          <a:p>
-            <a:pPr algn="l"/>
-            <a:r>
-              <a:rPr sz="1300" b="1">
-                <a:solidFill>
-                  <a:srgbClr val="0545E8"/>
-                </a:solidFill>
-              </a:rPr>
-              <a:t>② 目录结构（23 个文件）</a:t>
-            </a:r>
-          </a:p>
-          <a:p>
-            <a:pPr algn="l"/>
-            <a:r>
-              <a:rPr sz="1300" b="1">
-                <a:solidFill>
-                  <a:srgbClr val="0545E8"/>
-                </a:solidFill>
-              </a:rPr>
-              <a:t>config/rules.yaml      规则外置：改配置不改代码</a:t>
-            </a:r>
-          </a:p>
-          <a:p>
-            <a:pPr algn="l"/>
-            <a:r>
-              <a:rPr sz="1300" b="1">
-                <a:solidFill>
-                  <a:srgbClr val="0545E8"/>
-                </a:solidFill>
-              </a:rPr>
-              <a:t>src/prompt_lab/  config · core · io_utils · report · pipeline</a:t>
-            </a:r>
-          </a:p>
-          <a:p>
-            <a:pPr algn="l"/>
-            <a:r>
-              <a:rPr sz="1300" b="1">
-                <a:solidFill>
-                  <a:srgbClr val="0545E8"/>
-                </a:solidFill>
-              </a:rPr>
-              <a:t>tests/      正常 / 边界 / 异常三档</a:t>
-            </a:r>
-          </a:p>
-        </p:txBody>
-      </p:sp>
-      <p:sp>
-        <p:nvSpPr>
-          <p:cNvPr id="19" name="TextBox 18"/>
-          <p:cNvSpPr txBox="1"/>
-          <p:nvPr/>
-        </p:nvSpPr>
-        <p:spPr>
-          <a:xfrm>
-            <a:off x="960120" y="5431536"/>
-            <a:ext cx="10469880" cy="841248"/>
-          </a:xfrm>
-          <a:prstGeom prst="rect">
-            <a:avLst/>
-          </a:prstGeom>
-          <a:noFill/>
-        </p:spPr>
-        <p:txBody>
-          <a:bodyPr wrap="square" anchor="t" lIns="0" rIns="0" tIns="0" bIns="0">
-            <a:spAutoFit/>
-          </a:bodyPr>
-          <a:lstStyle/>
-          <a:p>
-            <a:pPr algn="l"/>
-            <a:r>
-              <a:rPr sz="1300" b="1">
-                <a:solidFill>
-                  <a:srgbClr val="F5670F"/>
-                </a:solidFill>
-              </a:rPr>
-              <a:t>③ 国标与 TOGAF 落地</a:t>
-            </a:r>
-          </a:p>
-          <a:p>
-            <a:pPr algn="l"/>
-            <a:r>
-              <a:rPr sz="1300" b="1">
-                <a:solidFill>
-                  <a:srgbClr val="F5670F"/>
-                </a:solidFill>
-              </a:rPr>
-              <a:t>GB/T 9385 需求规格 / 15532 测试 / 8567 文档 / 8566 过程组</a:t>
-            </a:r>
-          </a:p>
-          <a:p>
-            <a:pPr algn="l"/>
-            <a:r>
-              <a:rPr sz="1300" b="1">
-                <a:solidFill>
-                  <a:srgbClr val="F5670F"/>
-                </a:solidFill>
-              </a:rPr>
-              <a:t>TOGAF 四域：业务 · 数据 · 应用 · 技术架构</a:t>
-            </a:r>
-          </a:p>
-          <a:p>
-            <a:pPr algn="l"/>
-            <a:r>
-              <a:rPr sz="1300" b="1">
-                <a:solidFill>
-                  <a:srgbClr val="F5670F"/>
-                </a:solidFill>
-              </a:rPr>
-              <a:t>docs/07 ADR-001 架构决策记录</a:t>
+              <a:t>11 / 20</a:t>
             </a:r>
           </a:p>
         </p:txBody>
@@ -5686,7 +5934,7 @@
                 </a:solidFill>
                 <a:latin typeface="微软雅黑"/>
               </a:rPr>
-              <a:t>实测验收 · m41_prompt_lab</a:t>
+              <a:t>工单完成效果图 · 先看终点（本课目标预览）</a:t>
             </a:r>
           </a:p>
         </p:txBody>
@@ -5814,7 +6062,1238 @@
                 </a:solidFill>
                 <a:latin typeface="微软雅黑"/>
               </a:rPr>
-              <a:t>12 / 18</a:t>
+              <a:t>12 / 20</a:t>
+            </a:r>
+          </a:p>
+        </p:txBody>
+      </p:sp>
+      <p:sp>
+        <p:nvSpPr>
+          <p:cNvPr id="14" name="Rounded Rectangle 13"/>
+          <p:cNvSpPr/>
+          <p:nvPr/>
+        </p:nvSpPr>
+        <p:spPr>
+          <a:xfrm>
+            <a:off x="758952" y="1801368"/>
+            <a:ext cx="10899648" cy="2286000"/>
+          </a:xfrm>
+          <a:prstGeom prst="roundRect">
+            <a:avLst>
+              <a:gd name="adj" fmla="val 6000"/>
+            </a:avLst>
+          </a:prstGeom>
+          <a:solidFill>
+            <a:srgbClr val="F3F6FD"/>
+          </a:solidFill>
+          <a:ln w="9525">
+            <a:solidFill>
+              <a:srgbClr val="C9D4EE"/>
+            </a:solidFill>
+          </a:ln>
+          <a:effectLst/>
+        </p:spPr>
+        <p:style>
+          <a:lnRef idx="1">
+            <a:schemeClr val="accent1"/>
+          </a:lnRef>
+          <a:fillRef idx="3">
+            <a:schemeClr val="accent1"/>
+          </a:fillRef>
+          <a:effectRef idx="2">
+            <a:schemeClr val="accent1"/>
+          </a:effectRef>
+          <a:fontRef idx="minor">
+            <a:schemeClr val="lt1"/>
+          </a:fontRef>
+        </p:style>
+        <p:txBody>
+          <a:bodyPr rtlCol="0" anchor="ctr"/>
+          <a:lstStyle/>
+          <a:p/>
+        </p:txBody>
+      </p:sp>
+      <p:sp>
+        <p:nvSpPr>
+          <p:cNvPr id="15" name="Rounded Rectangle 14"/>
+          <p:cNvSpPr/>
+          <p:nvPr/>
+        </p:nvSpPr>
+        <p:spPr>
+          <a:xfrm>
+            <a:off x="758952" y="4178808"/>
+            <a:ext cx="10899648" cy="1051560"/>
+          </a:xfrm>
+          <a:prstGeom prst="roundRect">
+            <a:avLst>
+              <a:gd name="adj" fmla="val 6000"/>
+            </a:avLst>
+          </a:prstGeom>
+          <a:solidFill>
+            <a:srgbClr val="FFFFFF"/>
+          </a:solidFill>
+          <a:ln w="9525">
+            <a:solidFill>
+              <a:srgbClr val="C9D4EE"/>
+            </a:solidFill>
+          </a:ln>
+          <a:effectLst/>
+        </p:spPr>
+        <p:style>
+          <a:lnRef idx="1">
+            <a:schemeClr val="accent1"/>
+          </a:lnRef>
+          <a:fillRef idx="3">
+            <a:schemeClr val="accent1"/>
+          </a:fillRef>
+          <a:effectRef idx="2">
+            <a:schemeClr val="accent1"/>
+          </a:effectRef>
+          <a:fontRef idx="minor">
+            <a:schemeClr val="lt1"/>
+          </a:fontRef>
+        </p:style>
+        <p:txBody>
+          <a:bodyPr rtlCol="0" anchor="ctr"/>
+          <a:lstStyle/>
+          <a:p/>
+        </p:txBody>
+      </p:sp>
+      <p:sp>
+        <p:nvSpPr>
+          <p:cNvPr id="16" name="Rounded Rectangle 15"/>
+          <p:cNvSpPr/>
+          <p:nvPr/>
+        </p:nvSpPr>
+        <p:spPr>
+          <a:xfrm>
+            <a:off x="758952" y="5321808"/>
+            <a:ext cx="10899648" cy="1005840"/>
+          </a:xfrm>
+          <a:prstGeom prst="roundRect">
+            <a:avLst>
+              <a:gd name="adj" fmla="val 6000"/>
+            </a:avLst>
+          </a:prstGeom>
+          <a:solidFill>
+            <a:srgbClr val="FFFFFF"/>
+          </a:solidFill>
+          <a:ln w="9525">
+            <a:solidFill>
+              <a:srgbClr val="C9D4EE"/>
+            </a:solidFill>
+          </a:ln>
+          <a:effectLst/>
+        </p:spPr>
+        <p:style>
+          <a:lnRef idx="1">
+            <a:schemeClr val="accent1"/>
+          </a:lnRef>
+          <a:fillRef idx="3">
+            <a:schemeClr val="accent1"/>
+          </a:fillRef>
+          <a:effectRef idx="2">
+            <a:schemeClr val="accent1"/>
+          </a:effectRef>
+          <a:fontRef idx="minor">
+            <a:schemeClr val="lt1"/>
+          </a:fontRef>
+        </p:style>
+        <p:txBody>
+          <a:bodyPr rtlCol="0" anchor="ctr"/>
+          <a:lstStyle/>
+          <a:p/>
+        </p:txBody>
+      </p:sp>
+      <p:sp>
+        <p:nvSpPr>
+          <p:cNvPr id="17" name="TextBox 16"/>
+          <p:cNvSpPr txBox="1"/>
+          <p:nvPr/>
+        </p:nvSpPr>
+        <p:spPr>
+          <a:xfrm>
+            <a:off x="960120" y="1929384"/>
+            <a:ext cx="10469880" cy="2048256"/>
+          </a:xfrm>
+          <a:prstGeom prst="rect">
+            <a:avLst/>
+          </a:prstGeom>
+          <a:noFill/>
+        </p:spPr>
+        <p:txBody>
+          <a:bodyPr wrap="square" anchor="t" lIns="0" rIns="0" tIns="0" bIns="0">
+            <a:spAutoFit/>
+          </a:bodyPr>
+          <a:lstStyle/>
+          <a:p>
+            <a:pPr algn="l"/>
+            <a:r>
+              <a:rPr sz="1150" b="1">
+                <a:solidFill>
+                  <a:srgbClr val="0545E8"/>
+                </a:solidFill>
+              </a:rPr>
+              <a:t>① 本次真跑实测输出（逐字取自 output/report.txt）</a:t>
+            </a:r>
+          </a:p>
+          <a:p>
+            <a:r>
+              <a:rPr sz="1150" b="1">
+                <a:solidFill>
+                  <a:srgbClr val="0545E8"/>
+                </a:solidFill>
+              </a:rPr>
+              <a:t>实测达成档位: 优(A) ｜ 实测提升 +50% ｜ 对比表 3 行 ｜ 断服降级话术命中=是 ｜ 决策记录完整=是 ｜ 多轮 2 轮且上下文保持=是 ｜ 代码规范率实测 95.5%</a:t>
+            </a:r>
+          </a:p>
+          <a:p>
+            <a:r>
+              <a:rPr sz="1150" b="1">
+                <a:solidFill>
+                  <a:srgbClr val="0545E8"/>
+                </a:solidFill>
+              </a:rPr>
+              <a:t>及格(D)    规范率门槛≥70% [达标] ｜ 功能OK ｜ 能出回答</a:t>
+            </a:r>
+          </a:p>
+          <a:p>
+            <a:r>
+              <a:rPr sz="1150" b="1">
+                <a:solidFill>
+                  <a:srgbClr val="0545E8"/>
+                </a:solidFill>
+              </a:rPr>
+              <a:t>良好(C)    提升门槛≥20% ｜ 功能OK ｜ 提升≥20%加对比表</a:t>
+            </a:r>
+          </a:p>
+          <a:p>
+            <a:r>
+              <a:rPr sz="1150" b="1">
+                <a:solidFill>
+                  <a:srgbClr val="0545E8"/>
+                </a:solidFill>
+              </a:rPr>
+              <a:t>优秀(B)    功能OK ｜ 断服不崩溃有降级话术；决策记录完整</a:t>
+            </a:r>
+          </a:p>
+          <a:p>
+            <a:r>
+              <a:rPr sz="1150" b="1">
+                <a:solidFill>
+                  <a:srgbClr val="0545E8"/>
+                </a:solidFill>
+              </a:rPr>
+              <a:t>优(A)     提升门槛≥35%（或多轮）｜ 功能OK ｜ 提升≥35%或多轮对话</a:t>
+            </a:r>
+          </a:p>
+          <a:p>
+            <a:r>
+              <a:rPr sz="1150" b="1">
+                <a:solidFill>
+                  <a:srgbClr val="0545E8"/>
+                </a:solidFill>
+              </a:rPr>
+              <a:t>人工答辩项 1 条，教师答辩时确认：企业元验收栏：功能可用□ 参数留痕□ 数据可信□（师傅签字）</a:t>
+            </a:r>
+          </a:p>
+          <a:p>
+            <a:r>
+              <a:rPr sz="1150" b="1">
+                <a:solidFill>
+                  <a:srgbClr val="0545E8"/>
+                </a:solidFill>
+              </a:rPr>
+              <a:t>本演示走离线规则通道；设 OPENAI_BASE_URL 与 OPENAI_API_KEY 环境变量即切真机 HTTP 通道（urllib+超时，重试耗尽自动降级，不硬编码任何密钥）</a:t>
+            </a:r>
+          </a:p>
+        </p:txBody>
+      </p:sp>
+      <p:sp>
+        <p:nvSpPr>
+          <p:cNvPr id="18" name="TextBox 17"/>
+          <p:cNvSpPr txBox="1"/>
+          <p:nvPr/>
+        </p:nvSpPr>
+        <p:spPr>
+          <a:xfrm>
+            <a:off x="960120" y="4297680"/>
+            <a:ext cx="10469880" cy="868680"/>
+          </a:xfrm>
+          <a:prstGeom prst="rect">
+            <a:avLst/>
+          </a:prstGeom>
+          <a:noFill/>
+        </p:spPr>
+        <p:txBody>
+          <a:bodyPr wrap="square" anchor="t" lIns="0" rIns="0" tIns="0" bIns="0">
+            <a:spAutoFit/>
+          </a:bodyPr>
+          <a:lstStyle/>
+          <a:p>
+            <a:pPr algn="l"/>
+            <a:r>
+              <a:rPr sz="1300" b="1">
+                <a:solidFill>
+                  <a:srgbClr val="0545E8"/>
+                </a:solidFill>
+              </a:rPr>
+              <a:t>② 关键自检点（对照工单逐项核对）</a:t>
+            </a:r>
+          </a:p>
+          <a:p>
+            <a:pPr algn="l">
+              <a:spcBef>
+                <a:spcPts val="200"/>
+              </a:spcBef>
+            </a:pPr>
+            <a:r>
+              <a:rPr sz="1150" b="0">
+                <a:solidFill>
+                  <a:srgbClr val="010328"/>
+                </a:solidFill>
+              </a:rPr>
+              <a:t>□ 代码从头跑到尾不报错　□ 指标与工单及格线逐项对齐　□ 随机种子已固定（可复现）</a:t>
+            </a:r>
+          </a:p>
+        </p:txBody>
+      </p:sp>
+      <p:sp>
+        <p:nvSpPr>
+          <p:cNvPr id="19" name="TextBox 18"/>
+          <p:cNvSpPr txBox="1"/>
+          <p:nvPr/>
+        </p:nvSpPr>
+        <p:spPr>
+          <a:xfrm>
+            <a:off x="960120" y="5431536"/>
+            <a:ext cx="10469880" cy="841248"/>
+          </a:xfrm>
+          <a:prstGeom prst="rect">
+            <a:avLst/>
+          </a:prstGeom>
+          <a:noFill/>
+        </p:spPr>
+        <p:txBody>
+          <a:bodyPr wrap="square" anchor="t" lIns="0" rIns="0" tIns="0" bIns="0">
+            <a:spAutoFit/>
+          </a:bodyPr>
+          <a:lstStyle/>
+          <a:p>
+            <a:pPr algn="l"/>
+            <a:r>
+              <a:rPr sz="1300" b="1">
+                <a:solidFill>
+                  <a:srgbClr val="F5670F"/>
+                </a:solidFill>
+              </a:rPr>
+              <a:t>③ 提交与达标（过程性证据）</a:t>
+            </a:r>
+          </a:p>
+          <a:p>
+            <a:pPr algn="l">
+              <a:spcBef>
+                <a:spcPts val="200"/>
+              </a:spcBef>
+            </a:pPr>
+            <a:r>
+              <a:rPr sz="1100" b="0">
+                <a:solidFill>
+                  <a:srgbClr val="010328"/>
+                </a:solidFill>
+              </a:rPr>
+              <a:t>达标线 D≥60 / C≥70 / B≥80 / A≥90　｜　提交 学号_姓名_工单号 + 运行截图 + 决策记录 + Git≥1次commit</a:t>
+            </a:r>
+          </a:p>
+        </p:txBody>
+      </p:sp>
+    </p:spTree>
+  </p:cSld>
+  <p:clrMapOvr>
+    <a:masterClrMapping/>
+  </p:clrMapOvr>
+</p:sld>
+</file>
+
+<file path=ppt/slides/slide13.xml><?xml version="1.0" encoding="utf-8"?>
+<p:sld xmlns:a="http://schemas.openxmlformats.org/drawingml/2006/main" xmlns:p="http://schemas.openxmlformats.org/presentationml/2006/main" xmlns:r="http://schemas.openxmlformats.org/officeDocument/2006/relationships">
+  <p:cSld>
+    <p:spTree>
+      <p:nvGrpSpPr>
+        <p:cNvPr id="1" name=""/>
+        <p:cNvGrpSpPr/>
+        <p:nvPr/>
+      </p:nvGrpSpPr>
+      <p:grpSpPr/>
+      <p:sp>
+        <p:nvSpPr>
+          <p:cNvPr id="2" name="Rectangle 1"/>
+          <p:cNvSpPr/>
+          <p:nvPr/>
+        </p:nvSpPr>
+        <p:spPr>
+          <a:xfrm>
+            <a:off x="0" y="0"/>
+            <a:ext cx="12192000" cy="1150000"/>
+          </a:xfrm>
+          <a:prstGeom prst="rect">
+            <a:avLst/>
+          </a:prstGeom>
+          <a:solidFill>
+            <a:srgbClr val="010328"/>
+          </a:solidFill>
+          <a:ln>
+            <a:noFill/>
+          </a:ln>
+          <a:effectLst/>
+        </p:spPr>
+        <p:style>
+          <a:lnRef idx="1">
+            <a:schemeClr val="accent1"/>
+          </a:lnRef>
+          <a:fillRef idx="3">
+            <a:schemeClr val="accent1"/>
+          </a:fillRef>
+          <a:effectRef idx="2">
+            <a:schemeClr val="accent1"/>
+          </a:effectRef>
+          <a:fontRef idx="minor">
+            <a:schemeClr val="lt1"/>
+          </a:fontRef>
+        </p:style>
+        <p:txBody>
+          <a:bodyPr rtlCol="0" anchor="ctr"/>
+          <a:lstStyle/>
+          <a:p>
+            <a:pPr algn="ctr"/>
+          </a:p>
+        </p:txBody>
+      </p:sp>
+      <p:sp>
+        <p:nvSpPr>
+          <p:cNvPr id="3" name="Rectangle 2"/>
+          <p:cNvSpPr/>
+          <p:nvPr/>
+        </p:nvSpPr>
+        <p:spPr>
+          <a:xfrm>
+            <a:off x="0" y="1150000"/>
+            <a:ext cx="2600000" cy="70000"/>
+          </a:xfrm>
+          <a:prstGeom prst="rect">
+            <a:avLst/>
+          </a:prstGeom>
+          <a:solidFill>
+            <a:srgbClr val="F5670F"/>
+          </a:solidFill>
+          <a:ln>
+            <a:noFill/>
+          </a:ln>
+          <a:effectLst/>
+        </p:spPr>
+        <p:style>
+          <a:lnRef idx="1">
+            <a:schemeClr val="accent1"/>
+          </a:lnRef>
+          <a:fillRef idx="3">
+            <a:schemeClr val="accent1"/>
+          </a:fillRef>
+          <a:effectRef idx="2">
+            <a:schemeClr val="accent1"/>
+          </a:effectRef>
+          <a:fontRef idx="minor">
+            <a:schemeClr val="lt1"/>
+          </a:fontRef>
+        </p:style>
+        <p:txBody>
+          <a:bodyPr rtlCol="0" anchor="ctr"/>
+          <a:lstStyle/>
+          <a:p>
+            <a:pPr algn="ctr"/>
+          </a:p>
+        </p:txBody>
+      </p:sp>
+      <p:sp>
+        <p:nvSpPr>
+          <p:cNvPr id="4" name="TextBox 3"/>
+          <p:cNvSpPr txBox="1"/>
+          <p:nvPr/>
+        </p:nvSpPr>
+        <p:spPr>
+          <a:xfrm>
+            <a:off x="700000" y="300000"/>
+            <a:ext cx="10792000" cy="700000"/>
+          </a:xfrm>
+          <a:prstGeom prst="rect">
+            <a:avLst/>
+          </a:prstGeom>
+          <a:noFill/>
+        </p:spPr>
+        <p:txBody>
+          <a:bodyPr wrap="square" anchor="t">
+            <a:spAutoFit/>
+          </a:bodyPr>
+          <a:lstStyle/>
+          <a:p>
+            <a:pPr algn="l">
+              <a:lnSpc>
+                <a:spcPct val="110000"/>
+              </a:lnSpc>
+              <a:spcAft>
+                <a:spcPts val="600"/>
+              </a:spcAft>
+            </a:pPr>
+            <a:r>
+              <a:rPr sz="2400" b="1">
+                <a:solidFill>
+                  <a:srgbClr val="FFFFFF"/>
+                </a:solidFill>
+                <a:latin typeface="微软雅黑"/>
+              </a:rPr>
+              <a:t>本工单的工程化项目 · 第三种代码形态</a:t>
+            </a:r>
+          </a:p>
+        </p:txBody>
+      </p:sp>
+      <p:sp>
+        <p:nvSpPr>
+          <p:cNvPr id="11" name="Rectangle 10"/>
+          <p:cNvSpPr/>
+          <p:nvPr/>
+        </p:nvSpPr>
+        <p:spPr>
+          <a:xfrm>
+            <a:off x="500000" y="6500000"/>
+            <a:ext cx="11100000" cy="20000"/>
+          </a:xfrm>
+          <a:prstGeom prst="rect">
+            <a:avLst/>
+          </a:prstGeom>
+          <a:solidFill>
+            <a:srgbClr val="C9D4EE"/>
+          </a:solidFill>
+          <a:ln>
+            <a:noFill/>
+          </a:ln>
+          <a:effectLst/>
+        </p:spPr>
+        <p:style>
+          <a:lnRef idx="1">
+            <a:schemeClr val="accent1"/>
+          </a:lnRef>
+          <a:fillRef idx="3">
+            <a:schemeClr val="accent1"/>
+          </a:fillRef>
+          <a:effectRef idx="2">
+            <a:schemeClr val="accent1"/>
+          </a:effectRef>
+          <a:fontRef idx="minor">
+            <a:schemeClr val="lt1"/>
+          </a:fontRef>
+        </p:style>
+        <p:txBody>
+          <a:bodyPr rtlCol="0" anchor="ctr"/>
+          <a:lstStyle/>
+          <a:p>
+            <a:pPr algn="ctr"/>
+          </a:p>
+        </p:txBody>
+      </p:sp>
+      <p:sp>
+        <p:nvSpPr>
+          <p:cNvPr id="12" name="TextBox 11"/>
+          <p:cNvSpPr txBox="1"/>
+          <p:nvPr/>
+        </p:nvSpPr>
+        <p:spPr>
+          <a:xfrm>
+            <a:off x="500000" y="6540000"/>
+            <a:ext cx="7000000" cy="300000"/>
+          </a:xfrm>
+          <a:prstGeom prst="rect">
+            <a:avLst/>
+          </a:prstGeom>
+          <a:noFill/>
+        </p:spPr>
+        <p:txBody>
+          <a:bodyPr wrap="square" anchor="t">
+            <a:spAutoFit/>
+          </a:bodyPr>
+          <a:lstStyle/>
+          <a:p>
+            <a:pPr algn="l">
+              <a:lnSpc>
+                <a:spcPct val="110000"/>
+              </a:lnSpc>
+              <a:spcAft>
+                <a:spcPts val="600"/>
+              </a:spcAft>
+            </a:pPr>
+            <a:r>
+              <a:rPr sz="1000" b="0">
+                <a:solidFill>
+                  <a:srgbClr val="8A97B5"/>
+                </a:solidFill>
+                <a:latin typeface="微软雅黑"/>
+              </a:rPr>
+              <a:t>两江智造集团 · AI应用基础48课时版</a:t>
+            </a:r>
+          </a:p>
+        </p:txBody>
+      </p:sp>
+      <p:sp>
+        <p:nvSpPr>
+          <p:cNvPr id="13" name="TextBox 12"/>
+          <p:cNvSpPr txBox="1"/>
+          <p:nvPr/>
+        </p:nvSpPr>
+        <p:spPr>
+          <a:xfrm>
+            <a:off x="10600000" y="6540000"/>
+            <a:ext cx="1000000" cy="300000"/>
+          </a:xfrm>
+          <a:prstGeom prst="rect">
+            <a:avLst/>
+          </a:prstGeom>
+          <a:noFill/>
+        </p:spPr>
+        <p:txBody>
+          <a:bodyPr wrap="square" anchor="t">
+            <a:spAutoFit/>
+          </a:bodyPr>
+          <a:lstStyle/>
+          <a:p>
+            <a:pPr algn="r">
+              <a:lnSpc>
+                <a:spcPct val="110000"/>
+              </a:lnSpc>
+              <a:spcAft>
+                <a:spcPts val="600"/>
+              </a:spcAft>
+            </a:pPr>
+            <a:r>
+              <a:rPr sz="1000" b="0">
+                <a:solidFill>
+                  <a:srgbClr val="8A97B5"/>
+                </a:solidFill>
+                <a:latin typeface="微软雅黑"/>
+              </a:rPr>
+              <a:t>13 / 20</a:t>
+            </a:r>
+          </a:p>
+        </p:txBody>
+      </p:sp>
+      <p:sp>
+        <p:nvSpPr>
+          <p:cNvPr id="14" name="Rounded Rectangle 13"/>
+          <p:cNvSpPr/>
+          <p:nvPr/>
+        </p:nvSpPr>
+        <p:spPr>
+          <a:xfrm>
+            <a:off x="758952" y="1801368"/>
+            <a:ext cx="10899648" cy="2286000"/>
+          </a:xfrm>
+          <a:prstGeom prst="roundRect">
+            <a:avLst>
+              <a:gd name="adj" fmla="val 6000"/>
+            </a:avLst>
+          </a:prstGeom>
+          <a:solidFill>
+            <a:srgbClr val="F3F6FD"/>
+          </a:solidFill>
+          <a:ln w="9525">
+            <a:solidFill>
+              <a:srgbClr val="C9D4EE"/>
+            </a:solidFill>
+          </a:ln>
+          <a:effectLst/>
+        </p:spPr>
+        <p:style>
+          <a:lnRef idx="1">
+            <a:schemeClr val="accent1"/>
+          </a:lnRef>
+          <a:fillRef idx="3">
+            <a:schemeClr val="accent1"/>
+          </a:fillRef>
+          <a:effectRef idx="2">
+            <a:schemeClr val="accent1"/>
+          </a:effectRef>
+          <a:fontRef idx="minor">
+            <a:schemeClr val="lt1"/>
+          </a:fontRef>
+        </p:style>
+        <p:txBody>
+          <a:bodyPr rtlCol="0" anchor="ctr"/>
+          <a:lstStyle/>
+          <a:p/>
+        </p:txBody>
+      </p:sp>
+      <p:sp>
+        <p:nvSpPr>
+          <p:cNvPr id="15" name="Rounded Rectangle 14"/>
+          <p:cNvSpPr/>
+          <p:nvPr/>
+        </p:nvSpPr>
+        <p:spPr>
+          <a:xfrm>
+            <a:off x="758952" y="4178808"/>
+            <a:ext cx="10899648" cy="1051560"/>
+          </a:xfrm>
+          <a:prstGeom prst="roundRect">
+            <a:avLst>
+              <a:gd name="adj" fmla="val 6000"/>
+            </a:avLst>
+          </a:prstGeom>
+          <a:solidFill>
+            <a:srgbClr val="FFFFFF"/>
+          </a:solidFill>
+          <a:ln w="9525">
+            <a:solidFill>
+              <a:srgbClr val="C9D4EE"/>
+            </a:solidFill>
+          </a:ln>
+          <a:effectLst/>
+        </p:spPr>
+        <p:style>
+          <a:lnRef idx="1">
+            <a:schemeClr val="accent1"/>
+          </a:lnRef>
+          <a:fillRef idx="3">
+            <a:schemeClr val="accent1"/>
+          </a:fillRef>
+          <a:effectRef idx="2">
+            <a:schemeClr val="accent1"/>
+          </a:effectRef>
+          <a:fontRef idx="minor">
+            <a:schemeClr val="lt1"/>
+          </a:fontRef>
+        </p:style>
+        <p:txBody>
+          <a:bodyPr rtlCol="0" anchor="ctr"/>
+          <a:lstStyle/>
+          <a:p/>
+        </p:txBody>
+      </p:sp>
+      <p:sp>
+        <p:nvSpPr>
+          <p:cNvPr id="16" name="Rounded Rectangle 15"/>
+          <p:cNvSpPr/>
+          <p:nvPr/>
+        </p:nvSpPr>
+        <p:spPr>
+          <a:xfrm>
+            <a:off x="758952" y="5321808"/>
+            <a:ext cx="10899648" cy="1005840"/>
+          </a:xfrm>
+          <a:prstGeom prst="roundRect">
+            <a:avLst>
+              <a:gd name="adj" fmla="val 6000"/>
+            </a:avLst>
+          </a:prstGeom>
+          <a:solidFill>
+            <a:srgbClr val="FFFFFF"/>
+          </a:solidFill>
+          <a:ln w="9525">
+            <a:solidFill>
+              <a:srgbClr val="C9D4EE"/>
+            </a:solidFill>
+          </a:ln>
+          <a:effectLst/>
+        </p:spPr>
+        <p:style>
+          <a:lnRef idx="1">
+            <a:schemeClr val="accent1"/>
+          </a:lnRef>
+          <a:fillRef idx="3">
+            <a:schemeClr val="accent1"/>
+          </a:fillRef>
+          <a:effectRef idx="2">
+            <a:schemeClr val="accent1"/>
+          </a:effectRef>
+          <a:fontRef idx="minor">
+            <a:schemeClr val="lt1"/>
+          </a:fontRef>
+        </p:style>
+        <p:txBody>
+          <a:bodyPr rtlCol="0" anchor="ctr"/>
+          <a:lstStyle/>
+          <a:p/>
+        </p:txBody>
+      </p:sp>
+      <p:sp>
+        <p:nvSpPr>
+          <p:cNvPr id="17" name="TextBox 16"/>
+          <p:cNvSpPr txBox="1"/>
+          <p:nvPr/>
+        </p:nvSpPr>
+        <p:spPr>
+          <a:xfrm>
+            <a:off x="960120" y="1929384"/>
+            <a:ext cx="10469880" cy="2048256"/>
+          </a:xfrm>
+          <a:prstGeom prst="rect">
+            <a:avLst/>
+          </a:prstGeom>
+          <a:noFill/>
+        </p:spPr>
+        <p:txBody>
+          <a:bodyPr wrap="square" anchor="t" lIns="0" rIns="0" tIns="0" bIns="0">
+            <a:spAutoFit/>
+          </a:bodyPr>
+          <a:lstStyle/>
+          <a:p>
+            <a:pPr algn="l"/>
+            <a:r>
+              <a:rPr sz="1400" b="1">
+                <a:solidFill>
+                  <a:srgbClr val="0545E8"/>
+                </a:solidFill>
+              </a:rPr>
+              <a:t>① 项目位置与一键运行</a:t>
+            </a:r>
+          </a:p>
+          <a:p>
+            <a:pPr algn="l"/>
+            <a:r>
+              <a:rPr sz="1400" b="1">
+                <a:solidFill>
+                  <a:srgbClr val="0545E8"/>
+                </a:solidFill>
+              </a:rPr>
+              <a:t>工程化项目/m41_prompt_lab/</a:t>
+            </a:r>
+          </a:p>
+          <a:p>
+            <a:pPr algn="l"/>
+            <a:r>
+              <a:rPr sz="1400" b="1">
+                <a:solidFill>
+                  <a:srgbClr val="0545E8"/>
+                </a:solidFill>
+              </a:rPr>
+              <a:t>python run.py          # 输出 output/report.txt + result.json</a:t>
+            </a:r>
+          </a:p>
+          <a:p>
+            <a:pPr algn="l"/>
+            <a:r>
+              <a:rPr sz="1400" b="1">
+                <a:solidFill>
+                  <a:srgbClr val="0545E8"/>
+                </a:solidFill>
+              </a:rPr>
+              <a:t>python -m pytest -q    # 全量测试应全绿</a:t>
+            </a:r>
+          </a:p>
+        </p:txBody>
+      </p:sp>
+      <p:sp>
+        <p:nvSpPr>
+          <p:cNvPr id="18" name="TextBox 17"/>
+          <p:cNvSpPr txBox="1"/>
+          <p:nvPr/>
+        </p:nvSpPr>
+        <p:spPr>
+          <a:xfrm>
+            <a:off x="960120" y="4297680"/>
+            <a:ext cx="10469880" cy="868680"/>
+          </a:xfrm>
+          <a:prstGeom prst="rect">
+            <a:avLst/>
+          </a:prstGeom>
+          <a:noFill/>
+        </p:spPr>
+        <p:txBody>
+          <a:bodyPr wrap="square" anchor="t" lIns="0" rIns="0" tIns="0" bIns="0">
+            <a:spAutoFit/>
+          </a:bodyPr>
+          <a:lstStyle/>
+          <a:p>
+            <a:pPr algn="l"/>
+            <a:r>
+              <a:rPr sz="1300" b="1">
+                <a:solidFill>
+                  <a:srgbClr val="0545E8"/>
+                </a:solidFill>
+              </a:rPr>
+              <a:t>② 目录结构（23 个文件）</a:t>
+            </a:r>
+          </a:p>
+          <a:p>
+            <a:pPr algn="l"/>
+            <a:r>
+              <a:rPr sz="1300" b="1">
+                <a:solidFill>
+                  <a:srgbClr val="0545E8"/>
+                </a:solidFill>
+              </a:rPr>
+              <a:t>config/rules.yaml      规则外置：改配置不改代码</a:t>
+            </a:r>
+          </a:p>
+          <a:p>
+            <a:pPr algn="l"/>
+            <a:r>
+              <a:rPr sz="1300" b="1">
+                <a:solidFill>
+                  <a:srgbClr val="0545E8"/>
+                </a:solidFill>
+              </a:rPr>
+              <a:t>src/prompt_lab/  config · core · io_utils · report · pipeline</a:t>
+            </a:r>
+          </a:p>
+          <a:p>
+            <a:pPr algn="l"/>
+            <a:r>
+              <a:rPr sz="1300" b="1">
+                <a:solidFill>
+                  <a:srgbClr val="0545E8"/>
+                </a:solidFill>
+              </a:rPr>
+              <a:t>tests/      正常 / 边界 / 异常三档</a:t>
+            </a:r>
+          </a:p>
+        </p:txBody>
+      </p:sp>
+      <p:sp>
+        <p:nvSpPr>
+          <p:cNvPr id="19" name="TextBox 18"/>
+          <p:cNvSpPr txBox="1"/>
+          <p:nvPr/>
+        </p:nvSpPr>
+        <p:spPr>
+          <a:xfrm>
+            <a:off x="960120" y="5431536"/>
+            <a:ext cx="10469880" cy="841248"/>
+          </a:xfrm>
+          <a:prstGeom prst="rect">
+            <a:avLst/>
+          </a:prstGeom>
+          <a:noFill/>
+        </p:spPr>
+        <p:txBody>
+          <a:bodyPr wrap="square" anchor="t" lIns="0" rIns="0" tIns="0" bIns="0">
+            <a:spAutoFit/>
+          </a:bodyPr>
+          <a:lstStyle/>
+          <a:p>
+            <a:pPr algn="l"/>
+            <a:r>
+              <a:rPr sz="1300" b="1">
+                <a:solidFill>
+                  <a:srgbClr val="F5670F"/>
+                </a:solidFill>
+              </a:rPr>
+              <a:t>③ 国标与 TOGAF 落地</a:t>
+            </a:r>
+          </a:p>
+          <a:p>
+            <a:pPr algn="l"/>
+            <a:r>
+              <a:rPr sz="1300" b="1">
+                <a:solidFill>
+                  <a:srgbClr val="F5670F"/>
+                </a:solidFill>
+              </a:rPr>
+              <a:t>GB/T 9385 需求规格 / 15532 测试 / 8567 文档 / 8566 过程组</a:t>
+            </a:r>
+          </a:p>
+          <a:p>
+            <a:pPr algn="l"/>
+            <a:r>
+              <a:rPr sz="1300" b="1">
+                <a:solidFill>
+                  <a:srgbClr val="F5670F"/>
+                </a:solidFill>
+              </a:rPr>
+              <a:t>TOGAF 四域：业务 · 数据 · 应用 · 技术架构</a:t>
+            </a:r>
+          </a:p>
+          <a:p>
+            <a:pPr algn="l"/>
+            <a:r>
+              <a:rPr sz="1300" b="1">
+                <a:solidFill>
+                  <a:srgbClr val="F5670F"/>
+                </a:solidFill>
+              </a:rPr>
+              <a:t>docs/07 ADR-001 架构决策记录</a:t>
+            </a:r>
+          </a:p>
+        </p:txBody>
+      </p:sp>
+    </p:spTree>
+  </p:cSld>
+  <p:clrMapOvr>
+    <a:masterClrMapping/>
+  </p:clrMapOvr>
+</p:sld>
+</file>
+
+<file path=ppt/slides/slide14.xml><?xml version="1.0" encoding="utf-8"?>
+<p:sld xmlns:a="http://schemas.openxmlformats.org/drawingml/2006/main" xmlns:p="http://schemas.openxmlformats.org/presentationml/2006/main" xmlns:r="http://schemas.openxmlformats.org/officeDocument/2006/relationships">
+  <p:cSld>
+    <p:spTree>
+      <p:nvGrpSpPr>
+        <p:cNvPr id="1" name=""/>
+        <p:cNvGrpSpPr/>
+        <p:nvPr/>
+      </p:nvGrpSpPr>
+      <p:grpSpPr/>
+      <p:sp>
+        <p:nvSpPr>
+          <p:cNvPr id="2" name="Rectangle 1"/>
+          <p:cNvSpPr/>
+          <p:nvPr/>
+        </p:nvSpPr>
+        <p:spPr>
+          <a:xfrm>
+            <a:off x="0" y="0"/>
+            <a:ext cx="12192000" cy="1150000"/>
+          </a:xfrm>
+          <a:prstGeom prst="rect">
+            <a:avLst/>
+          </a:prstGeom>
+          <a:solidFill>
+            <a:srgbClr val="010328"/>
+          </a:solidFill>
+          <a:ln>
+            <a:noFill/>
+          </a:ln>
+          <a:effectLst/>
+        </p:spPr>
+        <p:style>
+          <a:lnRef idx="1">
+            <a:schemeClr val="accent1"/>
+          </a:lnRef>
+          <a:fillRef idx="3">
+            <a:schemeClr val="accent1"/>
+          </a:fillRef>
+          <a:effectRef idx="2">
+            <a:schemeClr val="accent1"/>
+          </a:effectRef>
+          <a:fontRef idx="minor">
+            <a:schemeClr val="lt1"/>
+          </a:fontRef>
+        </p:style>
+        <p:txBody>
+          <a:bodyPr rtlCol="0" anchor="ctr"/>
+          <a:lstStyle/>
+          <a:p>
+            <a:pPr algn="ctr"/>
+          </a:p>
+        </p:txBody>
+      </p:sp>
+      <p:sp>
+        <p:nvSpPr>
+          <p:cNvPr id="3" name="Rectangle 2"/>
+          <p:cNvSpPr/>
+          <p:nvPr/>
+        </p:nvSpPr>
+        <p:spPr>
+          <a:xfrm>
+            <a:off x="0" y="1150000"/>
+            <a:ext cx="2600000" cy="70000"/>
+          </a:xfrm>
+          <a:prstGeom prst="rect">
+            <a:avLst/>
+          </a:prstGeom>
+          <a:solidFill>
+            <a:srgbClr val="F5670F"/>
+          </a:solidFill>
+          <a:ln>
+            <a:noFill/>
+          </a:ln>
+          <a:effectLst/>
+        </p:spPr>
+        <p:style>
+          <a:lnRef idx="1">
+            <a:schemeClr val="accent1"/>
+          </a:lnRef>
+          <a:fillRef idx="3">
+            <a:schemeClr val="accent1"/>
+          </a:fillRef>
+          <a:effectRef idx="2">
+            <a:schemeClr val="accent1"/>
+          </a:effectRef>
+          <a:fontRef idx="minor">
+            <a:schemeClr val="lt1"/>
+          </a:fontRef>
+        </p:style>
+        <p:txBody>
+          <a:bodyPr rtlCol="0" anchor="ctr"/>
+          <a:lstStyle/>
+          <a:p>
+            <a:pPr algn="ctr"/>
+          </a:p>
+        </p:txBody>
+      </p:sp>
+      <p:sp>
+        <p:nvSpPr>
+          <p:cNvPr id="4" name="TextBox 3"/>
+          <p:cNvSpPr txBox="1"/>
+          <p:nvPr/>
+        </p:nvSpPr>
+        <p:spPr>
+          <a:xfrm>
+            <a:off x="700000" y="300000"/>
+            <a:ext cx="10792000" cy="700000"/>
+          </a:xfrm>
+          <a:prstGeom prst="rect">
+            <a:avLst/>
+          </a:prstGeom>
+          <a:noFill/>
+        </p:spPr>
+        <p:txBody>
+          <a:bodyPr wrap="square" anchor="t">
+            <a:spAutoFit/>
+          </a:bodyPr>
+          <a:lstStyle/>
+          <a:p>
+            <a:pPr algn="l">
+              <a:lnSpc>
+                <a:spcPct val="110000"/>
+              </a:lnSpc>
+              <a:spcAft>
+                <a:spcPts val="600"/>
+              </a:spcAft>
+            </a:pPr>
+            <a:r>
+              <a:rPr sz="2400" b="1">
+                <a:solidFill>
+                  <a:srgbClr val="FFFFFF"/>
+                </a:solidFill>
+                <a:latin typeface="微软雅黑"/>
+              </a:rPr>
+              <a:t>实测验收 · m41_prompt_lab</a:t>
+            </a:r>
+          </a:p>
+        </p:txBody>
+      </p:sp>
+      <p:sp>
+        <p:nvSpPr>
+          <p:cNvPr id="11" name="Rectangle 10"/>
+          <p:cNvSpPr/>
+          <p:nvPr/>
+        </p:nvSpPr>
+        <p:spPr>
+          <a:xfrm>
+            <a:off x="500000" y="6500000"/>
+            <a:ext cx="11100000" cy="20000"/>
+          </a:xfrm>
+          <a:prstGeom prst="rect">
+            <a:avLst/>
+          </a:prstGeom>
+          <a:solidFill>
+            <a:srgbClr val="C9D4EE"/>
+          </a:solidFill>
+          <a:ln>
+            <a:noFill/>
+          </a:ln>
+          <a:effectLst/>
+        </p:spPr>
+        <p:style>
+          <a:lnRef idx="1">
+            <a:schemeClr val="accent1"/>
+          </a:lnRef>
+          <a:fillRef idx="3">
+            <a:schemeClr val="accent1"/>
+          </a:fillRef>
+          <a:effectRef idx="2">
+            <a:schemeClr val="accent1"/>
+          </a:effectRef>
+          <a:fontRef idx="minor">
+            <a:schemeClr val="lt1"/>
+          </a:fontRef>
+        </p:style>
+        <p:txBody>
+          <a:bodyPr rtlCol="0" anchor="ctr"/>
+          <a:lstStyle/>
+          <a:p>
+            <a:pPr algn="ctr"/>
+          </a:p>
+        </p:txBody>
+      </p:sp>
+      <p:sp>
+        <p:nvSpPr>
+          <p:cNvPr id="12" name="TextBox 11"/>
+          <p:cNvSpPr txBox="1"/>
+          <p:nvPr/>
+        </p:nvSpPr>
+        <p:spPr>
+          <a:xfrm>
+            <a:off x="500000" y="6540000"/>
+            <a:ext cx="7000000" cy="300000"/>
+          </a:xfrm>
+          <a:prstGeom prst="rect">
+            <a:avLst/>
+          </a:prstGeom>
+          <a:noFill/>
+        </p:spPr>
+        <p:txBody>
+          <a:bodyPr wrap="square" anchor="t">
+            <a:spAutoFit/>
+          </a:bodyPr>
+          <a:lstStyle/>
+          <a:p>
+            <a:pPr algn="l">
+              <a:lnSpc>
+                <a:spcPct val="110000"/>
+              </a:lnSpc>
+              <a:spcAft>
+                <a:spcPts val="600"/>
+              </a:spcAft>
+            </a:pPr>
+            <a:r>
+              <a:rPr sz="1000" b="0">
+                <a:solidFill>
+                  <a:srgbClr val="8A97B5"/>
+                </a:solidFill>
+                <a:latin typeface="微软雅黑"/>
+              </a:rPr>
+              <a:t>两江智造集团 · AI应用基础48课时版</a:t>
+            </a:r>
+          </a:p>
+        </p:txBody>
+      </p:sp>
+      <p:sp>
+        <p:nvSpPr>
+          <p:cNvPr id="13" name="TextBox 12"/>
+          <p:cNvSpPr txBox="1"/>
+          <p:nvPr/>
+        </p:nvSpPr>
+        <p:spPr>
+          <a:xfrm>
+            <a:off x="10600000" y="6540000"/>
+            <a:ext cx="1000000" cy="300000"/>
+          </a:xfrm>
+          <a:prstGeom prst="rect">
+            <a:avLst/>
+          </a:prstGeom>
+          <a:noFill/>
+        </p:spPr>
+        <p:txBody>
+          <a:bodyPr wrap="square" anchor="t">
+            <a:spAutoFit/>
+          </a:bodyPr>
+          <a:lstStyle/>
+          <a:p>
+            <a:pPr algn="r">
+              <a:lnSpc>
+                <a:spcPct val="110000"/>
+              </a:lnSpc>
+              <a:spcAft>
+                <a:spcPts val="600"/>
+              </a:spcAft>
+            </a:pPr>
+            <a:r>
+              <a:rPr sz="1000" b="0">
+                <a:solidFill>
+                  <a:srgbClr val="8A97B5"/>
+                </a:solidFill>
+                <a:latin typeface="微软雅黑"/>
+              </a:rPr>
+              <a:t>14 / 20</a:t>
             </a:r>
           </a:p>
         </p:txBody>
@@ -6896,1478 +8375,6 @@
 </p:sld>
 </file>
 
-<file path=ppt/slides/slide13.xml><?xml version="1.0" encoding="utf-8"?>
-<p:sld xmlns:a="http://schemas.openxmlformats.org/drawingml/2006/main" xmlns:p="http://schemas.openxmlformats.org/presentationml/2006/main" xmlns:r="http://schemas.openxmlformats.org/officeDocument/2006/relationships">
-  <p:cSld>
-    <p:spTree>
-      <p:nvGrpSpPr>
-        <p:cNvPr id="1" name=""/>
-        <p:cNvGrpSpPr/>
-        <p:nvPr/>
-      </p:nvGrpSpPr>
-      <p:grpSpPr/>
-      <p:sp>
-        <p:nvSpPr>
-          <p:cNvPr id="2" name="Rectangle 1"/>
-          <p:cNvSpPr/>
-          <p:nvPr/>
-        </p:nvSpPr>
-        <p:spPr>
-          <a:xfrm>
-            <a:off x="0" y="0"/>
-            <a:ext cx="12192000" cy="1150000"/>
-          </a:xfrm>
-          <a:prstGeom prst="rect">
-            <a:avLst/>
-          </a:prstGeom>
-          <a:solidFill>
-            <a:srgbClr val="010328"/>
-          </a:solidFill>
-          <a:ln>
-            <a:noFill/>
-          </a:ln>
-          <a:effectLst/>
-        </p:spPr>
-        <p:style>
-          <a:lnRef idx="1">
-            <a:schemeClr val="accent1"/>
-          </a:lnRef>
-          <a:fillRef idx="3">
-            <a:schemeClr val="accent1"/>
-          </a:fillRef>
-          <a:effectRef idx="2">
-            <a:schemeClr val="accent1"/>
-          </a:effectRef>
-          <a:fontRef idx="minor">
-            <a:schemeClr val="lt1"/>
-          </a:fontRef>
-        </p:style>
-        <p:txBody>
-          <a:bodyPr rtlCol="0" anchor="ctr"/>
-          <a:lstStyle/>
-          <a:p>
-            <a:pPr algn="ctr"/>
-          </a:p>
-        </p:txBody>
-      </p:sp>
-      <p:sp>
-        <p:nvSpPr>
-          <p:cNvPr id="3" name="Rectangle 2"/>
-          <p:cNvSpPr/>
-          <p:nvPr/>
-        </p:nvSpPr>
-        <p:spPr>
-          <a:xfrm>
-            <a:off x="0" y="1150000"/>
-            <a:ext cx="2600000" cy="70000"/>
-          </a:xfrm>
-          <a:prstGeom prst="rect">
-            <a:avLst/>
-          </a:prstGeom>
-          <a:solidFill>
-            <a:srgbClr val="F5670F"/>
-          </a:solidFill>
-          <a:ln>
-            <a:noFill/>
-          </a:ln>
-          <a:effectLst/>
-        </p:spPr>
-        <p:style>
-          <a:lnRef idx="1">
-            <a:schemeClr val="accent1"/>
-          </a:lnRef>
-          <a:fillRef idx="3">
-            <a:schemeClr val="accent1"/>
-          </a:fillRef>
-          <a:effectRef idx="2">
-            <a:schemeClr val="accent1"/>
-          </a:effectRef>
-          <a:fontRef idx="minor">
-            <a:schemeClr val="lt1"/>
-          </a:fontRef>
-        </p:style>
-        <p:txBody>
-          <a:bodyPr rtlCol="0" anchor="ctr"/>
-          <a:lstStyle/>
-          <a:p>
-            <a:pPr algn="ctr"/>
-          </a:p>
-        </p:txBody>
-      </p:sp>
-      <p:sp>
-        <p:nvSpPr>
-          <p:cNvPr id="4" name="TextBox 3"/>
-          <p:cNvSpPr txBox="1"/>
-          <p:nvPr/>
-        </p:nvSpPr>
-        <p:spPr>
-          <a:xfrm>
-            <a:off x="700000" y="300000"/>
-            <a:ext cx="10792000" cy="700000"/>
-          </a:xfrm>
-          <a:prstGeom prst="rect">
-            <a:avLst/>
-          </a:prstGeom>
-          <a:noFill/>
-        </p:spPr>
-        <p:txBody>
-          <a:bodyPr wrap="square" anchor="t">
-            <a:spAutoFit/>
-          </a:bodyPr>
-          <a:lstStyle/>
-          <a:p>
-            <a:pPr algn="l">
-              <a:lnSpc>
-                <a:spcPct val="110000"/>
-              </a:lnSpc>
-              <a:spcAft>
-                <a:spcPts val="600"/>
-              </a:spcAft>
-            </a:pPr>
-            <a:r>
-              <a:rPr sz="2400" b="1">
-                <a:solidFill>
-                  <a:srgbClr val="FFFFFF"/>
-                </a:solidFill>
-                <a:latin typeface="微软雅黑"/>
-              </a:rPr>
-              <a:t>实跑截图证据 · m41_prompt_lab</a:t>
-            </a:r>
-          </a:p>
-        </p:txBody>
-      </p:sp>
-      <p:sp>
-        <p:nvSpPr>
-          <p:cNvPr id="11" name="Rectangle 10"/>
-          <p:cNvSpPr/>
-          <p:nvPr/>
-        </p:nvSpPr>
-        <p:spPr>
-          <a:xfrm>
-            <a:off x="500000" y="6500000"/>
-            <a:ext cx="11100000" cy="20000"/>
-          </a:xfrm>
-          <a:prstGeom prst="rect">
-            <a:avLst/>
-          </a:prstGeom>
-          <a:solidFill>
-            <a:srgbClr val="C9D4EE"/>
-          </a:solidFill>
-          <a:ln>
-            <a:noFill/>
-          </a:ln>
-          <a:effectLst/>
-        </p:spPr>
-        <p:style>
-          <a:lnRef idx="1">
-            <a:schemeClr val="accent1"/>
-          </a:lnRef>
-          <a:fillRef idx="3">
-            <a:schemeClr val="accent1"/>
-          </a:fillRef>
-          <a:effectRef idx="2">
-            <a:schemeClr val="accent1"/>
-          </a:effectRef>
-          <a:fontRef idx="minor">
-            <a:schemeClr val="lt1"/>
-          </a:fontRef>
-        </p:style>
-        <p:txBody>
-          <a:bodyPr rtlCol="0" anchor="ctr"/>
-          <a:lstStyle/>
-          <a:p>
-            <a:pPr algn="ctr"/>
-          </a:p>
-        </p:txBody>
-      </p:sp>
-      <p:sp>
-        <p:nvSpPr>
-          <p:cNvPr id="12" name="TextBox 11"/>
-          <p:cNvSpPr txBox="1"/>
-          <p:nvPr/>
-        </p:nvSpPr>
-        <p:spPr>
-          <a:xfrm>
-            <a:off x="500000" y="6540000"/>
-            <a:ext cx="7000000" cy="300000"/>
-          </a:xfrm>
-          <a:prstGeom prst="rect">
-            <a:avLst/>
-          </a:prstGeom>
-          <a:noFill/>
-        </p:spPr>
-        <p:txBody>
-          <a:bodyPr wrap="square" anchor="t">
-            <a:spAutoFit/>
-          </a:bodyPr>
-          <a:lstStyle/>
-          <a:p>
-            <a:pPr algn="l">
-              <a:lnSpc>
-                <a:spcPct val="110000"/>
-              </a:lnSpc>
-              <a:spcAft>
-                <a:spcPts val="600"/>
-              </a:spcAft>
-            </a:pPr>
-            <a:r>
-              <a:rPr sz="1000" b="0">
-                <a:solidFill>
-                  <a:srgbClr val="8A97B5"/>
-                </a:solidFill>
-                <a:latin typeface="微软雅黑"/>
-              </a:rPr>
-              <a:t>两江智造集团 · AI应用基础48课时版</a:t>
-            </a:r>
-          </a:p>
-        </p:txBody>
-      </p:sp>
-      <p:sp>
-        <p:nvSpPr>
-          <p:cNvPr id="13" name="TextBox 12"/>
-          <p:cNvSpPr txBox="1"/>
-          <p:nvPr/>
-        </p:nvSpPr>
-        <p:spPr>
-          <a:xfrm>
-            <a:off x="10600000" y="6540000"/>
-            <a:ext cx="1000000" cy="300000"/>
-          </a:xfrm>
-          <a:prstGeom prst="rect">
-            <a:avLst/>
-          </a:prstGeom>
-          <a:noFill/>
-        </p:spPr>
-        <p:txBody>
-          <a:bodyPr wrap="square" anchor="t">
-            <a:spAutoFit/>
-          </a:bodyPr>
-          <a:lstStyle/>
-          <a:p>
-            <a:pPr algn="r">
-              <a:lnSpc>
-                <a:spcPct val="110000"/>
-              </a:lnSpc>
-              <a:spcAft>
-                <a:spcPts val="600"/>
-              </a:spcAft>
-            </a:pPr>
-            <a:r>
-              <a:rPr sz="1000" b="0">
-                <a:solidFill>
-                  <a:srgbClr val="8A97B5"/>
-                </a:solidFill>
-                <a:latin typeface="微软雅黑"/>
-              </a:rPr>
-              <a:t>13 / 18</a:t>
-            </a:r>
-          </a:p>
-        </p:txBody>
-      </p:sp>
-      <p:sp>
-        <p:nvSpPr>
-          <p:cNvPr id="14" name="Rectangle 13"/>
-          <p:cNvSpPr/>
-          <p:nvPr/>
-        </p:nvSpPr>
-        <p:spPr>
-          <a:xfrm>
-            <a:off x="457200" y="1481328"/>
-            <a:ext cx="5486400" cy="2304288"/>
-          </a:xfrm>
-          <a:prstGeom prst="rect">
-            <a:avLst/>
-          </a:prstGeom>
-          <a:solidFill>
-            <a:srgbClr val="FFFFFF"/>
-          </a:solidFill>
-          <a:ln>
-            <a:solidFill>
-              <a:srgbClr val="D6DCE4"/>
-            </a:solidFill>
-          </a:ln>
-          <a:effectLst/>
-        </p:spPr>
-        <p:style>
-          <a:lnRef idx="1">
-            <a:schemeClr val="accent1"/>
-          </a:lnRef>
-          <a:fillRef idx="3">
-            <a:schemeClr val="accent1"/>
-          </a:fillRef>
-          <a:effectRef idx="2">
-            <a:schemeClr val="accent1"/>
-          </a:effectRef>
-          <a:fontRef idx="minor">
-            <a:schemeClr val="lt1"/>
-          </a:fontRef>
-        </p:style>
-        <p:txBody>
-          <a:bodyPr rtlCol="0" anchor="ctr" wrap="square"/>
-          <a:lstStyle/>
-          <a:p>
-            <a:pPr algn="ctr"/>
-          </a:p>
-        </p:txBody>
-      </p:sp>
-      <p:sp>
-        <p:nvSpPr>
-          <p:cNvPr id="15" name="TextBox 14"/>
-          <p:cNvSpPr txBox="1"/>
-          <p:nvPr/>
-        </p:nvSpPr>
-        <p:spPr>
-          <a:xfrm>
-            <a:off x="530352" y="1517904"/>
-            <a:ext cx="5340096" cy="237744"/>
-          </a:xfrm>
-          <a:prstGeom prst="rect">
-            <a:avLst/>
-          </a:prstGeom>
-          <a:noFill/>
-        </p:spPr>
-        <p:txBody>
-          <a:bodyPr wrap="square">
-            <a:spAutoFit/>
-          </a:bodyPr>
-          <a:lstStyle/>
-          <a:p>
-            <a:r>
-              <a:rPr sz="950" b="1">
-                <a:solidFill>
-                  <a:srgbClr val="010328"/>
-                </a:solidFill>
-                <a:latin typeface="微软雅黑"/>
-              </a:rPr>
-              <a:t>① run.py 实跑终端输出（逐字捕获）</a:t>
-            </a:r>
-          </a:p>
-        </p:txBody>
-      </p:sp>
-      <p:pic>
-        <p:nvPicPr>
-          <p:cNvPr id="16" name="Picture 15" descr="shot_run.png"/>
-          <p:cNvPicPr>
-            <a:picLocks noChangeAspect="1"/>
-          </p:cNvPicPr>
-          <p:nvPr/>
-        </p:nvPicPr>
-        <p:blipFill>
-          <a:blip r:embed="rId2"/>
-          <a:stretch>
-            <a:fillRect/>
-          </a:stretch>
-        </p:blipFill>
-        <p:spPr>
-          <a:xfrm>
-            <a:off x="964038" y="1773936"/>
-            <a:ext cx="4472722" cy="1956816"/>
-          </a:xfrm>
-          <a:prstGeom prst="rect">
-            <a:avLst/>
-          </a:prstGeom>
-        </p:spPr>
-      </p:pic>
-      <p:sp>
-        <p:nvSpPr>
-          <p:cNvPr id="17" name="Rectangle 16"/>
-          <p:cNvSpPr/>
-          <p:nvPr/>
-        </p:nvSpPr>
-        <p:spPr>
-          <a:xfrm>
-            <a:off x="6327648" y="1481328"/>
-            <a:ext cx="5486400" cy="2304288"/>
-          </a:xfrm>
-          <a:prstGeom prst="rect">
-            <a:avLst/>
-          </a:prstGeom>
-          <a:solidFill>
-            <a:srgbClr val="FFFFFF"/>
-          </a:solidFill>
-          <a:ln>
-            <a:solidFill>
-              <a:srgbClr val="D6DCE4"/>
-            </a:solidFill>
-          </a:ln>
-          <a:effectLst/>
-        </p:spPr>
-        <p:style>
-          <a:lnRef idx="1">
-            <a:schemeClr val="accent1"/>
-          </a:lnRef>
-          <a:fillRef idx="3">
-            <a:schemeClr val="accent1"/>
-          </a:fillRef>
-          <a:effectRef idx="2">
-            <a:schemeClr val="accent1"/>
-          </a:effectRef>
-          <a:fontRef idx="minor">
-            <a:schemeClr val="lt1"/>
-          </a:fontRef>
-        </p:style>
-        <p:txBody>
-          <a:bodyPr rtlCol="0" anchor="ctr" wrap="square"/>
-          <a:lstStyle/>
-          <a:p>
-            <a:pPr algn="ctr"/>
-          </a:p>
-        </p:txBody>
-      </p:sp>
-      <p:sp>
-        <p:nvSpPr>
-          <p:cNvPr id="18" name="TextBox 17"/>
-          <p:cNvSpPr txBox="1"/>
-          <p:nvPr/>
-        </p:nvSpPr>
-        <p:spPr>
-          <a:xfrm>
-            <a:off x="6400800" y="1517904"/>
-            <a:ext cx="5340096" cy="237744"/>
-          </a:xfrm>
-          <a:prstGeom prst="rect">
-            <a:avLst/>
-          </a:prstGeom>
-          <a:noFill/>
-        </p:spPr>
-        <p:txBody>
-          <a:bodyPr wrap="square">
-            <a:spAutoFit/>
-          </a:bodyPr>
-          <a:lstStyle/>
-          <a:p>
-            <a:r>
-              <a:rPr sz="950" b="1">
-                <a:solidFill>
-                  <a:srgbClr val="010328"/>
-                </a:solidFill>
-                <a:latin typeface="微软雅黑"/>
-              </a:rPr>
-              <a:t>② pytest 全绿终端输出（逐字捕获）</a:t>
-            </a:r>
-          </a:p>
-        </p:txBody>
-      </p:sp>
-      <p:pic>
-        <p:nvPicPr>
-          <p:cNvPr id="19" name="Picture 18" descr="shot_test.png"/>
-          <p:cNvPicPr>
-            <a:picLocks noChangeAspect="1"/>
-          </p:cNvPicPr>
-          <p:nvPr/>
-        </p:nvPicPr>
-        <p:blipFill>
-          <a:blip r:embed="rId3"/>
-          <a:stretch>
-            <a:fillRect/>
-          </a:stretch>
-        </p:blipFill>
-        <p:spPr>
-          <a:xfrm>
-            <a:off x="6834486" y="1773936"/>
-            <a:ext cx="4472722" cy="1956816"/>
-          </a:xfrm>
-          <a:prstGeom prst="rect">
-            <a:avLst/>
-          </a:prstGeom>
-        </p:spPr>
-      </p:pic>
-      <p:sp>
-        <p:nvSpPr>
-          <p:cNvPr id="20" name="Rectangle 19"/>
-          <p:cNvSpPr/>
-          <p:nvPr/>
-        </p:nvSpPr>
-        <p:spPr>
-          <a:xfrm>
-            <a:off x="457200" y="3877056"/>
-            <a:ext cx="5486400" cy="2304288"/>
-          </a:xfrm>
-          <a:prstGeom prst="rect">
-            <a:avLst/>
-          </a:prstGeom>
-          <a:solidFill>
-            <a:srgbClr val="FFFFFF"/>
-          </a:solidFill>
-          <a:ln>
-            <a:solidFill>
-              <a:srgbClr val="D6DCE4"/>
-            </a:solidFill>
-          </a:ln>
-          <a:effectLst/>
-        </p:spPr>
-        <p:style>
-          <a:lnRef idx="1">
-            <a:schemeClr val="accent1"/>
-          </a:lnRef>
-          <a:fillRef idx="3">
-            <a:schemeClr val="accent1"/>
-          </a:fillRef>
-          <a:effectRef idx="2">
-            <a:schemeClr val="accent1"/>
-          </a:effectRef>
-          <a:fontRef idx="minor">
-            <a:schemeClr val="lt1"/>
-          </a:fontRef>
-        </p:style>
-        <p:txBody>
-          <a:bodyPr rtlCol="0" anchor="ctr" wrap="square"/>
-          <a:lstStyle/>
-          <a:p>
-            <a:pPr algn="ctr"/>
-          </a:p>
-        </p:txBody>
-      </p:sp>
-      <p:sp>
-        <p:nvSpPr>
-          <p:cNvPr id="21" name="TextBox 20"/>
-          <p:cNvSpPr txBox="1"/>
-          <p:nvPr/>
-        </p:nvSpPr>
-        <p:spPr>
-          <a:xfrm>
-            <a:off x="530352" y="3913632"/>
-            <a:ext cx="5340096" cy="237744"/>
-          </a:xfrm>
-          <a:prstGeom prst="rect">
-            <a:avLst/>
-          </a:prstGeom>
-          <a:noFill/>
-        </p:spPr>
-        <p:txBody>
-          <a:bodyPr wrap="square">
-            <a:spAutoFit/>
-          </a:bodyPr>
-          <a:lstStyle/>
-          <a:p>
-            <a:r>
-              <a:rPr sz="950" b="1">
-                <a:solidFill>
-                  <a:srgbClr val="010328"/>
-                </a:solidFill>
-                <a:latin typeface="微软雅黑"/>
-              </a:rPr>
-              <a:t>③ report.txt「验收档位判定（实测）」段</a:t>
-            </a:r>
-          </a:p>
-        </p:txBody>
-      </p:sp>
-      <p:pic>
-        <p:nvPicPr>
-          <p:cNvPr id="22" name="Picture 21" descr="shot_report.png"/>
-          <p:cNvPicPr>
-            <a:picLocks noChangeAspect="1"/>
-          </p:cNvPicPr>
-          <p:nvPr/>
-        </p:nvPicPr>
-        <p:blipFill>
-          <a:blip r:embed="rId4"/>
-          <a:stretch>
-            <a:fillRect/>
-          </a:stretch>
-        </p:blipFill>
-        <p:spPr>
-          <a:xfrm>
-            <a:off x="964038" y="4169664"/>
-            <a:ext cx="4472722" cy="1956816"/>
-          </a:xfrm>
-          <a:prstGeom prst="rect">
-            <a:avLst/>
-          </a:prstGeom>
-        </p:spPr>
-      </p:pic>
-      <p:sp>
-        <p:nvSpPr>
-          <p:cNvPr id="23" name="Rectangle 22"/>
-          <p:cNvSpPr/>
-          <p:nvPr/>
-        </p:nvSpPr>
-        <p:spPr>
-          <a:xfrm>
-            <a:off x="6327648" y="3877056"/>
-            <a:ext cx="5486400" cy="2304288"/>
-          </a:xfrm>
-          <a:prstGeom prst="rect">
-            <a:avLst/>
-          </a:prstGeom>
-          <a:solidFill>
-            <a:srgbClr val="F7F9FB"/>
-          </a:solidFill>
-          <a:ln>
-            <a:solidFill>
-              <a:srgbClr val="D6DCE4"/>
-            </a:solidFill>
-          </a:ln>
-          <a:effectLst/>
-        </p:spPr>
-        <p:style>
-          <a:lnRef idx="1">
-            <a:schemeClr val="accent1"/>
-          </a:lnRef>
-          <a:fillRef idx="3">
-            <a:schemeClr val="accent1"/>
-          </a:fillRef>
-          <a:effectRef idx="2">
-            <a:schemeClr val="accent1"/>
-          </a:effectRef>
-          <a:fontRef idx="minor">
-            <a:schemeClr val="lt1"/>
-          </a:fontRef>
-        </p:style>
-        <p:txBody>
-          <a:bodyPr rtlCol="0" anchor="ctr" wrap="square"/>
-          <a:lstStyle/>
-          <a:p>
-            <a:pPr algn="ctr"/>
-          </a:p>
-        </p:txBody>
-      </p:sp>
-      <p:sp>
-        <p:nvSpPr>
-          <p:cNvPr id="24" name="TextBox 23"/>
-          <p:cNvSpPr txBox="1"/>
-          <p:nvPr/>
-        </p:nvSpPr>
-        <p:spPr>
-          <a:xfrm>
-            <a:off x="6400800" y="3913632"/>
-            <a:ext cx="5340096" cy="237744"/>
-          </a:xfrm>
-          <a:prstGeom prst="rect">
-            <a:avLst/>
-          </a:prstGeom>
-          <a:noFill/>
-        </p:spPr>
-        <p:txBody>
-          <a:bodyPr wrap="square">
-            <a:spAutoFit/>
-          </a:bodyPr>
-          <a:lstStyle/>
-          <a:p>
-            <a:r>
-              <a:rPr sz="950" b="1">
-                <a:solidFill>
-                  <a:srgbClr val="010328"/>
-                </a:solidFill>
-                <a:latin typeface="微软雅黑"/>
-              </a:rPr>
-              <a:t>④ 采集口径（可复现）</a:t>
-            </a:r>
-          </a:p>
-        </p:txBody>
-      </p:sp>
-      <p:sp>
-        <p:nvSpPr>
-          <p:cNvPr id="25" name="TextBox 24"/>
-          <p:cNvSpPr txBox="1"/>
-          <p:nvPr/>
-        </p:nvSpPr>
-        <p:spPr>
-          <a:xfrm>
-            <a:off x="6437376" y="4187952"/>
-            <a:ext cx="5266944" cy="1920240"/>
-          </a:xfrm>
-          <a:prstGeom prst="rect">
-            <a:avLst/>
-          </a:prstGeom>
-          <a:noFill/>
-        </p:spPr>
-        <p:txBody>
-          <a:bodyPr wrap="square">
-            <a:spAutoFit/>
-          </a:bodyPr>
-          <a:lstStyle/>
-          <a:p>
-            <a:r>
-              <a:rPr sz="950" b="0">
-                <a:solidFill>
-                  <a:srgbClr val="2B2F36"/>
-                </a:solidFill>
-                <a:latin typeface="微软雅黑"/>
-              </a:rPr>
-              <a:t>项目：05-AI应用基础48课时版/工程化项目/m41_prompt_lab/</a:t>
-            </a:r>
-          </a:p>
-          <a:p>
-            <a:r>
-              <a:rPr sz="950" b="0">
-                <a:solidFill>
-                  <a:srgbClr val="2B2F36"/>
-                </a:solidFill>
-                <a:latin typeface="微软雅黑"/>
-              </a:rPr>
-              <a:t>命令：/opt/anaconda3/bin/python run.py ｜ /opt/anaconda3/bin/python -m pytest -q</a:t>
-            </a:r>
-          </a:p>
-          <a:p>
-            <a:r>
-              <a:rPr sz="950" b="0">
-                <a:solidFill>
-                  <a:srgbClr val="2B2F36"/>
-                </a:solidFill>
-                <a:latin typeface="微软雅黑"/>
-              </a:rPr>
-              <a:t>采集：工具/ppt97/capture97.py（2026-10-28 10:48 真跑逐字捕获输出）</a:t>
-            </a:r>
-          </a:p>
-          <a:p>
-            <a:r>
-              <a:rPr sz="950" b="0">
-                <a:solidFill>
-                  <a:srgbClr val="2B2F36"/>
-                </a:solidFill>
-                <a:latin typeface="微软雅黑"/>
-              </a:rPr>
-              <a:t>渲染：工具/ppt97/terminal_png.py（终端截图，不改写任何数字）</a:t>
-            </a:r>
-          </a:p>
-          <a:p>
-            <a:r>
-              <a:rPr sz="950" b="0">
-                <a:solidFill>
-                  <a:srgbClr val="2B2F36"/>
-                </a:solidFill>
-                <a:latin typeface="微软雅黑"/>
-              </a:rPr>
-              <a:t>退出码：run=0 ｜ pytest=0</a:t>
-            </a:r>
-          </a:p>
-          <a:p>
-            <a:r>
-              <a:rPr sz="950" b="0">
-                <a:solidFill>
-                  <a:srgbClr val="2B2F36"/>
-                </a:solidFill>
-                <a:latin typeface="微软雅黑"/>
-              </a:rPr>
-              <a:t>档位判定取自 output/report.txt「验收档位判定（实测）」段</a:t>
-            </a:r>
-          </a:p>
-        </p:txBody>
-      </p:sp>
-      <p:sp>
-        <p:nvSpPr>
-          <p:cNvPr id="26" name="TextBox 25"/>
-          <p:cNvSpPr txBox="1"/>
-          <p:nvPr/>
-        </p:nvSpPr>
-        <p:spPr>
-          <a:xfrm>
-            <a:off x="457200" y="6254496"/>
-            <a:ext cx="11247120" cy="201168"/>
-          </a:xfrm>
-          <a:prstGeom prst="rect">
-            <a:avLst/>
-          </a:prstGeom>
-          <a:noFill/>
-        </p:spPr>
-        <p:txBody>
-          <a:bodyPr wrap="square">
-            <a:spAutoFit/>
-          </a:bodyPr>
-          <a:lstStyle/>
-          <a:p>
-            <a:r>
-              <a:rPr sz="900" b="0">
-                <a:solidFill>
-                  <a:srgbClr val="7A8698"/>
-                </a:solidFill>
-                <a:latin typeface="微软雅黑"/>
-              </a:rPr>
-              <a:t>截图内容逐字取自 工具/ppt97/evidence/m41_prompt_lab/（capture97.py 真跑捕获，未改写数字）</a:t>
-            </a:r>
-          </a:p>
-        </p:txBody>
-      </p:sp>
-    </p:spTree>
-  </p:cSld>
-  <p:clrMapOvr>
-    <a:masterClrMapping/>
-  </p:clrMapOvr>
-</p:sld>
-</file>
-
-<file path=ppt/slides/slide14.xml><?xml version="1.0" encoding="utf-8"?>
-<p:sld xmlns:a="http://schemas.openxmlformats.org/drawingml/2006/main" xmlns:p="http://schemas.openxmlformats.org/presentationml/2006/main" xmlns:r="http://schemas.openxmlformats.org/officeDocument/2006/relationships">
-  <p:cSld>
-    <p:spTree>
-      <p:nvGrpSpPr>
-        <p:cNvPr id="1" name=""/>
-        <p:cNvGrpSpPr/>
-        <p:nvPr/>
-      </p:nvGrpSpPr>
-      <p:grpSpPr/>
-      <p:sp>
-        <p:nvSpPr>
-          <p:cNvPr id="2" name="Rectangle 1"/>
-          <p:cNvSpPr/>
-          <p:nvPr/>
-        </p:nvSpPr>
-        <p:spPr>
-          <a:xfrm>
-            <a:off x="0" y="0"/>
-            <a:ext cx="12192000" cy="1150000"/>
-          </a:xfrm>
-          <a:prstGeom prst="rect">
-            <a:avLst/>
-          </a:prstGeom>
-          <a:solidFill>
-            <a:srgbClr val="010328"/>
-          </a:solidFill>
-          <a:ln>
-            <a:noFill/>
-          </a:ln>
-          <a:effectLst/>
-        </p:spPr>
-        <p:style>
-          <a:lnRef idx="1">
-            <a:schemeClr val="accent1"/>
-          </a:lnRef>
-          <a:fillRef idx="3">
-            <a:schemeClr val="accent1"/>
-          </a:fillRef>
-          <a:effectRef idx="2">
-            <a:schemeClr val="accent1"/>
-          </a:effectRef>
-          <a:fontRef idx="minor">
-            <a:schemeClr val="lt1"/>
-          </a:fontRef>
-        </p:style>
-        <p:txBody>
-          <a:bodyPr rtlCol="0" anchor="ctr"/>
-          <a:lstStyle/>
-          <a:p>
-            <a:pPr algn="ctr"/>
-          </a:p>
-        </p:txBody>
-      </p:sp>
-      <p:sp>
-        <p:nvSpPr>
-          <p:cNvPr id="3" name="Rectangle 2"/>
-          <p:cNvSpPr/>
-          <p:nvPr/>
-        </p:nvSpPr>
-        <p:spPr>
-          <a:xfrm>
-            <a:off x="0" y="1150000"/>
-            <a:ext cx="2600000" cy="70000"/>
-          </a:xfrm>
-          <a:prstGeom prst="rect">
-            <a:avLst/>
-          </a:prstGeom>
-          <a:solidFill>
-            <a:srgbClr val="F5670F"/>
-          </a:solidFill>
-          <a:ln>
-            <a:noFill/>
-          </a:ln>
-          <a:effectLst/>
-        </p:spPr>
-        <p:style>
-          <a:lnRef idx="1">
-            <a:schemeClr val="accent1"/>
-          </a:lnRef>
-          <a:fillRef idx="3">
-            <a:schemeClr val="accent1"/>
-          </a:fillRef>
-          <a:effectRef idx="2">
-            <a:schemeClr val="accent1"/>
-          </a:effectRef>
-          <a:fontRef idx="minor">
-            <a:schemeClr val="lt1"/>
-          </a:fontRef>
-        </p:style>
-        <p:txBody>
-          <a:bodyPr rtlCol="0" anchor="ctr"/>
-          <a:lstStyle/>
-          <a:p>
-            <a:pPr algn="ctr"/>
-          </a:p>
-        </p:txBody>
-      </p:sp>
-      <p:sp>
-        <p:nvSpPr>
-          <p:cNvPr id="4" name="TextBox 3"/>
-          <p:cNvSpPr txBox="1"/>
-          <p:nvPr/>
-        </p:nvSpPr>
-        <p:spPr>
-          <a:xfrm>
-            <a:off x="700000" y="300000"/>
-            <a:ext cx="10792000" cy="700000"/>
-          </a:xfrm>
-          <a:prstGeom prst="rect">
-            <a:avLst/>
-          </a:prstGeom>
-          <a:noFill/>
-        </p:spPr>
-        <p:txBody>
-          <a:bodyPr wrap="square" anchor="t">
-            <a:spAutoFit/>
-          </a:bodyPr>
-          <a:lstStyle/>
-          <a:p>
-            <a:pPr algn="l">
-              <a:lnSpc>
-                <a:spcPct val="110000"/>
-              </a:lnSpc>
-              <a:spcAft>
-                <a:spcPts val="600"/>
-              </a:spcAft>
-            </a:pPr>
-            <a:r>
-              <a:rPr sz="2400" b="1">
-                <a:solidFill>
-                  <a:srgbClr val="FFFFFF"/>
-                </a:solidFill>
-                <a:latin typeface="微软雅黑"/>
-              </a:rPr>
-              <a:t>工单完成效果图 · 完成后长这样（真实运行 · 参考实现） · 课末对照</a:t>
-            </a:r>
-          </a:p>
-        </p:txBody>
-      </p:sp>
-      <p:sp>
-        <p:nvSpPr>
-          <p:cNvPr id="11" name="Rectangle 10"/>
-          <p:cNvSpPr/>
-          <p:nvPr/>
-        </p:nvSpPr>
-        <p:spPr>
-          <a:xfrm>
-            <a:off x="500000" y="6500000"/>
-            <a:ext cx="11100000" cy="20000"/>
-          </a:xfrm>
-          <a:prstGeom prst="rect">
-            <a:avLst/>
-          </a:prstGeom>
-          <a:solidFill>
-            <a:srgbClr val="C9D4EE"/>
-          </a:solidFill>
-          <a:ln>
-            <a:noFill/>
-          </a:ln>
-          <a:effectLst/>
-        </p:spPr>
-        <p:style>
-          <a:lnRef idx="1">
-            <a:schemeClr val="accent1"/>
-          </a:lnRef>
-          <a:fillRef idx="3">
-            <a:schemeClr val="accent1"/>
-          </a:fillRef>
-          <a:effectRef idx="2">
-            <a:schemeClr val="accent1"/>
-          </a:effectRef>
-          <a:fontRef idx="minor">
-            <a:schemeClr val="lt1"/>
-          </a:fontRef>
-        </p:style>
-        <p:txBody>
-          <a:bodyPr rtlCol="0" anchor="ctr"/>
-          <a:lstStyle/>
-          <a:p>
-            <a:pPr algn="ctr"/>
-          </a:p>
-        </p:txBody>
-      </p:sp>
-      <p:sp>
-        <p:nvSpPr>
-          <p:cNvPr id="12" name="TextBox 11"/>
-          <p:cNvSpPr txBox="1"/>
-          <p:nvPr/>
-        </p:nvSpPr>
-        <p:spPr>
-          <a:xfrm>
-            <a:off x="500000" y="6540000"/>
-            <a:ext cx="7000000" cy="300000"/>
-          </a:xfrm>
-          <a:prstGeom prst="rect">
-            <a:avLst/>
-          </a:prstGeom>
-          <a:noFill/>
-        </p:spPr>
-        <p:txBody>
-          <a:bodyPr wrap="square" anchor="t">
-            <a:spAutoFit/>
-          </a:bodyPr>
-          <a:lstStyle/>
-          <a:p>
-            <a:pPr algn="l">
-              <a:lnSpc>
-                <a:spcPct val="110000"/>
-              </a:lnSpc>
-              <a:spcAft>
-                <a:spcPts val="600"/>
-              </a:spcAft>
-            </a:pPr>
-            <a:r>
-              <a:rPr sz="1000" b="0">
-                <a:solidFill>
-                  <a:srgbClr val="8A97B5"/>
-                </a:solidFill>
-                <a:latin typeface="微软雅黑"/>
-              </a:rPr>
-              <a:t>两江智造集团 · AI应用基础48课时版</a:t>
-            </a:r>
-          </a:p>
-        </p:txBody>
-      </p:sp>
-      <p:sp>
-        <p:nvSpPr>
-          <p:cNvPr id="13" name="TextBox 12"/>
-          <p:cNvSpPr txBox="1"/>
-          <p:nvPr/>
-        </p:nvSpPr>
-        <p:spPr>
-          <a:xfrm>
-            <a:off x="10600000" y="6540000"/>
-            <a:ext cx="1000000" cy="300000"/>
-          </a:xfrm>
-          <a:prstGeom prst="rect">
-            <a:avLst/>
-          </a:prstGeom>
-          <a:noFill/>
-        </p:spPr>
-        <p:txBody>
-          <a:bodyPr wrap="square" anchor="t">
-            <a:spAutoFit/>
-          </a:bodyPr>
-          <a:lstStyle/>
-          <a:p>
-            <a:pPr algn="r">
-              <a:lnSpc>
-                <a:spcPct val="110000"/>
-              </a:lnSpc>
-              <a:spcAft>
-                <a:spcPts val="600"/>
-              </a:spcAft>
-            </a:pPr>
-            <a:r>
-              <a:rPr sz="1000" b="0">
-                <a:solidFill>
-                  <a:srgbClr val="8A97B5"/>
-                </a:solidFill>
-                <a:latin typeface="微软雅黑"/>
-              </a:rPr>
-              <a:t>14 / 18</a:t>
-            </a:r>
-          </a:p>
-        </p:txBody>
-      </p:sp>
-      <p:sp>
-        <p:nvSpPr>
-          <p:cNvPr id="14" name="Rounded Rectangle 13"/>
-          <p:cNvSpPr/>
-          <p:nvPr/>
-        </p:nvSpPr>
-        <p:spPr>
-          <a:xfrm>
-            <a:off x="758952" y="1801368"/>
-            <a:ext cx="10899648" cy="2286000"/>
-          </a:xfrm>
-          <a:prstGeom prst="roundRect">
-            <a:avLst>
-              <a:gd name="adj" fmla="val 6000"/>
-            </a:avLst>
-          </a:prstGeom>
-          <a:solidFill>
-            <a:srgbClr val="F3F6FD"/>
-          </a:solidFill>
-          <a:ln w="9525">
-            <a:solidFill>
-              <a:srgbClr val="C9D4EE"/>
-            </a:solidFill>
-          </a:ln>
-          <a:effectLst/>
-        </p:spPr>
-        <p:style>
-          <a:lnRef idx="1">
-            <a:schemeClr val="accent1"/>
-          </a:lnRef>
-          <a:fillRef idx="3">
-            <a:schemeClr val="accent1"/>
-          </a:fillRef>
-          <a:effectRef idx="2">
-            <a:schemeClr val="accent1"/>
-          </a:effectRef>
-          <a:fontRef idx="minor">
-            <a:schemeClr val="lt1"/>
-          </a:fontRef>
-        </p:style>
-        <p:txBody>
-          <a:bodyPr rtlCol="0" anchor="ctr"/>
-          <a:lstStyle/>
-          <a:p/>
-        </p:txBody>
-      </p:sp>
-      <p:sp>
-        <p:nvSpPr>
-          <p:cNvPr id="15" name="Rounded Rectangle 14"/>
-          <p:cNvSpPr/>
-          <p:nvPr/>
-        </p:nvSpPr>
-        <p:spPr>
-          <a:xfrm>
-            <a:off x="758952" y="4178808"/>
-            <a:ext cx="10899648" cy="1051560"/>
-          </a:xfrm>
-          <a:prstGeom prst="roundRect">
-            <a:avLst>
-              <a:gd name="adj" fmla="val 6000"/>
-            </a:avLst>
-          </a:prstGeom>
-          <a:solidFill>
-            <a:srgbClr val="FFFFFF"/>
-          </a:solidFill>
-          <a:ln w="9525">
-            <a:solidFill>
-              <a:srgbClr val="C9D4EE"/>
-            </a:solidFill>
-          </a:ln>
-          <a:effectLst/>
-        </p:spPr>
-        <p:style>
-          <a:lnRef idx="1">
-            <a:schemeClr val="accent1"/>
-          </a:lnRef>
-          <a:fillRef idx="3">
-            <a:schemeClr val="accent1"/>
-          </a:fillRef>
-          <a:effectRef idx="2">
-            <a:schemeClr val="accent1"/>
-          </a:effectRef>
-          <a:fontRef idx="minor">
-            <a:schemeClr val="lt1"/>
-          </a:fontRef>
-        </p:style>
-        <p:txBody>
-          <a:bodyPr rtlCol="0" anchor="ctr"/>
-          <a:lstStyle/>
-          <a:p/>
-        </p:txBody>
-      </p:sp>
-      <p:sp>
-        <p:nvSpPr>
-          <p:cNvPr id="16" name="Rounded Rectangle 15"/>
-          <p:cNvSpPr/>
-          <p:nvPr/>
-        </p:nvSpPr>
-        <p:spPr>
-          <a:xfrm>
-            <a:off x="758952" y="5321808"/>
-            <a:ext cx="10899648" cy="1005840"/>
-          </a:xfrm>
-          <a:prstGeom prst="roundRect">
-            <a:avLst>
-              <a:gd name="adj" fmla="val 6000"/>
-            </a:avLst>
-          </a:prstGeom>
-          <a:solidFill>
-            <a:srgbClr val="FFFFFF"/>
-          </a:solidFill>
-          <a:ln w="9525">
-            <a:solidFill>
-              <a:srgbClr val="C9D4EE"/>
-            </a:solidFill>
-          </a:ln>
-          <a:effectLst/>
-        </p:spPr>
-        <p:style>
-          <a:lnRef idx="1">
-            <a:schemeClr val="accent1"/>
-          </a:lnRef>
-          <a:fillRef idx="3">
-            <a:schemeClr val="accent1"/>
-          </a:fillRef>
-          <a:effectRef idx="2">
-            <a:schemeClr val="accent1"/>
-          </a:effectRef>
-          <a:fontRef idx="minor">
-            <a:schemeClr val="lt1"/>
-          </a:fontRef>
-        </p:style>
-        <p:txBody>
-          <a:bodyPr rtlCol="0" anchor="ctr"/>
-          <a:lstStyle/>
-          <a:p/>
-        </p:txBody>
-      </p:sp>
-      <p:sp>
-        <p:nvSpPr>
-          <p:cNvPr id="17" name="TextBox 16"/>
-          <p:cNvSpPr txBox="1"/>
-          <p:nvPr/>
-        </p:nvSpPr>
-        <p:spPr>
-          <a:xfrm>
-            <a:off x="960120" y="1929384"/>
-            <a:ext cx="10469880" cy="2048256"/>
-          </a:xfrm>
-          <a:prstGeom prst="rect">
-            <a:avLst/>
-          </a:prstGeom>
-          <a:noFill/>
-        </p:spPr>
-        <p:txBody>
-          <a:bodyPr wrap="square" anchor="t" lIns="0" rIns="0" tIns="0" bIns="0">
-            <a:spAutoFit/>
-          </a:bodyPr>
-          <a:lstStyle/>
-          <a:p>
-            <a:pPr algn="l"/>
-            <a:r>
-              <a:rPr sz="1400" b="1">
-                <a:solidFill>
-                  <a:srgbClr val="0545E8"/>
-                </a:solidFill>
-              </a:rPr>
-              <a:t>① 参考实现真实运行输出（本工单完成态）</a:t>
-            </a:r>
-          </a:p>
-          <a:p>
-            <a:pPr algn="l">
-              <a:spcBef>
-                <a:spcPts val="100"/>
-              </a:spcBef>
-            </a:pPr>
-            <a:r>
-              <a:rPr sz="1000" b="0">
-                <a:solidFill>
-                  <a:srgbClr val="010328"/>
-                </a:solidFill>
-              </a:rPr>
-              <a:t>=== 工单 M4-1 LLM 故障诊断·三版 Prompt 对比 · 完成态 ===</a:t>
-            </a:r>
-          </a:p>
-          <a:p>
-            <a:pPr algn="l">
-              <a:spcBef>
-                <a:spcPts val="100"/>
-              </a:spcBef>
-            </a:pPr>
-            <a:r>
-              <a:rPr sz="1000" b="0">
-                <a:solidFill>
-                  <a:srgbClr val="010328"/>
-                </a:solidFill>
-              </a:rPr>
-              <a:t>问题（仅给症状，不含诊断关键词）: 3号泵振动在爬升，运转声音发闷，帮我看看。</a:t>
-            </a:r>
-          </a:p>
-          <a:p>
-            <a:pPr algn="l">
-              <a:spcBef>
-                <a:spcPts val="100"/>
-              </a:spcBef>
-            </a:pPr>
-            <a:r>
-              <a:rPr sz="1000" b="0">
-                <a:solidFill>
-                  <a:srgbClr val="010328"/>
-                </a:solidFill>
-              </a:rPr>
-              <a:t>[朴素] 质量分=0.5  较朴素 +0%</a:t>
-            </a:r>
-          </a:p>
-          <a:p>
-            <a:pPr algn="l">
-              <a:spcBef>
-                <a:spcPts val="100"/>
-              </a:spcBef>
-            </a:pPr>
-            <a:r>
-              <a:rPr sz="1000" b="0">
-                <a:solidFill>
-                  <a:srgbClr val="010328"/>
-                </a:solidFill>
-              </a:rPr>
-              <a:t>  回答: 建议：检查电源。</a:t>
-            </a:r>
-          </a:p>
-          <a:p>
-            <a:pPr algn="l">
-              <a:spcBef>
-                <a:spcPts val="100"/>
-              </a:spcBef>
-            </a:pPr>
-            <a:r>
-              <a:rPr sz="1000" b="0">
-                <a:solidFill>
-                  <a:srgbClr val="010328"/>
-                </a:solidFill>
-              </a:rPr>
-              <a:t>[角色] 质量分=1.0  较朴素 +50%</a:t>
-            </a:r>
-          </a:p>
-          <a:p>
-            <a:pPr algn="l">
-              <a:spcBef>
-                <a:spcPts val="100"/>
-              </a:spcBef>
-            </a:pPr>
-            <a:r>
-              <a:rPr sz="1000" b="0">
-                <a:solidFill>
-                  <a:srgbClr val="010328"/>
-                </a:solidFill>
-              </a:rPr>
-              <a:t>  回答: 建议：更换轴承（依据：3号泵振动在爬升，运转声…）</a:t>
-            </a:r>
-          </a:p>
-          <a:p>
-            <a:pPr algn="l">
-              <a:spcBef>
-                <a:spcPts val="100"/>
-              </a:spcBef>
-            </a:pPr>
-            <a:r>
-              <a:rPr sz="1000" b="0">
-                <a:solidFill>
-                  <a:srgbClr val="010328"/>
-                </a:solidFill>
-              </a:rPr>
-              <a:t>[示例] 质量分=1.0  较朴素 +50%</a:t>
-            </a:r>
-          </a:p>
-          <a:p>
-            <a:pPr algn="l">
-              <a:spcBef>
-                <a:spcPts val="100"/>
-              </a:spcBef>
-            </a:pPr>
-            <a:r>
-              <a:rPr sz="1000" b="0">
-                <a:solidFill>
-                  <a:srgbClr val="010328"/>
-                </a:solidFill>
-              </a:rPr>
-              <a:t>  回答: 建议：更换轴承（依据：3号泵振动在爬升，运转声…）</a:t>
-            </a:r>
-          </a:p>
-          <a:p>
-            <a:pPr algn="l">
-              <a:spcBef>
-                <a:spcPts val="100"/>
-              </a:spcBef>
-            </a:pPr>
-            <a:r>
-              <a:rPr sz="1000" b="0">
-                <a:solidFill>
-                  <a:srgbClr val="010328"/>
-                </a:solidFill>
-              </a:rPr>
-              <a:t>说明: 本演示走 starter 的离线规则通道（口径一致、零依赖）；设 OPENAI_BASE_URL 或起 工具/mock…</a:t>
-            </a:r>
-          </a:p>
-        </p:txBody>
-      </p:sp>
-      <p:sp>
-        <p:nvSpPr>
-          <p:cNvPr id="18" name="TextBox 17"/>
-          <p:cNvSpPr txBox="1"/>
-          <p:nvPr/>
-        </p:nvSpPr>
-        <p:spPr>
-          <a:xfrm>
-            <a:off x="960120" y="4297680"/>
-            <a:ext cx="10469880" cy="868680"/>
-          </a:xfrm>
-          <a:prstGeom prst="rect">
-            <a:avLst/>
-          </a:prstGeom>
-          <a:noFill/>
-        </p:spPr>
-        <p:txBody>
-          <a:bodyPr wrap="square" anchor="t" lIns="0" rIns="0" tIns="0" bIns="0">
-            <a:spAutoFit/>
-          </a:bodyPr>
-          <a:lstStyle/>
-          <a:p>
-            <a:pPr algn="l"/>
-            <a:r>
-              <a:rPr sz="1300" b="1">
-                <a:solidFill>
-                  <a:srgbClr val="0545E8"/>
-                </a:solidFill>
-              </a:rPr>
-              <a:t>② 关键自检点（对照工单逐项核对）</a:t>
-            </a:r>
-          </a:p>
-          <a:p>
-            <a:pPr algn="l">
-              <a:spcBef>
-                <a:spcPts val="200"/>
-              </a:spcBef>
-            </a:pPr>
-            <a:r>
-              <a:rPr sz="1150" b="0">
-                <a:solidFill>
-                  <a:srgbClr val="010328"/>
-                </a:solidFill>
-              </a:rPr>
-              <a:t>□ 代码从头跑到尾不报错　□ 指标与工单及格线逐项对齐　□ 随机种子已固定（可复现）</a:t>
-            </a:r>
-          </a:p>
-        </p:txBody>
-      </p:sp>
-      <p:sp>
-        <p:nvSpPr>
-          <p:cNvPr id="19" name="TextBox 18"/>
-          <p:cNvSpPr txBox="1"/>
-          <p:nvPr/>
-        </p:nvSpPr>
-        <p:spPr>
-          <a:xfrm>
-            <a:off x="960120" y="5431536"/>
-            <a:ext cx="10469880" cy="841248"/>
-          </a:xfrm>
-          <a:prstGeom prst="rect">
-            <a:avLst/>
-          </a:prstGeom>
-          <a:noFill/>
-        </p:spPr>
-        <p:txBody>
-          <a:bodyPr wrap="square" anchor="t" lIns="0" rIns="0" tIns="0" bIns="0">
-            <a:spAutoFit/>
-          </a:bodyPr>
-          <a:lstStyle/>
-          <a:p>
-            <a:pPr algn="l"/>
-            <a:r>
-              <a:rPr sz="1300" b="1">
-                <a:solidFill>
-                  <a:srgbClr val="F5670F"/>
-                </a:solidFill>
-              </a:rPr>
-              <a:t>③ 提交与达标（过程性证据）</a:t>
-            </a:r>
-          </a:p>
-          <a:p>
-            <a:pPr algn="l">
-              <a:spcBef>
-                <a:spcPts val="200"/>
-              </a:spcBef>
-            </a:pPr>
-            <a:r>
-              <a:rPr sz="1100" b="0">
-                <a:solidFill>
-                  <a:srgbClr val="010328"/>
-                </a:solidFill>
-              </a:rPr>
-              <a:t>达标线 D≥60 / C≥70 / B≥80 / A≥90　｜　提交 学号_姓名_工单号 + 运行截图 + 决策记录 + Git≥1次commit</a:t>
-            </a:r>
-          </a:p>
-        </p:txBody>
-      </p:sp>
-    </p:spTree>
-  </p:cSld>
-  <p:clrMapOvr>
-    <a:masterClrMapping/>
-  </p:clrMapOvr>
-</p:sld>
-</file>
-
 <file path=ppt/slides/slide15.xml><?xml version="1.0" encoding="utf-8"?>
 <p:sld xmlns:a="http://schemas.openxmlformats.org/drawingml/2006/main" xmlns:p="http://schemas.openxmlformats.org/presentationml/2006/main" xmlns:r="http://schemas.openxmlformats.org/officeDocument/2006/relationships">
   <p:cSld>
@@ -8387,7 +8394,7 @@
         <p:spPr>
           <a:xfrm>
             <a:off x="0" y="0"/>
-            <a:ext cx="12192000" cy="6858000"/>
+            <a:ext cx="12192000" cy="1150000"/>
           </a:xfrm>
           <a:prstGeom prst="rect">
             <a:avLst/>
@@ -8430,8 +8437,8 @@
         </p:nvSpPr>
         <p:spPr>
           <a:xfrm>
-            <a:off x="0" y="2880360"/>
-            <a:ext cx="12192000" cy="50000"/>
+            <a:off x="0" y="1150000"/>
+            <a:ext cx="2600000" cy="70000"/>
           </a:xfrm>
           <a:prstGeom prst="rect">
             <a:avLst/>
@@ -8474,178 +8481,8 @@
         </p:nvSpPr>
         <p:spPr>
           <a:xfrm>
-            <a:off x="0" y="1645920"/>
-            <a:ext cx="12192000" cy="1500000"/>
-          </a:xfrm>
-          <a:prstGeom prst="rect">
-            <a:avLst/>
-          </a:prstGeom>
-          <a:noFill/>
-        </p:spPr>
-        <p:txBody>
-          <a:bodyPr wrap="square" anchor="t">
-            <a:spAutoFit/>
-          </a:bodyPr>
-          <a:lstStyle/>
-          <a:p>
-            <a:pPr algn="ctr">
-              <a:lnSpc>
-                <a:spcPct val="110000"/>
-              </a:lnSpc>
-              <a:spcAft>
-                <a:spcPts val="600"/>
-              </a:spcAft>
-            </a:pPr>
-            <a:r>
-              <a:rPr sz="5400" b="1">
-                <a:solidFill>
-                  <a:srgbClr val="FFFFFF"/>
-                </a:solidFill>
-                <a:latin typeface="微软雅黑"/>
-              </a:rPr>
-              <a:t>THANKS</a:t>
-            </a:r>
-          </a:p>
-        </p:txBody>
-      </p:sp>
-      <p:sp>
-        <p:nvSpPr>
-          <p:cNvPr id="5" name="TextBox 4"/>
-          <p:cNvSpPr txBox="1"/>
-          <p:nvPr/>
-        </p:nvSpPr>
-        <p:spPr>
-          <a:xfrm>
-            <a:off x="0" y="3429000"/>
-            <a:ext cx="12192000" cy="800000"/>
-          </a:xfrm>
-          <a:prstGeom prst="rect">
-            <a:avLst/>
-          </a:prstGeom>
-          <a:noFill/>
-        </p:spPr>
-        <p:txBody>
-          <a:bodyPr wrap="square" anchor="t">
-            <a:spAutoFit/>
-          </a:bodyPr>
-          <a:lstStyle/>
-          <a:p>
-            <a:pPr algn="ctr">
-              <a:lnSpc>
-                <a:spcPct val="110000"/>
-              </a:lnSpc>
-              <a:spcAft>
-                <a:spcPts val="600"/>
-              </a:spcAft>
-            </a:pPr>
-            <a:r>
-              <a:rPr sz="2200" b="1">
-                <a:solidFill>
-                  <a:srgbClr val="F5670F"/>
-                </a:solidFill>
-                <a:latin typeface="微软雅黑"/>
-              </a:rPr>
-              <a:t>感谢聆听 · 动手实践出真知</a:t>
-            </a:r>
-          </a:p>
-        </p:txBody>
-      </p:sp>
-      <p:sp>
-        <p:nvSpPr>
-          <p:cNvPr id="6" name="TextBox 5"/>
-          <p:cNvSpPr txBox="1"/>
-          <p:nvPr/>
-        </p:nvSpPr>
-        <p:spPr>
-          <a:xfrm>
-            <a:off x="0" y="4526280"/>
-            <a:ext cx="12192000" cy="600000"/>
-          </a:xfrm>
-          <a:prstGeom prst="rect">
-            <a:avLst/>
-          </a:prstGeom>
-          <a:noFill/>
-        </p:spPr>
-        <p:txBody>
-          <a:bodyPr wrap="square" anchor="t">
-            <a:spAutoFit/>
-          </a:bodyPr>
-          <a:lstStyle/>
-          <a:p>
-            <a:pPr algn="ctr">
-              <a:lnSpc>
-                <a:spcPct val="110000"/>
-              </a:lnSpc>
-              <a:spcAft>
-                <a:spcPts val="600"/>
-              </a:spcAft>
-            </a:pPr>
-            <a:r>
-              <a:rPr sz="1400" b="0">
-                <a:solidFill>
-                  <a:srgbClr val="BBC6E6"/>
-                </a:solidFill>
-                <a:latin typeface="微软雅黑"/>
-              </a:rPr>
-              <a:t>以生为本   |   做中学 · 学中做</a:t>
-            </a:r>
-          </a:p>
-        </p:txBody>
-      </p:sp>
-      <p:sp>
-        <p:nvSpPr>
-          <p:cNvPr id="7" name="Rectangle 6"/>
-          <p:cNvSpPr/>
-          <p:nvPr/>
-        </p:nvSpPr>
-        <p:spPr>
-          <a:xfrm>
-            <a:off x="500000" y="6500000"/>
-            <a:ext cx="11100000" cy="20000"/>
-          </a:xfrm>
-          <a:prstGeom prst="rect">
-            <a:avLst/>
-          </a:prstGeom>
-          <a:solidFill>
-            <a:srgbClr val="C9D4EE"/>
-          </a:solidFill>
-          <a:ln>
-            <a:noFill/>
-          </a:ln>
-          <a:effectLst/>
-        </p:spPr>
-        <p:style>
-          <a:lnRef idx="1">
-            <a:schemeClr val="accent1"/>
-          </a:lnRef>
-          <a:fillRef idx="3">
-            <a:schemeClr val="accent1"/>
-          </a:fillRef>
-          <a:effectRef idx="2">
-            <a:schemeClr val="accent1"/>
-          </a:effectRef>
-          <a:fontRef idx="minor">
-            <a:schemeClr val="lt1"/>
-          </a:fontRef>
-        </p:style>
-        <p:txBody>
-          <a:bodyPr rtlCol="0" anchor="ctr"/>
-          <a:lstStyle/>
-          <a:p>
-            <a:pPr algn="ctr"/>
-          </a:p>
-        </p:txBody>
-      </p:sp>
-      <p:sp>
-        <p:nvSpPr>
-          <p:cNvPr id="8" name="TextBox 7"/>
-          <p:cNvSpPr txBox="1"/>
-          <p:nvPr/>
-        </p:nvSpPr>
-        <p:spPr>
-          <a:xfrm>
-            <a:off x="500000" y="6540000"/>
-            <a:ext cx="7000000" cy="300000"/>
+            <a:off x="700000" y="300000"/>
+            <a:ext cx="10792000" cy="700000"/>
           </a:xfrm>
           <a:prstGeom prst="rect">
             <a:avLst/>
@@ -8667,6 +8504,92 @@
               </a:spcAft>
             </a:pPr>
             <a:r>
+              <a:rPr sz="2400" b="1">
+                <a:solidFill>
+                  <a:srgbClr val="FFFFFF"/>
+                </a:solidFill>
+                <a:latin typeface="微软雅黑"/>
+              </a:rPr>
+              <a:t>实跑截图证据 · m41_prompt_lab</a:t>
+            </a:r>
+          </a:p>
+        </p:txBody>
+      </p:sp>
+      <p:sp>
+        <p:nvSpPr>
+          <p:cNvPr id="11" name="Rectangle 10"/>
+          <p:cNvSpPr/>
+          <p:nvPr/>
+        </p:nvSpPr>
+        <p:spPr>
+          <a:xfrm>
+            <a:off x="500000" y="6500000"/>
+            <a:ext cx="11100000" cy="20000"/>
+          </a:xfrm>
+          <a:prstGeom prst="rect">
+            <a:avLst/>
+          </a:prstGeom>
+          <a:solidFill>
+            <a:srgbClr val="C9D4EE"/>
+          </a:solidFill>
+          <a:ln>
+            <a:noFill/>
+          </a:ln>
+          <a:effectLst/>
+        </p:spPr>
+        <p:style>
+          <a:lnRef idx="1">
+            <a:schemeClr val="accent1"/>
+          </a:lnRef>
+          <a:fillRef idx="3">
+            <a:schemeClr val="accent1"/>
+          </a:fillRef>
+          <a:effectRef idx="2">
+            <a:schemeClr val="accent1"/>
+          </a:effectRef>
+          <a:fontRef idx="minor">
+            <a:schemeClr val="lt1"/>
+          </a:fontRef>
+        </p:style>
+        <p:txBody>
+          <a:bodyPr rtlCol="0" anchor="ctr"/>
+          <a:lstStyle/>
+          <a:p>
+            <a:pPr algn="ctr"/>
+          </a:p>
+        </p:txBody>
+      </p:sp>
+      <p:sp>
+        <p:nvSpPr>
+          <p:cNvPr id="12" name="TextBox 11"/>
+          <p:cNvSpPr txBox="1"/>
+          <p:nvPr/>
+        </p:nvSpPr>
+        <p:spPr>
+          <a:xfrm>
+            <a:off x="500000" y="6540000"/>
+            <a:ext cx="7000000" cy="300000"/>
+          </a:xfrm>
+          <a:prstGeom prst="rect">
+            <a:avLst/>
+          </a:prstGeom>
+          <a:noFill/>
+        </p:spPr>
+        <p:txBody>
+          <a:bodyPr wrap="square" anchor="t">
+            <a:spAutoFit/>
+          </a:bodyPr>
+          <a:lstStyle/>
+          <a:p>
+            <a:pPr algn="l">
+              <a:lnSpc>
+                <a:spcPct val="110000"/>
+              </a:lnSpc>
+              <a:spcAft>
+                <a:spcPts val="600"/>
+              </a:spcAft>
+            </a:pPr>
+            <a:r>
               <a:rPr sz="1000" b="0">
                 <a:solidFill>
                   <a:srgbClr val="8A97B5"/>
@@ -8680,7 +8603,7 @@
       </p:sp>
       <p:sp>
         <p:nvSpPr>
-          <p:cNvPr id="9" name="TextBox 8"/>
+          <p:cNvPr id="13" name="TextBox 12"/>
           <p:cNvSpPr txBox="1"/>
           <p:nvPr/>
         </p:nvSpPr>
@@ -8695,7 +8618,7 @@
           <a:noFill/>
         </p:spPr>
         <p:txBody>
-          <a:bodyPr wrap="square" anchor="ctr">
+          <a:bodyPr wrap="square" anchor="t">
             <a:spAutoFit/>
           </a:bodyPr>
           <a:lstStyle/>
@@ -8715,7 +8638,522 @@
                 </a:solidFill>
                 <a:latin typeface="微软雅黑"/>
               </a:rPr>
-              <a:t>15 / 18</a:t>
+              <a:t>15 / 20</a:t>
+            </a:r>
+          </a:p>
+        </p:txBody>
+      </p:sp>
+      <p:sp>
+        <p:nvSpPr>
+          <p:cNvPr id="14" name="Rectangle 13"/>
+          <p:cNvSpPr/>
+          <p:nvPr/>
+        </p:nvSpPr>
+        <p:spPr>
+          <a:xfrm>
+            <a:off x="457200" y="1481328"/>
+            <a:ext cx="5486400" cy="2304288"/>
+          </a:xfrm>
+          <a:prstGeom prst="rect">
+            <a:avLst/>
+          </a:prstGeom>
+          <a:solidFill>
+            <a:srgbClr val="FFFFFF"/>
+          </a:solidFill>
+          <a:ln>
+            <a:solidFill>
+              <a:srgbClr val="D6DCE4"/>
+            </a:solidFill>
+          </a:ln>
+          <a:effectLst/>
+        </p:spPr>
+        <p:style>
+          <a:lnRef idx="1">
+            <a:schemeClr val="accent1"/>
+          </a:lnRef>
+          <a:fillRef idx="3">
+            <a:schemeClr val="accent1"/>
+          </a:fillRef>
+          <a:effectRef idx="2">
+            <a:schemeClr val="accent1"/>
+          </a:effectRef>
+          <a:fontRef idx="minor">
+            <a:schemeClr val="lt1"/>
+          </a:fontRef>
+        </p:style>
+        <p:txBody>
+          <a:bodyPr rtlCol="0" anchor="ctr" wrap="square"/>
+          <a:lstStyle/>
+          <a:p>
+            <a:pPr algn="ctr"/>
+          </a:p>
+        </p:txBody>
+      </p:sp>
+      <p:sp>
+        <p:nvSpPr>
+          <p:cNvPr id="15" name="TextBox 14"/>
+          <p:cNvSpPr txBox="1"/>
+          <p:nvPr/>
+        </p:nvSpPr>
+        <p:spPr>
+          <a:xfrm>
+            <a:off x="530352" y="1517904"/>
+            <a:ext cx="5340096" cy="237744"/>
+          </a:xfrm>
+          <a:prstGeom prst="rect">
+            <a:avLst/>
+          </a:prstGeom>
+          <a:noFill/>
+        </p:spPr>
+        <p:txBody>
+          <a:bodyPr wrap="square">
+            <a:spAutoFit/>
+          </a:bodyPr>
+          <a:lstStyle/>
+          <a:p>
+            <a:r>
+              <a:rPr sz="950" b="1">
+                <a:solidFill>
+                  <a:srgbClr val="010328"/>
+                </a:solidFill>
+                <a:latin typeface="微软雅黑"/>
+              </a:rPr>
+              <a:t>① run.py 实跑终端输出（逐字捕获）</a:t>
+            </a:r>
+          </a:p>
+        </p:txBody>
+      </p:sp>
+      <p:pic>
+        <p:nvPicPr>
+          <p:cNvPr id="16" name="Picture 15" descr="shot_run.png"/>
+          <p:cNvPicPr>
+            <a:picLocks noChangeAspect="1"/>
+          </p:cNvPicPr>
+          <p:nvPr/>
+        </p:nvPicPr>
+        <p:blipFill>
+          <a:blip r:embed="rId2"/>
+          <a:stretch>
+            <a:fillRect/>
+          </a:stretch>
+        </p:blipFill>
+        <p:spPr>
+          <a:xfrm>
+            <a:off x="964038" y="1773936"/>
+            <a:ext cx="4472722" cy="1956816"/>
+          </a:xfrm>
+          <a:prstGeom prst="rect">
+            <a:avLst/>
+          </a:prstGeom>
+        </p:spPr>
+      </p:pic>
+      <p:sp>
+        <p:nvSpPr>
+          <p:cNvPr id="17" name="Rectangle 16"/>
+          <p:cNvSpPr/>
+          <p:nvPr/>
+        </p:nvSpPr>
+        <p:spPr>
+          <a:xfrm>
+            <a:off x="6327648" y="1481328"/>
+            <a:ext cx="5486400" cy="2304288"/>
+          </a:xfrm>
+          <a:prstGeom prst="rect">
+            <a:avLst/>
+          </a:prstGeom>
+          <a:solidFill>
+            <a:srgbClr val="FFFFFF"/>
+          </a:solidFill>
+          <a:ln>
+            <a:solidFill>
+              <a:srgbClr val="D6DCE4"/>
+            </a:solidFill>
+          </a:ln>
+          <a:effectLst/>
+        </p:spPr>
+        <p:style>
+          <a:lnRef idx="1">
+            <a:schemeClr val="accent1"/>
+          </a:lnRef>
+          <a:fillRef idx="3">
+            <a:schemeClr val="accent1"/>
+          </a:fillRef>
+          <a:effectRef idx="2">
+            <a:schemeClr val="accent1"/>
+          </a:effectRef>
+          <a:fontRef idx="minor">
+            <a:schemeClr val="lt1"/>
+          </a:fontRef>
+        </p:style>
+        <p:txBody>
+          <a:bodyPr rtlCol="0" anchor="ctr" wrap="square"/>
+          <a:lstStyle/>
+          <a:p>
+            <a:pPr algn="ctr"/>
+          </a:p>
+        </p:txBody>
+      </p:sp>
+      <p:sp>
+        <p:nvSpPr>
+          <p:cNvPr id="18" name="TextBox 17"/>
+          <p:cNvSpPr txBox="1"/>
+          <p:nvPr/>
+        </p:nvSpPr>
+        <p:spPr>
+          <a:xfrm>
+            <a:off x="6400800" y="1517904"/>
+            <a:ext cx="5340096" cy="237744"/>
+          </a:xfrm>
+          <a:prstGeom prst="rect">
+            <a:avLst/>
+          </a:prstGeom>
+          <a:noFill/>
+        </p:spPr>
+        <p:txBody>
+          <a:bodyPr wrap="square">
+            <a:spAutoFit/>
+          </a:bodyPr>
+          <a:lstStyle/>
+          <a:p>
+            <a:r>
+              <a:rPr sz="950" b="1">
+                <a:solidFill>
+                  <a:srgbClr val="010328"/>
+                </a:solidFill>
+                <a:latin typeface="微软雅黑"/>
+              </a:rPr>
+              <a:t>② pytest 全绿终端输出（逐字捕获）</a:t>
+            </a:r>
+          </a:p>
+        </p:txBody>
+      </p:sp>
+      <p:pic>
+        <p:nvPicPr>
+          <p:cNvPr id="19" name="Picture 18" descr="shot_test.png"/>
+          <p:cNvPicPr>
+            <a:picLocks noChangeAspect="1"/>
+          </p:cNvPicPr>
+          <p:nvPr/>
+        </p:nvPicPr>
+        <p:blipFill>
+          <a:blip r:embed="rId3"/>
+          <a:stretch>
+            <a:fillRect/>
+          </a:stretch>
+        </p:blipFill>
+        <p:spPr>
+          <a:xfrm>
+            <a:off x="6834486" y="1773936"/>
+            <a:ext cx="4472722" cy="1956816"/>
+          </a:xfrm>
+          <a:prstGeom prst="rect">
+            <a:avLst/>
+          </a:prstGeom>
+        </p:spPr>
+      </p:pic>
+      <p:sp>
+        <p:nvSpPr>
+          <p:cNvPr id="20" name="Rectangle 19"/>
+          <p:cNvSpPr/>
+          <p:nvPr/>
+        </p:nvSpPr>
+        <p:spPr>
+          <a:xfrm>
+            <a:off x="457200" y="3877056"/>
+            <a:ext cx="5486400" cy="2304288"/>
+          </a:xfrm>
+          <a:prstGeom prst="rect">
+            <a:avLst/>
+          </a:prstGeom>
+          <a:solidFill>
+            <a:srgbClr val="FFFFFF"/>
+          </a:solidFill>
+          <a:ln>
+            <a:solidFill>
+              <a:srgbClr val="D6DCE4"/>
+            </a:solidFill>
+          </a:ln>
+          <a:effectLst/>
+        </p:spPr>
+        <p:style>
+          <a:lnRef idx="1">
+            <a:schemeClr val="accent1"/>
+          </a:lnRef>
+          <a:fillRef idx="3">
+            <a:schemeClr val="accent1"/>
+          </a:fillRef>
+          <a:effectRef idx="2">
+            <a:schemeClr val="accent1"/>
+          </a:effectRef>
+          <a:fontRef idx="minor">
+            <a:schemeClr val="lt1"/>
+          </a:fontRef>
+        </p:style>
+        <p:txBody>
+          <a:bodyPr rtlCol="0" anchor="ctr" wrap="square"/>
+          <a:lstStyle/>
+          <a:p>
+            <a:pPr algn="ctr"/>
+          </a:p>
+        </p:txBody>
+      </p:sp>
+      <p:sp>
+        <p:nvSpPr>
+          <p:cNvPr id="21" name="TextBox 20"/>
+          <p:cNvSpPr txBox="1"/>
+          <p:nvPr/>
+        </p:nvSpPr>
+        <p:spPr>
+          <a:xfrm>
+            <a:off x="530352" y="3913632"/>
+            <a:ext cx="5340096" cy="237744"/>
+          </a:xfrm>
+          <a:prstGeom prst="rect">
+            <a:avLst/>
+          </a:prstGeom>
+          <a:noFill/>
+        </p:spPr>
+        <p:txBody>
+          <a:bodyPr wrap="square">
+            <a:spAutoFit/>
+          </a:bodyPr>
+          <a:lstStyle/>
+          <a:p>
+            <a:r>
+              <a:rPr sz="950" b="1">
+                <a:solidFill>
+                  <a:srgbClr val="010328"/>
+                </a:solidFill>
+                <a:latin typeface="微软雅黑"/>
+              </a:rPr>
+              <a:t>③ report.txt「验收档位判定（实测）」段</a:t>
+            </a:r>
+          </a:p>
+        </p:txBody>
+      </p:sp>
+      <p:pic>
+        <p:nvPicPr>
+          <p:cNvPr id="22" name="Picture 21" descr="shot_report.png"/>
+          <p:cNvPicPr>
+            <a:picLocks noChangeAspect="1"/>
+          </p:cNvPicPr>
+          <p:nvPr/>
+        </p:nvPicPr>
+        <p:blipFill>
+          <a:blip r:embed="rId4"/>
+          <a:stretch>
+            <a:fillRect/>
+          </a:stretch>
+        </p:blipFill>
+        <p:spPr>
+          <a:xfrm>
+            <a:off x="964038" y="4169664"/>
+            <a:ext cx="4472722" cy="1956816"/>
+          </a:xfrm>
+          <a:prstGeom prst="rect">
+            <a:avLst/>
+          </a:prstGeom>
+        </p:spPr>
+      </p:pic>
+      <p:sp>
+        <p:nvSpPr>
+          <p:cNvPr id="23" name="Rectangle 22"/>
+          <p:cNvSpPr/>
+          <p:nvPr/>
+        </p:nvSpPr>
+        <p:spPr>
+          <a:xfrm>
+            <a:off x="6327648" y="3877056"/>
+            <a:ext cx="5486400" cy="2304288"/>
+          </a:xfrm>
+          <a:prstGeom prst="rect">
+            <a:avLst/>
+          </a:prstGeom>
+          <a:solidFill>
+            <a:srgbClr val="F7F9FB"/>
+          </a:solidFill>
+          <a:ln>
+            <a:solidFill>
+              <a:srgbClr val="D6DCE4"/>
+            </a:solidFill>
+          </a:ln>
+          <a:effectLst/>
+        </p:spPr>
+        <p:style>
+          <a:lnRef idx="1">
+            <a:schemeClr val="accent1"/>
+          </a:lnRef>
+          <a:fillRef idx="3">
+            <a:schemeClr val="accent1"/>
+          </a:fillRef>
+          <a:effectRef idx="2">
+            <a:schemeClr val="accent1"/>
+          </a:effectRef>
+          <a:fontRef idx="minor">
+            <a:schemeClr val="lt1"/>
+          </a:fontRef>
+        </p:style>
+        <p:txBody>
+          <a:bodyPr rtlCol="0" anchor="ctr" wrap="square"/>
+          <a:lstStyle/>
+          <a:p>
+            <a:pPr algn="ctr"/>
+          </a:p>
+        </p:txBody>
+      </p:sp>
+      <p:sp>
+        <p:nvSpPr>
+          <p:cNvPr id="24" name="TextBox 23"/>
+          <p:cNvSpPr txBox="1"/>
+          <p:nvPr/>
+        </p:nvSpPr>
+        <p:spPr>
+          <a:xfrm>
+            <a:off x="6400800" y="3913632"/>
+            <a:ext cx="5340096" cy="237744"/>
+          </a:xfrm>
+          <a:prstGeom prst="rect">
+            <a:avLst/>
+          </a:prstGeom>
+          <a:noFill/>
+        </p:spPr>
+        <p:txBody>
+          <a:bodyPr wrap="square">
+            <a:spAutoFit/>
+          </a:bodyPr>
+          <a:lstStyle/>
+          <a:p>
+            <a:r>
+              <a:rPr sz="950" b="1">
+                <a:solidFill>
+                  <a:srgbClr val="010328"/>
+                </a:solidFill>
+                <a:latin typeface="微软雅黑"/>
+              </a:rPr>
+              <a:t>④ 采集口径（可复现）</a:t>
+            </a:r>
+          </a:p>
+        </p:txBody>
+      </p:sp>
+      <p:sp>
+        <p:nvSpPr>
+          <p:cNvPr id="25" name="TextBox 24"/>
+          <p:cNvSpPr txBox="1"/>
+          <p:nvPr/>
+        </p:nvSpPr>
+        <p:spPr>
+          <a:xfrm>
+            <a:off x="6437376" y="4187952"/>
+            <a:ext cx="5266944" cy="1920240"/>
+          </a:xfrm>
+          <a:prstGeom prst="rect">
+            <a:avLst/>
+          </a:prstGeom>
+          <a:noFill/>
+        </p:spPr>
+        <p:txBody>
+          <a:bodyPr wrap="square">
+            <a:spAutoFit/>
+          </a:bodyPr>
+          <a:lstStyle/>
+          <a:p>
+            <a:r>
+              <a:rPr sz="950" b="0">
+                <a:solidFill>
+                  <a:srgbClr val="2B2F36"/>
+                </a:solidFill>
+                <a:latin typeface="微软雅黑"/>
+              </a:rPr>
+              <a:t>项目：05-AI应用基础48课时版/工程化项目/m41_prompt_lab/</a:t>
+            </a:r>
+          </a:p>
+          <a:p>
+            <a:r>
+              <a:rPr sz="950" b="0">
+                <a:solidFill>
+                  <a:srgbClr val="2B2F36"/>
+                </a:solidFill>
+                <a:latin typeface="微软雅黑"/>
+              </a:rPr>
+              <a:t>命令：/opt/anaconda3/bin/python run.py ｜ /opt/anaconda3/bin/python -m pytest -q</a:t>
+            </a:r>
+          </a:p>
+          <a:p>
+            <a:r>
+              <a:rPr sz="950" b="0">
+                <a:solidFill>
+                  <a:srgbClr val="2B2F36"/>
+                </a:solidFill>
+                <a:latin typeface="微软雅黑"/>
+              </a:rPr>
+              <a:t>采集：工具/ppt97/capture97.py（2026-10-28 10:48 真跑逐字捕获输出）</a:t>
+            </a:r>
+          </a:p>
+          <a:p>
+            <a:r>
+              <a:rPr sz="950" b="0">
+                <a:solidFill>
+                  <a:srgbClr val="2B2F36"/>
+                </a:solidFill>
+                <a:latin typeface="微软雅黑"/>
+              </a:rPr>
+              <a:t>渲染：工具/ppt97/terminal_png.py（终端截图，不改写任何数字）</a:t>
+            </a:r>
+          </a:p>
+          <a:p>
+            <a:r>
+              <a:rPr sz="950" b="0">
+                <a:solidFill>
+                  <a:srgbClr val="2B2F36"/>
+                </a:solidFill>
+                <a:latin typeface="微软雅黑"/>
+              </a:rPr>
+              <a:t>退出码：run=0 ｜ pytest=0</a:t>
+            </a:r>
+          </a:p>
+          <a:p>
+            <a:r>
+              <a:rPr sz="950" b="0">
+                <a:solidFill>
+                  <a:srgbClr val="2B2F36"/>
+                </a:solidFill>
+                <a:latin typeface="微软雅黑"/>
+              </a:rPr>
+              <a:t>档位判定取自 output/report.txt「验收档位判定（实测）」段</a:t>
+            </a:r>
+          </a:p>
+        </p:txBody>
+      </p:sp>
+      <p:sp>
+        <p:nvSpPr>
+          <p:cNvPr id="26" name="TextBox 25"/>
+          <p:cNvSpPr txBox="1"/>
+          <p:nvPr/>
+        </p:nvSpPr>
+        <p:spPr>
+          <a:xfrm>
+            <a:off x="457200" y="6254496"/>
+            <a:ext cx="11247120" cy="201168"/>
+          </a:xfrm>
+          <a:prstGeom prst="rect">
+            <a:avLst/>
+          </a:prstGeom>
+          <a:noFill/>
+        </p:spPr>
+        <p:txBody>
+          <a:bodyPr wrap="square">
+            <a:spAutoFit/>
+          </a:bodyPr>
+          <a:lstStyle/>
+          <a:p>
+            <a:r>
+              <a:rPr sz="900" b="0">
+                <a:solidFill>
+                  <a:srgbClr val="7A8698"/>
+                </a:solidFill>
+                <a:latin typeface="微软雅黑"/>
+              </a:rPr>
+              <a:t>截图内容逐字取自 工具/ppt97/evidence/m41_prompt_lab/（capture97.py 真跑捕获，未改写数字）</a:t>
             </a:r>
           </a:p>
         </p:txBody>
@@ -8863,27 +9301,27 @@
                 </a:solidFill>
                 <a:latin typeface="微软雅黑"/>
               </a:rPr>
-              <a:t>下次课预告（第18周）</a:t>
-            </a:r>
-          </a:p>
-        </p:txBody>
-      </p:sp>
-      <p:sp>
-        <p:nvSpPr>
-          <p:cNvPr id="5" name="Rectangle 4"/>
+              <a:t>工单完成效果图 · 完成后长这样（真实运行 · 参考实现） · 课末对照</a:t>
+            </a:r>
+          </a:p>
+        </p:txBody>
+      </p:sp>
+      <p:sp>
+        <p:nvSpPr>
+          <p:cNvPr id="11" name="Rectangle 10"/>
           <p:cNvSpPr/>
           <p:nvPr/>
         </p:nvSpPr>
         <p:spPr>
           <a:xfrm>
-            <a:off x="760000" y="1900000"/>
-            <a:ext cx="10900000" cy="1600000"/>
+            <a:off x="500000" y="6500000"/>
+            <a:ext cx="11100000" cy="20000"/>
           </a:xfrm>
           <a:prstGeom prst="rect">
             <a:avLst/>
           </a:prstGeom>
           <a:solidFill>
-            <a:srgbClr val="F3F6FD"/>
+            <a:srgbClr val="C9D4EE"/>
           </a:solidFill>
           <a:ln>
             <a:noFill/>
@@ -8914,58 +9352,14 @@
       </p:sp>
       <p:sp>
         <p:nvSpPr>
-          <p:cNvPr id="6" name="Rectangle 5"/>
-          <p:cNvSpPr/>
-          <p:nvPr/>
-        </p:nvSpPr>
-        <p:spPr>
-          <a:xfrm>
-            <a:off x="760000" y="1900000"/>
-            <a:ext cx="150000" cy="1600000"/>
-          </a:xfrm>
-          <a:prstGeom prst="rect">
-            <a:avLst/>
-          </a:prstGeom>
-          <a:solidFill>
-            <a:srgbClr val="F5670F"/>
-          </a:solidFill>
-          <a:ln>
-            <a:noFill/>
-          </a:ln>
-          <a:effectLst/>
-        </p:spPr>
-        <p:style>
-          <a:lnRef idx="1">
-            <a:schemeClr val="accent1"/>
-          </a:lnRef>
-          <a:fillRef idx="3">
-            <a:schemeClr val="accent1"/>
-          </a:fillRef>
-          <a:effectRef idx="2">
-            <a:schemeClr val="accent1"/>
-          </a:effectRef>
-          <a:fontRef idx="minor">
-            <a:schemeClr val="lt1"/>
-          </a:fontRef>
-        </p:style>
-        <p:txBody>
-          <a:bodyPr rtlCol="0" anchor="ctr"/>
-          <a:lstStyle/>
-          <a:p>
-            <a:pPr algn="ctr"/>
-          </a:p>
-        </p:txBody>
-      </p:sp>
-      <p:sp>
-        <p:nvSpPr>
-          <p:cNvPr id="7" name="TextBox 6"/>
+          <p:cNvPr id="12" name="TextBox 11"/>
           <p:cNvSpPr txBox="1"/>
           <p:nvPr/>
         </p:nvSpPr>
         <p:spPr>
           <a:xfrm>
-            <a:off x="1020000" y="2050000"/>
-            <a:ext cx="10500000" cy="1400000"/>
+            <a:off x="500000" y="6540000"/>
+            <a:ext cx="7000000" cy="300000"/>
           </a:xfrm>
           <a:prstGeom prst="rect">
             <a:avLst/>
@@ -8987,17 +9381,40 @@
               </a:spcAft>
             </a:pPr>
             <a:r>
-              <a:rPr sz="1700" b="1">
-                <a:solidFill>
-                  <a:srgbClr val="010328"/>
-                </a:solidFill>
-                <a:latin typeface="微软雅黑"/>
-              </a:rPr>
-              <a:t>主题: 能搭建最小RAG问答链路——应用：见工单star</a:t>
-            </a:r>
-          </a:p>
-          <a:p>
-            <a:pPr algn="l">
+              <a:rPr sz="1000" b="0">
+                <a:solidFill>
+                  <a:srgbClr val="8A97B5"/>
+                </a:solidFill>
+                <a:latin typeface="微软雅黑"/>
+              </a:rPr>
+              <a:t>两江智造集团 · AI应用基础48课时版</a:t>
+            </a:r>
+          </a:p>
+        </p:txBody>
+      </p:sp>
+      <p:sp>
+        <p:nvSpPr>
+          <p:cNvPr id="13" name="TextBox 12"/>
+          <p:cNvSpPr txBox="1"/>
+          <p:nvPr/>
+        </p:nvSpPr>
+        <p:spPr>
+          <a:xfrm>
+            <a:off x="10600000" y="6540000"/>
+            <a:ext cx="1000000" cy="300000"/>
+          </a:xfrm>
+          <a:prstGeom prst="rect">
+            <a:avLst/>
+          </a:prstGeom>
+          <a:noFill/>
+        </p:spPr>
+        <p:txBody>
+          <a:bodyPr wrap="square" anchor="t">
+            <a:spAutoFit/>
+          </a:bodyPr>
+          <a:lstStyle/>
+          <a:p>
+            <a:pPr algn="r">
               <a:lnSpc>
                 <a:spcPct val="110000"/>
               </a:lnSpc>
@@ -9006,27 +9423,165 @@
               </a:spcAft>
             </a:pPr>
             <a:r>
-              <a:rPr sz="1300" b="0">
-                <a:solidFill>
-                  <a:srgbClr val="44546A"/>
-                </a:solidFill>
-                <a:latin typeface="微软雅黑"/>
-              </a:rPr>
-              <a:t>预习快问: W17课中查①：'Connection refused'这个报错怎么排查？</a:t>
-            </a:r>
-          </a:p>
-        </p:txBody>
-      </p:sp>
-      <p:sp>
-        <p:nvSpPr>
-          <p:cNvPr id="8" name="TextBox 7"/>
+              <a:rPr sz="1000" b="0">
+                <a:solidFill>
+                  <a:srgbClr val="8A97B5"/>
+                </a:solidFill>
+                <a:latin typeface="微软雅黑"/>
+              </a:rPr>
+              <a:t>16 / 20</a:t>
+            </a:r>
+          </a:p>
+        </p:txBody>
+      </p:sp>
+      <p:sp>
+        <p:nvSpPr>
+          <p:cNvPr id="14" name="Rounded Rectangle 13"/>
+          <p:cNvSpPr/>
+          <p:nvPr/>
+        </p:nvSpPr>
+        <p:spPr>
+          <a:xfrm>
+            <a:off x="758952" y="1801368"/>
+            <a:ext cx="10899648" cy="2286000"/>
+          </a:xfrm>
+          <a:prstGeom prst="roundRect">
+            <a:avLst>
+              <a:gd name="adj" fmla="val 6000"/>
+            </a:avLst>
+          </a:prstGeom>
+          <a:solidFill>
+            <a:srgbClr val="F3F6FD"/>
+          </a:solidFill>
+          <a:ln w="9525">
+            <a:solidFill>
+              <a:srgbClr val="C9D4EE"/>
+            </a:solidFill>
+          </a:ln>
+          <a:effectLst/>
+        </p:spPr>
+        <p:style>
+          <a:lnRef idx="1">
+            <a:schemeClr val="accent1"/>
+          </a:lnRef>
+          <a:fillRef idx="3">
+            <a:schemeClr val="accent1"/>
+          </a:fillRef>
+          <a:effectRef idx="2">
+            <a:schemeClr val="accent1"/>
+          </a:effectRef>
+          <a:fontRef idx="minor">
+            <a:schemeClr val="lt1"/>
+          </a:fontRef>
+        </p:style>
+        <p:txBody>
+          <a:bodyPr rtlCol="0" anchor="ctr"/>
+          <a:lstStyle/>
+          <a:p/>
+        </p:txBody>
+      </p:sp>
+      <p:sp>
+        <p:nvSpPr>
+          <p:cNvPr id="15" name="Rounded Rectangle 14"/>
+          <p:cNvSpPr/>
+          <p:nvPr/>
+        </p:nvSpPr>
+        <p:spPr>
+          <a:xfrm>
+            <a:off x="758952" y="4178808"/>
+            <a:ext cx="10899648" cy="1051560"/>
+          </a:xfrm>
+          <a:prstGeom prst="roundRect">
+            <a:avLst>
+              <a:gd name="adj" fmla="val 6000"/>
+            </a:avLst>
+          </a:prstGeom>
+          <a:solidFill>
+            <a:srgbClr val="FFFFFF"/>
+          </a:solidFill>
+          <a:ln w="9525">
+            <a:solidFill>
+              <a:srgbClr val="C9D4EE"/>
+            </a:solidFill>
+          </a:ln>
+          <a:effectLst/>
+        </p:spPr>
+        <p:style>
+          <a:lnRef idx="1">
+            <a:schemeClr val="accent1"/>
+          </a:lnRef>
+          <a:fillRef idx="3">
+            <a:schemeClr val="accent1"/>
+          </a:fillRef>
+          <a:effectRef idx="2">
+            <a:schemeClr val="accent1"/>
+          </a:effectRef>
+          <a:fontRef idx="minor">
+            <a:schemeClr val="lt1"/>
+          </a:fontRef>
+        </p:style>
+        <p:txBody>
+          <a:bodyPr rtlCol="0" anchor="ctr"/>
+          <a:lstStyle/>
+          <a:p/>
+        </p:txBody>
+      </p:sp>
+      <p:sp>
+        <p:nvSpPr>
+          <p:cNvPr id="16" name="Rounded Rectangle 15"/>
+          <p:cNvSpPr/>
+          <p:nvPr/>
+        </p:nvSpPr>
+        <p:spPr>
+          <a:xfrm>
+            <a:off x="758952" y="5321808"/>
+            <a:ext cx="10899648" cy="1005840"/>
+          </a:xfrm>
+          <a:prstGeom prst="roundRect">
+            <a:avLst>
+              <a:gd name="adj" fmla="val 6000"/>
+            </a:avLst>
+          </a:prstGeom>
+          <a:solidFill>
+            <a:srgbClr val="FFFFFF"/>
+          </a:solidFill>
+          <a:ln w="9525">
+            <a:solidFill>
+              <a:srgbClr val="C9D4EE"/>
+            </a:solidFill>
+          </a:ln>
+          <a:effectLst/>
+        </p:spPr>
+        <p:style>
+          <a:lnRef idx="1">
+            <a:schemeClr val="accent1"/>
+          </a:lnRef>
+          <a:fillRef idx="3">
+            <a:schemeClr val="accent1"/>
+          </a:fillRef>
+          <a:effectRef idx="2">
+            <a:schemeClr val="accent1"/>
+          </a:effectRef>
+          <a:fontRef idx="minor">
+            <a:schemeClr val="lt1"/>
+          </a:fontRef>
+        </p:style>
+        <p:txBody>
+          <a:bodyPr rtlCol="0" anchor="ctr"/>
+          <a:lstStyle/>
+          <a:p/>
+        </p:txBody>
+      </p:sp>
+      <p:sp>
+        <p:nvSpPr>
+          <p:cNvPr id="17" name="TextBox 16"/>
           <p:cNvSpPr txBox="1"/>
           <p:nvPr/>
         </p:nvSpPr>
         <p:spPr>
           <a:xfrm>
-            <a:off x="760000" y="3900000"/>
-            <a:ext cx="10900000" cy="900000"/>
+            <a:off x="960120" y="1929384"/>
+            <a:ext cx="10469880" cy="2048256"/>
           </a:xfrm>
           <a:prstGeom prst="rect">
             <a:avLst/>
@@ -9034,46 +9589,252 @@
           <a:noFill/>
         </p:spPr>
         <p:txBody>
-          <a:bodyPr wrap="square" anchor="t">
+          <a:bodyPr wrap="square" anchor="t" lIns="0" rIns="0" tIns="0" bIns="0">
             <a:spAutoFit/>
           </a:bodyPr>
           <a:lstStyle/>
           <a:p>
+            <a:pPr algn="l"/>
+            <a:r>
+              <a:rPr sz="1400" b="1">
+                <a:solidFill>
+                  <a:srgbClr val="0545E8"/>
+                </a:solidFill>
+              </a:rPr>
+              <a:t>① 参考实现真实运行输出（本工单完成态）</a:t>
+            </a:r>
+          </a:p>
+          <a:p>
             <a:pPr algn="l">
-              <a:lnSpc>
-                <a:spcPct val="110000"/>
-              </a:lnSpc>
-              <a:spcAft>
-                <a:spcPts val="600"/>
-              </a:spcAft>
+              <a:spcBef>
+                <a:spcPts val="100"/>
+              </a:spcBef>
             </a:pPr>
             <a:r>
-              <a:rPr sz="1400" b="1">
+              <a:rPr sz="1000" b="0">
+                <a:solidFill>
+                  <a:srgbClr val="010328"/>
+                </a:solidFill>
+              </a:rPr>
+              <a:t>=== 工单 M4-1 LLM 故障诊断·三版 Prompt 对比 · 完成态 ===</a:t>
+            </a:r>
+          </a:p>
+          <a:p>
+            <a:pPr algn="l">
+              <a:spcBef>
+                <a:spcPts val="100"/>
+              </a:spcBef>
+            </a:pPr>
+            <a:r>
+              <a:rPr sz="1000" b="0">
+                <a:solidFill>
+                  <a:srgbClr val="010328"/>
+                </a:solidFill>
+              </a:rPr>
+              <a:t>问题（仅给症状，不含诊断关键词）: 3号泵振动在爬升，运转声音发闷，帮我看看。</a:t>
+            </a:r>
+          </a:p>
+          <a:p>
+            <a:pPr algn="l">
+              <a:spcBef>
+                <a:spcPts val="100"/>
+              </a:spcBef>
+            </a:pPr>
+            <a:r>
+              <a:rPr sz="1000" b="0">
+                <a:solidFill>
+                  <a:srgbClr val="010328"/>
+                </a:solidFill>
+              </a:rPr>
+              <a:t>[朴素] 质量分=0.5  较朴素 +0%</a:t>
+            </a:r>
+          </a:p>
+          <a:p>
+            <a:pPr algn="l">
+              <a:spcBef>
+                <a:spcPts val="100"/>
+              </a:spcBef>
+            </a:pPr>
+            <a:r>
+              <a:rPr sz="1000" b="0">
+                <a:solidFill>
+                  <a:srgbClr val="010328"/>
+                </a:solidFill>
+              </a:rPr>
+              <a:t>  回答: 建议：检查电源。</a:t>
+            </a:r>
+          </a:p>
+          <a:p>
+            <a:pPr algn="l">
+              <a:spcBef>
+                <a:spcPts val="100"/>
+              </a:spcBef>
+            </a:pPr>
+            <a:r>
+              <a:rPr sz="1000" b="0">
+                <a:solidFill>
+                  <a:srgbClr val="010328"/>
+                </a:solidFill>
+              </a:rPr>
+              <a:t>[角色] 质量分=1.0  较朴素 +50%</a:t>
+            </a:r>
+          </a:p>
+          <a:p>
+            <a:pPr algn="l">
+              <a:spcBef>
+                <a:spcPts val="100"/>
+              </a:spcBef>
+            </a:pPr>
+            <a:r>
+              <a:rPr sz="1000" b="0">
+                <a:solidFill>
+                  <a:srgbClr val="010328"/>
+                </a:solidFill>
+              </a:rPr>
+              <a:t>  回答: 建议：更换轴承（依据：3号泵振动在爬升，运转声…）</a:t>
+            </a:r>
+          </a:p>
+          <a:p>
+            <a:pPr algn="l">
+              <a:spcBef>
+                <a:spcPts val="100"/>
+              </a:spcBef>
+            </a:pPr>
+            <a:r>
+              <a:rPr sz="1000" b="0">
+                <a:solidFill>
+                  <a:srgbClr val="010328"/>
+                </a:solidFill>
+              </a:rPr>
+              <a:t>[示例] 质量分=1.0  较朴素 +50%</a:t>
+            </a:r>
+          </a:p>
+          <a:p>
+            <a:pPr algn="l">
+              <a:spcBef>
+                <a:spcPts val="100"/>
+              </a:spcBef>
+            </a:pPr>
+            <a:r>
+              <a:rPr sz="1000" b="0">
+                <a:solidFill>
+                  <a:srgbClr val="010328"/>
+                </a:solidFill>
+              </a:rPr>
+              <a:t>  回答: 建议：更换轴承（依据：3号泵振动在爬升，运转声…）</a:t>
+            </a:r>
+          </a:p>
+          <a:p>
+            <a:pPr algn="l">
+              <a:spcBef>
+                <a:spcPts val="100"/>
+              </a:spcBef>
+            </a:pPr>
+            <a:r>
+              <a:rPr sz="1000" b="0">
+                <a:solidFill>
+                  <a:srgbClr val="010328"/>
+                </a:solidFill>
+              </a:rPr>
+              <a:t>说明: 本演示走 starter 的离线规则通道（口径一致、零依赖）；设 OPENAI_BASE_URL 或起 工具/mock…</a:t>
+            </a:r>
+          </a:p>
+        </p:txBody>
+      </p:sp>
+      <p:sp>
+        <p:nvSpPr>
+          <p:cNvPr id="18" name="TextBox 17"/>
+          <p:cNvSpPr txBox="1"/>
+          <p:nvPr/>
+        </p:nvSpPr>
+        <p:spPr>
+          <a:xfrm>
+            <a:off x="960120" y="4297680"/>
+            <a:ext cx="10469880" cy="868680"/>
+          </a:xfrm>
+          <a:prstGeom prst="rect">
+            <a:avLst/>
+          </a:prstGeom>
+          <a:noFill/>
+        </p:spPr>
+        <p:txBody>
+          <a:bodyPr wrap="square" anchor="t" lIns="0" rIns="0" tIns="0" bIns="0">
+            <a:spAutoFit/>
+          </a:bodyPr>
+          <a:lstStyle/>
+          <a:p>
+            <a:pPr algn="l"/>
+            <a:r>
+              <a:rPr sz="1300" b="1">
                 <a:solidFill>
                   <a:srgbClr val="0545E8"/>
                 </a:solidFill>
-                <a:latin typeface="微软雅黑"/>
-              </a:rPr>
-              <a:t>课前完成：导学单 + 预习自测 + starter环境自检</a:t>
+              </a:rPr>
+              <a:t>② 关键自检点（对照工单逐项核对）</a:t>
             </a:r>
           </a:p>
           <a:p>
             <a:pPr algn="l">
-              <a:lnSpc>
-                <a:spcPct val="110000"/>
-              </a:lnSpc>
-              <a:spcAft>
-                <a:spcPts val="600"/>
-              </a:spcAft>
+              <a:spcBef>
+                <a:spcPts val="200"/>
+              </a:spcBef>
             </a:pPr>
             <a:r>
-              <a:rPr sz="1250" b="0">
-                <a:solidFill>
-                  <a:srgbClr val="44546A"/>
-                </a:solidFill>
-                <a:latin typeface="微软雅黑"/>
-              </a:rPr>
-              <a:t>带着问题来上课——Predict先于Run</a:t>
+              <a:rPr sz="1150" b="0">
+                <a:solidFill>
+                  <a:srgbClr val="010328"/>
+                </a:solidFill>
+              </a:rPr>
+              <a:t>□ 代码从头跑到尾不报错　□ 指标与工单及格线逐项对齐　□ 随机种子已固定（可复现）</a:t>
+            </a:r>
+          </a:p>
+        </p:txBody>
+      </p:sp>
+      <p:sp>
+        <p:nvSpPr>
+          <p:cNvPr id="19" name="TextBox 18"/>
+          <p:cNvSpPr txBox="1"/>
+          <p:nvPr/>
+        </p:nvSpPr>
+        <p:spPr>
+          <a:xfrm>
+            <a:off x="960120" y="5431536"/>
+            <a:ext cx="10469880" cy="841248"/>
+          </a:xfrm>
+          <a:prstGeom prst="rect">
+            <a:avLst/>
+          </a:prstGeom>
+          <a:noFill/>
+        </p:spPr>
+        <p:txBody>
+          <a:bodyPr wrap="square" anchor="t" lIns="0" rIns="0" tIns="0" bIns="0">
+            <a:spAutoFit/>
+          </a:bodyPr>
+          <a:lstStyle/>
+          <a:p>
+            <a:pPr algn="l"/>
+            <a:r>
+              <a:rPr sz="1300" b="1">
+                <a:solidFill>
+                  <a:srgbClr val="F5670F"/>
+                </a:solidFill>
+              </a:rPr>
+              <a:t>③ 提交与达标（过程性证据）</a:t>
+            </a:r>
+          </a:p>
+          <a:p>
+            <a:pPr algn="l">
+              <a:spcBef>
+                <a:spcPts val="200"/>
+              </a:spcBef>
+            </a:pPr>
+            <a:r>
+              <a:rPr sz="1100" b="0">
+                <a:solidFill>
+                  <a:srgbClr val="010328"/>
+                </a:solidFill>
+              </a:rPr>
+              <a:t>达标线 D≥60 / C≥70 / B≥80 / A≥90　｜　提交 学号_姓名_工单号 + 运行截图 + 决策记录 + Git≥1次commit</a:t>
             </a:r>
           </a:p>
         </p:txBody>
@@ -9098,14 +9859,102 @@
       <p:grpSpPr/>
       <p:sp>
         <p:nvSpPr>
-          <p:cNvPr id="2" name="TextBox 1"/>
+          <p:cNvPr id="2" name="Rectangle 1"/>
+          <p:cNvSpPr/>
+          <p:nvPr/>
+        </p:nvSpPr>
+        <p:spPr>
+          <a:xfrm>
+            <a:off x="0" y="0"/>
+            <a:ext cx="12192000" cy="6858000"/>
+          </a:xfrm>
+          <a:prstGeom prst="rect">
+            <a:avLst/>
+          </a:prstGeom>
+          <a:solidFill>
+            <a:srgbClr val="010328"/>
+          </a:solidFill>
+          <a:ln>
+            <a:noFill/>
+          </a:ln>
+          <a:effectLst/>
+        </p:spPr>
+        <p:style>
+          <a:lnRef idx="1">
+            <a:schemeClr val="accent1"/>
+          </a:lnRef>
+          <a:fillRef idx="3">
+            <a:schemeClr val="accent1"/>
+          </a:fillRef>
+          <a:effectRef idx="2">
+            <a:schemeClr val="accent1"/>
+          </a:effectRef>
+          <a:fontRef idx="minor">
+            <a:schemeClr val="lt1"/>
+          </a:fontRef>
+        </p:style>
+        <p:txBody>
+          <a:bodyPr rtlCol="0" anchor="ctr"/>
+          <a:lstStyle/>
+          <a:p>
+            <a:pPr algn="ctr"/>
+          </a:p>
+        </p:txBody>
+      </p:sp>
+      <p:sp>
+        <p:nvSpPr>
+          <p:cNvPr id="3" name="Rectangle 2"/>
+          <p:cNvSpPr/>
+          <p:nvPr/>
+        </p:nvSpPr>
+        <p:spPr>
+          <a:xfrm>
+            <a:off x="0" y="2880360"/>
+            <a:ext cx="12192000" cy="50000"/>
+          </a:xfrm>
+          <a:prstGeom prst="rect">
+            <a:avLst/>
+          </a:prstGeom>
+          <a:solidFill>
+            <a:srgbClr val="F5670F"/>
+          </a:solidFill>
+          <a:ln>
+            <a:noFill/>
+          </a:ln>
+          <a:effectLst/>
+        </p:spPr>
+        <p:style>
+          <a:lnRef idx="1">
+            <a:schemeClr val="accent1"/>
+          </a:lnRef>
+          <a:fillRef idx="3">
+            <a:schemeClr val="accent1"/>
+          </a:fillRef>
+          <a:effectRef idx="2">
+            <a:schemeClr val="accent1"/>
+          </a:effectRef>
+          <a:fontRef idx="minor">
+            <a:schemeClr val="lt1"/>
+          </a:fontRef>
+        </p:style>
+        <p:txBody>
+          <a:bodyPr rtlCol="0" anchor="ctr"/>
+          <a:lstStyle/>
+          <a:p>
+            <a:pPr algn="ctr"/>
+          </a:p>
+        </p:txBody>
+      </p:sp>
+      <p:sp>
+        <p:nvSpPr>
+          <p:cNvPr id="4" name="TextBox 3"/>
           <p:cNvSpPr txBox="1"/>
           <p:nvPr/>
         </p:nvSpPr>
         <p:spPr>
           <a:xfrm>
-            <a:off x="548640" y="320040"/>
-            <a:ext cx="11094720" cy="914400"/>
+            <a:off x="0" y="1645920"/>
+            <a:ext cx="12192000" cy="1500000"/>
           </a:xfrm>
           <a:prstGeom prst="rect">
             <a:avLst/>
@@ -9113,28 +9962,41 @@
           <a:noFill/>
         </p:spPr>
         <p:txBody>
-          <a:bodyPr wrap="none">
+          <a:bodyPr wrap="square" anchor="t">
             <a:spAutoFit/>
           </a:bodyPr>
           <a:lstStyle/>
           <a:p>
-            <a:r>
-              <a:rPr sz="3000" b="1"/>
-              <a:t>本任务六步法导航</a:t>
-            </a:r>
-          </a:p>
-        </p:txBody>
-      </p:sp>
-      <p:sp>
-        <p:nvSpPr>
-          <p:cNvPr id="3" name="TextBox 2"/>
+            <a:pPr algn="ctr">
+              <a:lnSpc>
+                <a:spcPct val="110000"/>
+              </a:lnSpc>
+              <a:spcAft>
+                <a:spcPts val="600"/>
+              </a:spcAft>
+            </a:pPr>
+            <a:r>
+              <a:rPr sz="5400" b="1">
+                <a:solidFill>
+                  <a:srgbClr val="FFFFFF"/>
+                </a:solidFill>
+                <a:latin typeface="微软雅黑"/>
+              </a:rPr>
+              <a:t>THANKS</a:t>
+            </a:r>
+          </a:p>
+        </p:txBody>
+      </p:sp>
+      <p:sp>
+        <p:nvSpPr>
+          <p:cNvPr id="5" name="TextBox 4"/>
           <p:cNvSpPr txBox="1"/>
           <p:nvPr/>
         </p:nvSpPr>
         <p:spPr>
           <a:xfrm>
-            <a:off x="731520" y="1371600"/>
-            <a:ext cx="10728960" cy="4663440"/>
+            <a:off x="0" y="3429000"/>
+            <a:ext cx="12192000" cy="800000"/>
           </a:xfrm>
           <a:prstGeom prst="rect">
             <a:avLst/>
@@ -9142,52 +10004,197 @@
           <a:noFill/>
         </p:spPr>
         <p:txBody>
-          <a:bodyPr wrap="square">
+          <a:bodyPr wrap="square" anchor="t">
             <a:spAutoFit/>
           </a:bodyPr>
           <a:lstStyle/>
           <a:p>
-            <a:pPr>
+            <a:pPr algn="ctr">
+              <a:lnSpc>
+                <a:spcPct val="110000"/>
+              </a:lnSpc>
               <a:spcAft>
-                <a:spcPts val="1000"/>
+                <a:spcPts val="600"/>
               </a:spcAft>
             </a:pPr>
             <a:r>
-              <a:rPr sz="1800"/>
-              <a:t>六步法：资讯 → 计划 → 决策 → 实施 → 检查 → 评估</a:t>
-            </a:r>
-          </a:p>
-          <a:p>
-            <a:pPr>
+              <a:rPr sz="2200" b="1">
+                <a:solidFill>
+                  <a:srgbClr val="F5670F"/>
+                </a:solidFill>
+                <a:latin typeface="微软雅黑"/>
+              </a:rPr>
+              <a:t>感谢聆听 · 动手实践出真知</a:t>
+            </a:r>
+          </a:p>
+        </p:txBody>
+      </p:sp>
+      <p:sp>
+        <p:nvSpPr>
+          <p:cNvPr id="6" name="TextBox 5"/>
+          <p:cNvSpPr txBox="1"/>
+          <p:nvPr/>
+        </p:nvSpPr>
+        <p:spPr>
+          <a:xfrm>
+            <a:off x="0" y="4526280"/>
+            <a:ext cx="12192000" cy="600000"/>
+          </a:xfrm>
+          <a:prstGeom prst="rect">
+            <a:avLst/>
+          </a:prstGeom>
+          <a:noFill/>
+        </p:spPr>
+        <p:txBody>
+          <a:bodyPr wrap="square" anchor="t">
+            <a:spAutoFit/>
+          </a:bodyPr>
+          <a:lstStyle/>
+          <a:p>
+            <a:pPr algn="ctr">
+              <a:lnSpc>
+                <a:spcPct val="110000"/>
+              </a:lnSpc>
               <a:spcAft>
-                <a:spcPts val="1000"/>
+                <a:spcPts val="600"/>
               </a:spcAft>
             </a:pPr>
             <a:r>
-              <a:rPr sz="1800"/>
-              <a:t>本讲对应工单：《AI应用基础48课时版》分层任务工单</a:t>
-            </a:r>
-          </a:p>
-          <a:p>
-            <a:pPr>
+              <a:rPr sz="1400" b="0">
+                <a:solidFill>
+                  <a:srgbClr val="BBC6E6"/>
+                </a:solidFill>
+                <a:latin typeface="微软雅黑"/>
+              </a:rPr>
+              <a:t>以生为本   |   做中学 · 学中做</a:t>
+            </a:r>
+          </a:p>
+        </p:txBody>
+      </p:sp>
+      <p:sp>
+        <p:nvSpPr>
+          <p:cNvPr id="7" name="Rectangle 6"/>
+          <p:cNvSpPr/>
+          <p:nvPr/>
+        </p:nvSpPr>
+        <p:spPr>
+          <a:xfrm>
+            <a:off x="500000" y="6500000"/>
+            <a:ext cx="11100000" cy="20000"/>
+          </a:xfrm>
+          <a:prstGeom prst="rect">
+            <a:avLst/>
+          </a:prstGeom>
+          <a:solidFill>
+            <a:srgbClr val="C9D4EE"/>
+          </a:solidFill>
+          <a:ln>
+            <a:noFill/>
+          </a:ln>
+          <a:effectLst/>
+        </p:spPr>
+        <p:style>
+          <a:lnRef idx="1">
+            <a:schemeClr val="accent1"/>
+          </a:lnRef>
+          <a:fillRef idx="3">
+            <a:schemeClr val="accent1"/>
+          </a:fillRef>
+          <a:effectRef idx="2">
+            <a:schemeClr val="accent1"/>
+          </a:effectRef>
+          <a:fontRef idx="minor">
+            <a:schemeClr val="lt1"/>
+          </a:fontRef>
+        </p:style>
+        <p:txBody>
+          <a:bodyPr rtlCol="0" anchor="ctr"/>
+          <a:lstStyle/>
+          <a:p>
+            <a:pPr algn="ctr"/>
+          </a:p>
+        </p:txBody>
+      </p:sp>
+      <p:sp>
+        <p:nvSpPr>
+          <p:cNvPr id="8" name="TextBox 7"/>
+          <p:cNvSpPr txBox="1"/>
+          <p:nvPr/>
+        </p:nvSpPr>
+        <p:spPr>
+          <a:xfrm>
+            <a:off x="500000" y="6540000"/>
+            <a:ext cx="7000000" cy="300000"/>
+          </a:xfrm>
+          <a:prstGeom prst="rect">
+            <a:avLst/>
+          </a:prstGeom>
+          <a:noFill/>
+        </p:spPr>
+        <p:txBody>
+          <a:bodyPr wrap="square" anchor="t">
+            <a:spAutoFit/>
+          </a:bodyPr>
+          <a:lstStyle/>
+          <a:p>
+            <a:pPr algn="l">
+              <a:lnSpc>
+                <a:spcPct val="110000"/>
+              </a:lnSpc>
               <a:spcAft>
-                <a:spcPts val="1000"/>
+                <a:spcPts val="600"/>
               </a:spcAft>
             </a:pPr>
             <a:r>
-              <a:rPr sz="1800"/>
-              <a:t>课堂产出：工单第六节实施记录须当堂填写，含操作前安全打勾与学生本人签字。</a:t>
-            </a:r>
-          </a:p>
-          <a:p>
-            <a:pPr>
+              <a:rPr sz="1000" b="0">
+                <a:solidFill>
+                  <a:srgbClr val="8A97B5"/>
+                </a:solidFill>
+                <a:latin typeface="微软雅黑"/>
+              </a:rPr>
+              <a:t>两江智造集团 · AI应用基础48课时版</a:t>
+            </a:r>
+          </a:p>
+        </p:txBody>
+      </p:sp>
+      <p:sp>
+        <p:nvSpPr>
+          <p:cNvPr id="9" name="TextBox 8"/>
+          <p:cNvSpPr txBox="1"/>
+          <p:nvPr/>
+        </p:nvSpPr>
+        <p:spPr>
+          <a:xfrm>
+            <a:off x="10600000" y="6540000"/>
+            <a:ext cx="1000000" cy="300000"/>
+          </a:xfrm>
+          <a:prstGeom prst="rect">
+            <a:avLst/>
+          </a:prstGeom>
+          <a:noFill/>
+        </p:spPr>
+        <p:txBody>
+          <a:bodyPr wrap="square" anchor="ctr">
+            <a:spAutoFit/>
+          </a:bodyPr>
+          <a:lstStyle/>
+          <a:p>
+            <a:pPr algn="r">
+              <a:lnSpc>
+                <a:spcPct val="110000"/>
+              </a:lnSpc>
               <a:spcAft>
-                <a:spcPts val="1000"/>
+                <a:spcPts val="600"/>
               </a:spcAft>
             </a:pPr>
             <a:r>
-              <a:rPr sz="1800"/>
-              <a:t>课后交付：班组长／操作员／教师三方联签后交回，缺签视为未交付。</a:t>
+              <a:rPr sz="1000" b="0">
+                <a:solidFill>
+                  <a:srgbClr val="8A97B5"/>
+                </a:solidFill>
+                <a:latin typeface="微软雅黑"/>
+              </a:rPr>
+              <a:t>17 / 20</a:t>
             </a:r>
           </a:p>
         </p:txBody>
@@ -9212,6 +10219,364 @@
       <p:grpSpPr/>
       <p:sp>
         <p:nvSpPr>
+          <p:cNvPr id="2" name="Rectangle 1"/>
+          <p:cNvSpPr/>
+          <p:nvPr/>
+        </p:nvSpPr>
+        <p:spPr>
+          <a:xfrm>
+            <a:off x="0" y="0"/>
+            <a:ext cx="12192000" cy="1150000"/>
+          </a:xfrm>
+          <a:prstGeom prst="rect">
+            <a:avLst/>
+          </a:prstGeom>
+          <a:solidFill>
+            <a:srgbClr val="010328"/>
+          </a:solidFill>
+          <a:ln>
+            <a:noFill/>
+          </a:ln>
+          <a:effectLst/>
+        </p:spPr>
+        <p:style>
+          <a:lnRef idx="1">
+            <a:schemeClr val="accent1"/>
+          </a:lnRef>
+          <a:fillRef idx="3">
+            <a:schemeClr val="accent1"/>
+          </a:fillRef>
+          <a:effectRef idx="2">
+            <a:schemeClr val="accent1"/>
+          </a:effectRef>
+          <a:fontRef idx="minor">
+            <a:schemeClr val="lt1"/>
+          </a:fontRef>
+        </p:style>
+        <p:txBody>
+          <a:bodyPr rtlCol="0" anchor="ctr"/>
+          <a:lstStyle/>
+          <a:p>
+            <a:pPr algn="ctr"/>
+          </a:p>
+        </p:txBody>
+      </p:sp>
+      <p:sp>
+        <p:nvSpPr>
+          <p:cNvPr id="3" name="Rectangle 2"/>
+          <p:cNvSpPr/>
+          <p:nvPr/>
+        </p:nvSpPr>
+        <p:spPr>
+          <a:xfrm>
+            <a:off x="0" y="1150000"/>
+            <a:ext cx="2600000" cy="70000"/>
+          </a:xfrm>
+          <a:prstGeom prst="rect">
+            <a:avLst/>
+          </a:prstGeom>
+          <a:solidFill>
+            <a:srgbClr val="F5670F"/>
+          </a:solidFill>
+          <a:ln>
+            <a:noFill/>
+          </a:ln>
+          <a:effectLst/>
+        </p:spPr>
+        <p:style>
+          <a:lnRef idx="1">
+            <a:schemeClr val="accent1"/>
+          </a:lnRef>
+          <a:fillRef idx="3">
+            <a:schemeClr val="accent1"/>
+          </a:fillRef>
+          <a:effectRef idx="2">
+            <a:schemeClr val="accent1"/>
+          </a:effectRef>
+          <a:fontRef idx="minor">
+            <a:schemeClr val="lt1"/>
+          </a:fontRef>
+        </p:style>
+        <p:txBody>
+          <a:bodyPr rtlCol="0" anchor="ctr"/>
+          <a:lstStyle/>
+          <a:p>
+            <a:pPr algn="ctr"/>
+          </a:p>
+        </p:txBody>
+      </p:sp>
+      <p:sp>
+        <p:nvSpPr>
+          <p:cNvPr id="4" name="TextBox 3"/>
+          <p:cNvSpPr txBox="1"/>
+          <p:nvPr/>
+        </p:nvSpPr>
+        <p:spPr>
+          <a:xfrm>
+            <a:off x="700000" y="300000"/>
+            <a:ext cx="10792000" cy="700000"/>
+          </a:xfrm>
+          <a:prstGeom prst="rect">
+            <a:avLst/>
+          </a:prstGeom>
+          <a:noFill/>
+        </p:spPr>
+        <p:txBody>
+          <a:bodyPr wrap="square" anchor="t">
+            <a:spAutoFit/>
+          </a:bodyPr>
+          <a:lstStyle/>
+          <a:p>
+            <a:pPr algn="l">
+              <a:lnSpc>
+                <a:spcPct val="110000"/>
+              </a:lnSpc>
+              <a:spcAft>
+                <a:spcPts val="600"/>
+              </a:spcAft>
+            </a:pPr>
+            <a:r>
+              <a:rPr sz="2400" b="1">
+                <a:solidFill>
+                  <a:srgbClr val="FFFFFF"/>
+                </a:solidFill>
+                <a:latin typeface="微软雅黑"/>
+              </a:rPr>
+              <a:t>下次课预告（第18周）</a:t>
+            </a:r>
+          </a:p>
+        </p:txBody>
+      </p:sp>
+      <p:sp>
+        <p:nvSpPr>
+          <p:cNvPr id="5" name="Rectangle 4"/>
+          <p:cNvSpPr/>
+          <p:nvPr/>
+        </p:nvSpPr>
+        <p:spPr>
+          <a:xfrm>
+            <a:off x="760000" y="1900000"/>
+            <a:ext cx="10900000" cy="1600000"/>
+          </a:xfrm>
+          <a:prstGeom prst="rect">
+            <a:avLst/>
+          </a:prstGeom>
+          <a:solidFill>
+            <a:srgbClr val="F3F6FD"/>
+          </a:solidFill>
+          <a:ln>
+            <a:noFill/>
+          </a:ln>
+          <a:effectLst/>
+        </p:spPr>
+        <p:style>
+          <a:lnRef idx="1">
+            <a:schemeClr val="accent1"/>
+          </a:lnRef>
+          <a:fillRef idx="3">
+            <a:schemeClr val="accent1"/>
+          </a:fillRef>
+          <a:effectRef idx="2">
+            <a:schemeClr val="accent1"/>
+          </a:effectRef>
+          <a:fontRef idx="minor">
+            <a:schemeClr val="lt1"/>
+          </a:fontRef>
+        </p:style>
+        <p:txBody>
+          <a:bodyPr rtlCol="0" anchor="ctr"/>
+          <a:lstStyle/>
+          <a:p>
+            <a:pPr algn="ctr"/>
+          </a:p>
+        </p:txBody>
+      </p:sp>
+      <p:sp>
+        <p:nvSpPr>
+          <p:cNvPr id="6" name="Rectangle 5"/>
+          <p:cNvSpPr/>
+          <p:nvPr/>
+        </p:nvSpPr>
+        <p:spPr>
+          <a:xfrm>
+            <a:off x="760000" y="1900000"/>
+            <a:ext cx="150000" cy="1600000"/>
+          </a:xfrm>
+          <a:prstGeom prst="rect">
+            <a:avLst/>
+          </a:prstGeom>
+          <a:solidFill>
+            <a:srgbClr val="F5670F"/>
+          </a:solidFill>
+          <a:ln>
+            <a:noFill/>
+          </a:ln>
+          <a:effectLst/>
+        </p:spPr>
+        <p:style>
+          <a:lnRef idx="1">
+            <a:schemeClr val="accent1"/>
+          </a:lnRef>
+          <a:fillRef idx="3">
+            <a:schemeClr val="accent1"/>
+          </a:fillRef>
+          <a:effectRef idx="2">
+            <a:schemeClr val="accent1"/>
+          </a:effectRef>
+          <a:fontRef idx="minor">
+            <a:schemeClr val="lt1"/>
+          </a:fontRef>
+        </p:style>
+        <p:txBody>
+          <a:bodyPr rtlCol="0" anchor="ctr"/>
+          <a:lstStyle/>
+          <a:p>
+            <a:pPr algn="ctr"/>
+          </a:p>
+        </p:txBody>
+      </p:sp>
+      <p:sp>
+        <p:nvSpPr>
+          <p:cNvPr id="7" name="TextBox 6"/>
+          <p:cNvSpPr txBox="1"/>
+          <p:nvPr/>
+        </p:nvSpPr>
+        <p:spPr>
+          <a:xfrm>
+            <a:off x="1020000" y="2050000"/>
+            <a:ext cx="10500000" cy="1400000"/>
+          </a:xfrm>
+          <a:prstGeom prst="rect">
+            <a:avLst/>
+          </a:prstGeom>
+          <a:noFill/>
+        </p:spPr>
+        <p:txBody>
+          <a:bodyPr wrap="square" anchor="t">
+            <a:spAutoFit/>
+          </a:bodyPr>
+          <a:lstStyle/>
+          <a:p>
+            <a:pPr algn="l">
+              <a:lnSpc>
+                <a:spcPct val="110000"/>
+              </a:lnSpc>
+              <a:spcAft>
+                <a:spcPts val="600"/>
+              </a:spcAft>
+            </a:pPr>
+            <a:r>
+              <a:rPr sz="1700" b="1">
+                <a:solidFill>
+                  <a:srgbClr val="010328"/>
+                </a:solidFill>
+                <a:latin typeface="微软雅黑"/>
+              </a:rPr>
+              <a:t>主题: 能搭建最小RAG问答链路——应用：见工单star</a:t>
+            </a:r>
+          </a:p>
+          <a:p>
+            <a:pPr algn="l">
+              <a:lnSpc>
+                <a:spcPct val="110000"/>
+              </a:lnSpc>
+              <a:spcAft>
+                <a:spcPts val="600"/>
+              </a:spcAft>
+            </a:pPr>
+            <a:r>
+              <a:rPr sz="1300" b="0">
+                <a:solidFill>
+                  <a:srgbClr val="44546A"/>
+                </a:solidFill>
+                <a:latin typeface="微软雅黑"/>
+              </a:rPr>
+              <a:t>预习快问: W17课中查①：'Connection refused'这个报错怎么排查？</a:t>
+            </a:r>
+          </a:p>
+        </p:txBody>
+      </p:sp>
+      <p:sp>
+        <p:nvSpPr>
+          <p:cNvPr id="8" name="TextBox 7"/>
+          <p:cNvSpPr txBox="1"/>
+          <p:nvPr/>
+        </p:nvSpPr>
+        <p:spPr>
+          <a:xfrm>
+            <a:off x="760000" y="3900000"/>
+            <a:ext cx="10900000" cy="900000"/>
+          </a:xfrm>
+          <a:prstGeom prst="rect">
+            <a:avLst/>
+          </a:prstGeom>
+          <a:noFill/>
+        </p:spPr>
+        <p:txBody>
+          <a:bodyPr wrap="square" anchor="t">
+            <a:spAutoFit/>
+          </a:bodyPr>
+          <a:lstStyle/>
+          <a:p>
+            <a:pPr algn="l">
+              <a:lnSpc>
+                <a:spcPct val="110000"/>
+              </a:lnSpc>
+              <a:spcAft>
+                <a:spcPts val="600"/>
+              </a:spcAft>
+            </a:pPr>
+            <a:r>
+              <a:rPr sz="1400" b="1">
+                <a:solidFill>
+                  <a:srgbClr val="0545E8"/>
+                </a:solidFill>
+                <a:latin typeface="微软雅黑"/>
+              </a:rPr>
+              <a:t>课前完成：导学单 + 预习自测 + starter环境自检</a:t>
+            </a:r>
+          </a:p>
+          <a:p>
+            <a:pPr algn="l">
+              <a:lnSpc>
+                <a:spcPct val="110000"/>
+              </a:lnSpc>
+              <a:spcAft>
+                <a:spcPts val="600"/>
+              </a:spcAft>
+            </a:pPr>
+            <a:r>
+              <a:rPr sz="1250" b="0">
+                <a:solidFill>
+                  <a:srgbClr val="44546A"/>
+                </a:solidFill>
+                <a:latin typeface="微软雅黑"/>
+              </a:rPr>
+              <a:t>带着问题来上课——Predict先于Run</a:t>
+            </a:r>
+          </a:p>
+        </p:txBody>
+      </p:sp>
+    </p:spTree>
+  </p:cSld>
+  <p:clrMapOvr>
+    <a:masterClrMapping/>
+  </p:clrMapOvr>
+</p:sld>
+</file>
+
+<file path=ppt/slides/slide19.xml><?xml version="1.0" encoding="utf-8"?>
+<p:sld xmlns:a="http://schemas.openxmlformats.org/drawingml/2006/main" xmlns:p="http://schemas.openxmlformats.org/presentationml/2006/main" xmlns:r="http://schemas.openxmlformats.org/officeDocument/2006/relationships">
+  <p:cSld>
+    <p:spTree>
+      <p:nvGrpSpPr>
+        <p:cNvPr id="1" name=""/>
+        <p:cNvGrpSpPr/>
+        <p:nvPr/>
+      </p:nvGrpSpPr>
+      <p:grpSpPr/>
+      <p:sp>
+        <p:nvSpPr>
           <p:cNvPr id="2" name="TextBox 1"/>
           <p:cNvSpPr txBox="1"/>
           <p:nvPr/>
@@ -9234,7 +10599,7 @@
           <a:p>
             <a:r>
               <a:rPr sz="3000" b="1"/>
-              <a:t>本讲与岗位任务单的衔接</a:t>
+              <a:t>本任务六步法导航</a:t>
             </a:r>
           </a:p>
         </p:txBody>
@@ -9268,7 +10633,7 @@
             </a:pPr>
             <a:r>
               <a:rPr sz="1800"/>
-              <a:t>本讲在工作过程系统化课程中承担的任务环节：任务实施</a:t>
+              <a:t>六步法：资讯 → 计划 → 决策 → 实施 → 检查 → 评估</a:t>
             </a:r>
           </a:p>
           <a:p>
@@ -9279,7 +10644,7 @@
             </a:pPr>
             <a:r>
               <a:rPr sz="1800"/>
-              <a:t>考核对齐：过程性成绩取自本讲工单第六节各模块得分合计（满分 100）。</a:t>
+              <a:t>本讲对应工单：《AI应用基础48课时版》分层任务工单</a:t>
             </a:r>
           </a:p>
           <a:p>
@@ -9290,7 +10655,7 @@
             </a:pPr>
             <a:r>
               <a:rPr sz="1800"/>
-              <a:t>达标线：综合成绩≥60 分，且无安全红线一票否决记录</a:t>
+              <a:t>课堂产出：工单第六节实施记录须当堂填写，含操作前安全打勾与学生本人签字。</a:t>
             </a:r>
           </a:p>
           <a:p>
@@ -9301,7 +10666,7 @@
             </a:pPr>
             <a:r>
               <a:rPr sz="1800"/>
-              <a:t>无效工单判定：未打安全勾、无本人签字、无三方联签。</a:t>
+              <a:t>课后交付：班组长／操作员／教师三方联签后交回，缺签视为未交付。</a:t>
             </a:r>
           </a:p>
         </p:txBody>
@@ -9445,6 +10810,120 @@
 </p:sld>
 </file>
 
+<file path=ppt/slides/slide20.xml><?xml version="1.0" encoding="utf-8"?>
+<p:sld xmlns:a="http://schemas.openxmlformats.org/drawingml/2006/main" xmlns:p="http://schemas.openxmlformats.org/presentationml/2006/main" xmlns:r="http://schemas.openxmlformats.org/officeDocument/2006/relationships">
+  <p:cSld>
+    <p:spTree>
+      <p:nvGrpSpPr>
+        <p:cNvPr id="1" name=""/>
+        <p:cNvGrpSpPr/>
+        <p:nvPr/>
+      </p:nvGrpSpPr>
+      <p:grpSpPr/>
+      <p:sp>
+        <p:nvSpPr>
+          <p:cNvPr id="2" name="TextBox 1"/>
+          <p:cNvSpPr txBox="1"/>
+          <p:nvPr/>
+        </p:nvSpPr>
+        <p:spPr>
+          <a:xfrm>
+            <a:off x="548640" y="320040"/>
+            <a:ext cx="11094720" cy="914400"/>
+          </a:xfrm>
+          <a:prstGeom prst="rect">
+            <a:avLst/>
+          </a:prstGeom>
+          <a:noFill/>
+        </p:spPr>
+        <p:txBody>
+          <a:bodyPr wrap="none">
+            <a:spAutoFit/>
+          </a:bodyPr>
+          <a:lstStyle/>
+          <a:p>
+            <a:r>
+              <a:rPr sz="3000" b="1"/>
+              <a:t>本讲与岗位任务单的衔接</a:t>
+            </a:r>
+          </a:p>
+        </p:txBody>
+      </p:sp>
+      <p:sp>
+        <p:nvSpPr>
+          <p:cNvPr id="3" name="TextBox 2"/>
+          <p:cNvSpPr txBox="1"/>
+          <p:nvPr/>
+        </p:nvSpPr>
+        <p:spPr>
+          <a:xfrm>
+            <a:off x="731520" y="1371600"/>
+            <a:ext cx="10728960" cy="4663440"/>
+          </a:xfrm>
+          <a:prstGeom prst="rect">
+            <a:avLst/>
+          </a:prstGeom>
+          <a:noFill/>
+        </p:spPr>
+        <p:txBody>
+          <a:bodyPr wrap="square">
+            <a:spAutoFit/>
+          </a:bodyPr>
+          <a:lstStyle/>
+          <a:p>
+            <a:pPr>
+              <a:spcAft>
+                <a:spcPts val="1000"/>
+              </a:spcAft>
+            </a:pPr>
+            <a:r>
+              <a:rPr sz="1800"/>
+              <a:t>本讲在工作过程系统化课程中承担的任务环节：任务实施</a:t>
+            </a:r>
+          </a:p>
+          <a:p>
+            <a:pPr>
+              <a:spcAft>
+                <a:spcPts val="1000"/>
+              </a:spcAft>
+            </a:pPr>
+            <a:r>
+              <a:rPr sz="1800"/>
+              <a:t>考核对齐：过程性成绩取自本讲工单第六节各模块得分合计（满分 100）。</a:t>
+            </a:r>
+          </a:p>
+          <a:p>
+            <a:pPr>
+              <a:spcAft>
+                <a:spcPts val="1000"/>
+              </a:spcAft>
+            </a:pPr>
+            <a:r>
+              <a:rPr sz="1800"/>
+              <a:t>达标线：综合成绩≥60 分，且无安全红线一票否决记录</a:t>
+            </a:r>
+          </a:p>
+          <a:p>
+            <a:pPr>
+              <a:spcAft>
+                <a:spcPts val="1000"/>
+              </a:spcAft>
+            </a:pPr>
+            <a:r>
+              <a:rPr sz="1800"/>
+              <a:t>无效工单判定：未打安全勾、无本人签字、无三方联签。</a:t>
+            </a:r>
+          </a:p>
+        </p:txBody>
+      </p:sp>
+    </p:spTree>
+  </p:cSld>
+  <p:clrMapOvr>
+    <a:masterClrMapping/>
+  </p:clrMapOvr>
+</p:sld>
+</file>
+
 <file path=ppt/slides/slide3.xml><?xml version="1.0" encoding="utf-8"?>
 <p:sld xmlns:a="http://schemas.openxmlformats.org/drawingml/2006/main" xmlns:p="http://schemas.openxmlformats.org/presentationml/2006/main" xmlns:r="http://schemas.openxmlformats.org/officeDocument/2006/relationships">
   <p:cSld>
@@ -9918,7 +11397,7 @@
                 </a:solidFill>
                 <a:latin typeface="微软雅黑"/>
               </a:rPr>
-              <a:t>3 / 18</a:t>
+              <a:t>3 / 20</a:t>
             </a:r>
           </a:p>
         </p:txBody>
@@ -10392,7 +11871,7 @@
                 </a:solidFill>
                 <a:latin typeface="微软雅黑"/>
               </a:rPr>
-              <a:t>4 / 18</a:t>
+              <a:t>4 / 20</a:t>
             </a:r>
           </a:p>
         </p:txBody>
@@ -11184,7 +12663,7 @@
                 </a:solidFill>
                 <a:latin typeface="微软雅黑"/>
               </a:rPr>
-              <a:t>5 / 18</a:t>
+              <a:t>5 / 20</a:t>
             </a:r>
           </a:p>
         </p:txBody>
@@ -11460,7 +12939,7 @@
                 </a:solidFill>
                 <a:latin typeface="微软雅黑"/>
               </a:rPr>
-              <a:t>6 / 18</a:t>
+              <a:t>6 / 20</a:t>
             </a:r>
           </a:p>
         </p:txBody>
@@ -12286,7 +13765,7 @@
           <a:lstStyle/>
           <a:p>
             <a:r>
-              <a:rPr sz="750" b="0">
+              <a:rPr sz="900" b="0">
                 <a:solidFill>
                   <a:srgbClr val="6B7280"/>
                 </a:solidFill>
@@ -12568,7 +14047,7 @@
                 </a:solidFill>
                 <a:latin typeface="微软雅黑"/>
               </a:rPr>
-              <a:t>7 / 18</a:t>
+              <a:t>7 / 20</a:t>
             </a:r>
           </a:p>
         </p:txBody>
@@ -12788,7 +14267,7 @@
           <a:lstStyle/>
           <a:p>
             <a:r>
-              <a:rPr sz="850" b="0">
+              <a:rPr sz="900" b="0">
                 <a:solidFill>
                   <a:srgbClr val="2B2F36"/>
                 </a:solidFill>
@@ -12856,7 +14335,7 @@
           <a:lstStyle/>
           <a:p>
             <a:r>
-              <a:rPr sz="850" b="0">
+              <a:rPr sz="900" b="0">
                 <a:solidFill>
                   <a:srgbClr val="2B2F36"/>
                 </a:solidFill>
@@ -12924,7 +14403,7 @@
           <a:lstStyle/>
           <a:p>
             <a:r>
-              <a:rPr sz="850" b="0">
+              <a:rPr sz="900" b="0">
                 <a:solidFill>
                   <a:srgbClr val="2B2F36"/>
                 </a:solidFill>
@@ -13116,7 +14595,7 @@
           <a:lstStyle/>
           <a:p>
             <a:r>
-              <a:rPr sz="850" b="0">
+              <a:rPr sz="900" b="0">
                 <a:solidFill>
                   <a:srgbClr val="2B2F36"/>
                 </a:solidFill>
@@ -13184,7 +14663,7 @@
           <a:lstStyle/>
           <a:p>
             <a:r>
-              <a:rPr sz="850" b="0">
+              <a:rPr sz="900" b="0">
                 <a:solidFill>
                   <a:srgbClr val="2B2F36"/>
                 </a:solidFill>
@@ -13252,7 +14731,7 @@
           <a:lstStyle/>
           <a:p>
             <a:r>
-              <a:rPr sz="850" b="0">
+              <a:rPr sz="900" b="0">
                 <a:solidFill>
                   <a:srgbClr val="2B2F36"/>
                 </a:solidFill>
@@ -13444,7 +14923,7 @@
           <a:lstStyle/>
           <a:p>
             <a:r>
-              <a:rPr sz="850" b="0">
+              <a:rPr sz="900" b="0">
                 <a:solidFill>
                   <a:srgbClr val="2B2F36"/>
                 </a:solidFill>
@@ -13512,7 +14991,7 @@
           <a:lstStyle/>
           <a:p>
             <a:r>
-              <a:rPr sz="850" b="0">
+              <a:rPr sz="900" b="0">
                 <a:solidFill>
                   <a:srgbClr val="2B2F36"/>
                 </a:solidFill>
@@ -13580,7 +15059,7 @@
           <a:lstStyle/>
           <a:p>
             <a:r>
-              <a:rPr sz="850" b="0">
+              <a:rPr sz="900" b="0">
                 <a:solidFill>
                   <a:srgbClr val="2B2F36"/>
                 </a:solidFill>
@@ -13862,7 +15341,7 @@
                 </a:solidFill>
                 <a:latin typeface="微软雅黑"/>
               </a:rPr>
-              <a:t>8 / 18</a:t>
+              <a:t>8 / 20</a:t>
             </a:r>
           </a:p>
         </p:txBody>
@@ -14431,7 +15910,7 @@
           <a:lstStyle/>
           <a:p>
             <a:r>
-              <a:rPr sz="750" b="0">
+              <a:rPr sz="900" b="0">
                 <a:solidFill>
                   <a:srgbClr val="6B7280"/>
                 </a:solidFill>
@@ -14550,14 +16029,14 @@
       </p:sp>
       <p:sp>
         <p:nvSpPr>
-          <p:cNvPr id="4" name="TextBox 3"/>
+          <p:cNvPr id="6" name="TextBox 5"/>
           <p:cNvSpPr txBox="1"/>
           <p:nvPr/>
         </p:nvSpPr>
         <p:spPr>
           <a:xfrm>
-            <a:off x="700000" y="300000"/>
-            <a:ext cx="10792000" cy="700000"/>
+            <a:off x="1500000" y="300000"/>
+            <a:ext cx="9992000" cy="700000"/>
           </a:xfrm>
           <a:prstGeom prst="rect">
             <a:avLst/>
@@ -14585,27 +16064,27 @@
                 </a:solidFill>
                 <a:latin typeface="微软雅黑"/>
               </a:rPr>
-              <a:t>实施任务：工单M4-1《LLM故障诊断（下）：优化与评价》</a:t>
-            </a:r>
-          </a:p>
-        </p:txBody>
-      </p:sp>
-      <p:sp>
-        <p:nvSpPr>
-          <p:cNvPr id="5" name="Rectangle 4"/>
+              <a:t>本课知识速览卡 · 边做边对照</a:t>
+            </a:r>
+          </a:p>
+        </p:txBody>
+      </p:sp>
+      <p:sp>
+        <p:nvSpPr>
+          <p:cNvPr id="17" name="Rectangle 16"/>
           <p:cNvSpPr/>
           <p:nvPr/>
         </p:nvSpPr>
         <p:spPr>
           <a:xfrm>
-            <a:off x="800000" y="1950000"/>
-            <a:ext cx="6300000" cy="3900000"/>
+            <a:off x="500000" y="6500000"/>
+            <a:ext cx="11100000" cy="20000"/>
           </a:xfrm>
           <a:prstGeom prst="rect">
             <a:avLst/>
           </a:prstGeom>
           <a:solidFill>
-            <a:srgbClr val="F3F6FD"/>
+            <a:srgbClr val="C9D4EE"/>
           </a:solidFill>
           <a:ln>
             <a:noFill/>
@@ -14636,197 +16115,14 @@
       </p:sp>
       <p:sp>
         <p:nvSpPr>
-          <p:cNvPr id="6" name="TextBox 5"/>
+          <p:cNvPr id="18" name="TextBox 17"/>
           <p:cNvSpPr txBox="1"/>
           <p:nvPr/>
         </p:nvSpPr>
         <p:spPr>
           <a:xfrm>
-            <a:off x="1000000" y="2100000"/>
-            <a:ext cx="5900000" cy="3600000"/>
-          </a:xfrm>
-          <a:prstGeom prst="rect">
-            <a:avLst/>
-          </a:prstGeom>
-          <a:noFill/>
-        </p:spPr>
-        <p:txBody>
-          <a:bodyPr wrap="square" anchor="t">
-            <a:spAutoFit/>
-          </a:bodyPr>
-          <a:lstStyle/>
-          <a:p>
-            <a:pPr algn="l">
-              <a:lnSpc>
-                <a:spcPct val="130000"/>
-              </a:lnSpc>
-              <a:spcAft>
-                <a:spcPts val="600"/>
-              </a:spcAft>
-            </a:pPr>
-            <a:r>
-              <a:rPr sz="1500" b="1">
-                <a:solidFill>
-                  <a:srgbClr val="0545E8"/>
-                </a:solidFill>
-                <a:latin typeface="微软雅黑"/>
-              </a:rPr>
-              <a:t>实施步骤</a:t>
-            </a:r>
-          </a:p>
-          <a:p>
-            <a:pPr algn="l">
-              <a:lnSpc>
-                <a:spcPct val="130000"/>
-              </a:lnSpc>
-              <a:spcAft>
-                <a:spcPts val="600"/>
-              </a:spcAft>
-            </a:pPr>
-            <a:r>
-              <a:rPr sz="1400" b="0">
-                <a:solidFill>
-                  <a:srgbClr val="010328"/>
-                </a:solidFill>
-                <a:latin typeface="微软雅黑"/>
-              </a:rPr>
-              <a:t>1. 错误速查复盘</a:t>
-            </a:r>
-          </a:p>
-          <a:p>
-            <a:pPr algn="l">
-              <a:lnSpc>
-                <a:spcPct val="130000"/>
-              </a:lnSpc>
-              <a:spcAft>
-                <a:spcPts val="600"/>
-              </a:spcAft>
-            </a:pPr>
-            <a:r>
-              <a:rPr sz="1400" b="0">
-                <a:solidFill>
-                  <a:srgbClr val="010328"/>
-                </a:solidFill>
-                <a:latin typeface="微软雅黑"/>
-              </a:rPr>
-              <a:t>2. 优化冲刺（B/A层）</a:t>
-            </a:r>
-          </a:p>
-          <a:p>
-            <a:pPr algn="l">
-              <a:lnSpc>
-                <a:spcPct val="130000"/>
-              </a:lnSpc>
-              <a:spcAft>
-                <a:spcPts val="600"/>
-              </a:spcAft>
-            </a:pPr>
-            <a:r>
-              <a:rPr sz="1400" b="0">
-                <a:solidFill>
-                  <a:srgbClr val="010328"/>
-                </a:solidFill>
-                <a:latin typeface="微软雅黑"/>
-              </a:rPr>
-              <a:t>3. 三层质检互查</a:t>
-            </a:r>
-          </a:p>
-          <a:p>
-            <a:pPr algn="l">
-              <a:lnSpc>
-                <a:spcPct val="130000"/>
-              </a:lnSpc>
-              <a:spcAft>
-                <a:spcPts val="600"/>
-              </a:spcAft>
-            </a:pPr>
-            <a:r>
-              <a:rPr sz="1400" b="0">
-                <a:solidFill>
-                  <a:srgbClr val="010328"/>
-                </a:solidFill>
-                <a:latin typeface="微软雅黑"/>
-              </a:rPr>
-              <a:t>4. 当堂评分与反馈</a:t>
-            </a:r>
-          </a:p>
-          <a:p>
-            <a:pPr algn="l">
-              <a:lnSpc>
-                <a:spcPct val="130000"/>
-              </a:lnSpc>
-              <a:spcAft>
-                <a:spcPts val="600"/>
-              </a:spcAft>
-            </a:pPr>
-            <a:r>
-              <a:rPr sz="1400" b="0">
-                <a:solidFill>
-                  <a:srgbClr val="010328"/>
-                </a:solidFill>
-                <a:latin typeface="微软雅黑"/>
-              </a:rPr>
-              <a:t>5. 下次课预告+微课</a:t>
-            </a:r>
-          </a:p>
-        </p:txBody>
-      </p:sp>
-      <p:sp>
-        <p:nvSpPr>
-          <p:cNvPr id="7" name="Rectangle 6"/>
-          <p:cNvSpPr/>
-          <p:nvPr/>
-        </p:nvSpPr>
-        <p:spPr>
-          <a:xfrm>
-            <a:off x="7400000" y="1950000"/>
-            <a:ext cx="4000000" cy="1850000"/>
-          </a:xfrm>
-          <a:prstGeom prst="rect">
-            <a:avLst/>
-          </a:prstGeom>
-          <a:solidFill>
-            <a:srgbClr val="E8F1E8"/>
-          </a:solidFill>
-          <a:ln>
-            <a:solidFill>
-              <a:srgbClr val="0475B6"/>
-            </a:solidFill>
-          </a:ln>
-          <a:effectLst/>
-        </p:spPr>
-        <p:style>
-          <a:lnRef idx="1">
-            <a:schemeClr val="accent1"/>
-          </a:lnRef>
-          <a:fillRef idx="3">
-            <a:schemeClr val="accent1"/>
-          </a:fillRef>
-          <a:effectRef idx="2">
-            <a:schemeClr val="accent1"/>
-          </a:effectRef>
-          <a:fontRef idx="minor">
-            <a:schemeClr val="lt1"/>
-          </a:fontRef>
-        </p:style>
-        <p:txBody>
-          <a:bodyPr rtlCol="0" anchor="ctr"/>
-          <a:lstStyle/>
-          <a:p>
-            <a:pPr algn="ctr"/>
-          </a:p>
-        </p:txBody>
-      </p:sp>
-      <p:sp>
-        <p:nvSpPr>
-          <p:cNvPr id="8" name="TextBox 7"/>
-          <p:cNvSpPr txBox="1"/>
-          <p:nvPr/>
-        </p:nvSpPr>
-        <p:spPr>
-          <a:xfrm>
-            <a:off x="7550000" y="2080000"/>
-            <a:ext cx="3750000" cy="1650000"/>
+            <a:off x="500000" y="6540000"/>
+            <a:ext cx="7000000" cy="300000"/>
           </a:xfrm>
           <a:prstGeom prst="rect">
             <a:avLst/>
@@ -14848,218 +16144,6 @@
               </a:spcAft>
             </a:pPr>
             <a:r>
-              <a:rPr sz="1400" b="1">
-                <a:solidFill>
-                  <a:srgbClr val="0475B6"/>
-                </a:solidFill>
-                <a:latin typeface="微软雅黑"/>
-              </a:rPr>
-              <a:t>及格标准（D）</a:t>
-            </a:r>
-          </a:p>
-          <a:p>
-            <a:pPr algn="l">
-              <a:lnSpc>
-                <a:spcPct val="110000"/>
-              </a:lnSpc>
-              <a:spcAft>
-                <a:spcPts val="600"/>
-              </a:spcAft>
-            </a:pPr>
-            <a:r>
-              <a:rPr sz="1300" b="0">
-                <a:solidFill>
-                  <a:srgbClr val="010328"/>
-                </a:solidFill>
-                <a:latin typeface="微软雅黑"/>
-              </a:rPr>
-              <a:t>对比表完整+提升≥20%</a:t>
-            </a:r>
-          </a:p>
-        </p:txBody>
-      </p:sp>
-      <p:sp>
-        <p:nvSpPr>
-          <p:cNvPr id="9" name="Rectangle 8"/>
-          <p:cNvSpPr/>
-          <p:nvPr/>
-        </p:nvSpPr>
-        <p:spPr>
-          <a:xfrm>
-            <a:off x="7400000" y="3950000"/>
-            <a:ext cx="4000000" cy="1850000"/>
-          </a:xfrm>
-          <a:prstGeom prst="rect">
-            <a:avLst/>
-          </a:prstGeom>
-          <a:solidFill>
-            <a:srgbClr val="FDF0E6"/>
-          </a:solidFill>
-          <a:ln>
-            <a:solidFill>
-              <a:srgbClr val="F5670F"/>
-            </a:solidFill>
-          </a:ln>
-          <a:effectLst/>
-        </p:spPr>
-        <p:style>
-          <a:lnRef idx="1">
-            <a:schemeClr val="accent1"/>
-          </a:lnRef>
-          <a:fillRef idx="3">
-            <a:schemeClr val="accent1"/>
-          </a:fillRef>
-          <a:effectRef idx="2">
-            <a:schemeClr val="accent1"/>
-          </a:effectRef>
-          <a:fontRef idx="minor">
-            <a:schemeClr val="lt1"/>
-          </a:fontRef>
-        </p:style>
-        <p:txBody>
-          <a:bodyPr rtlCol="0" anchor="ctr"/>
-          <a:lstStyle/>
-          <a:p>
-            <a:pPr algn="ctr"/>
-          </a:p>
-        </p:txBody>
-      </p:sp>
-      <p:sp>
-        <p:nvSpPr>
-          <p:cNvPr id="10" name="TextBox 9"/>
-          <p:cNvSpPr txBox="1"/>
-          <p:nvPr/>
-        </p:nvSpPr>
-        <p:spPr>
-          <a:xfrm>
-            <a:off x="7550000" y="4080000"/>
-            <a:ext cx="3750000" cy="1650000"/>
-          </a:xfrm>
-          <a:prstGeom prst="rect">
-            <a:avLst/>
-          </a:prstGeom>
-          <a:noFill/>
-        </p:spPr>
-        <p:txBody>
-          <a:bodyPr wrap="square" anchor="t">
-            <a:spAutoFit/>
-          </a:bodyPr>
-          <a:lstStyle/>
-          <a:p>
-            <a:pPr algn="l">
-              <a:lnSpc>
-                <a:spcPct val="110000"/>
-              </a:lnSpc>
-              <a:spcAft>
-                <a:spcPts val="600"/>
-              </a:spcAft>
-            </a:pPr>
-            <a:r>
-              <a:rPr sz="1400" b="1">
-                <a:solidFill>
-                  <a:srgbClr val="F5670F"/>
-                </a:solidFill>
-                <a:latin typeface="微软雅黑"/>
-              </a:rPr>
-              <a:t>优秀标准（B+）</a:t>
-            </a:r>
-          </a:p>
-          <a:p>
-            <a:pPr algn="l">
-              <a:lnSpc>
-                <a:spcPct val="110000"/>
-              </a:lnSpc>
-              <a:spcAft>
-                <a:spcPts val="600"/>
-              </a:spcAft>
-            </a:pPr>
-            <a:r>
-              <a:rPr sz="1300" b="0">
-                <a:solidFill>
-                  <a:srgbClr val="010328"/>
-                </a:solidFill>
-                <a:latin typeface="微软雅黑"/>
-              </a:rPr>
-              <a:t>提升≥35%或自创模板</a:t>
-            </a:r>
-          </a:p>
-        </p:txBody>
-      </p:sp>
-      <p:sp>
-        <p:nvSpPr>
-          <p:cNvPr id="11" name="Rectangle 10"/>
-          <p:cNvSpPr/>
-          <p:nvPr/>
-        </p:nvSpPr>
-        <p:spPr>
-          <a:xfrm>
-            <a:off x="500000" y="6500000"/>
-            <a:ext cx="11100000" cy="20000"/>
-          </a:xfrm>
-          <a:prstGeom prst="rect">
-            <a:avLst/>
-          </a:prstGeom>
-          <a:solidFill>
-            <a:srgbClr val="C9D4EE"/>
-          </a:solidFill>
-          <a:ln>
-            <a:noFill/>
-          </a:ln>
-          <a:effectLst/>
-        </p:spPr>
-        <p:style>
-          <a:lnRef idx="1">
-            <a:schemeClr val="accent1"/>
-          </a:lnRef>
-          <a:fillRef idx="3">
-            <a:schemeClr val="accent1"/>
-          </a:fillRef>
-          <a:effectRef idx="2">
-            <a:schemeClr val="accent1"/>
-          </a:effectRef>
-          <a:fontRef idx="minor">
-            <a:schemeClr val="lt1"/>
-          </a:fontRef>
-        </p:style>
-        <p:txBody>
-          <a:bodyPr rtlCol="0" anchor="ctr"/>
-          <a:lstStyle/>
-          <a:p>
-            <a:pPr algn="ctr"/>
-          </a:p>
-        </p:txBody>
-      </p:sp>
-      <p:sp>
-        <p:nvSpPr>
-          <p:cNvPr id="12" name="TextBox 11"/>
-          <p:cNvSpPr txBox="1"/>
-          <p:nvPr/>
-        </p:nvSpPr>
-        <p:spPr>
-          <a:xfrm>
-            <a:off x="500000" y="6540000"/>
-            <a:ext cx="7000000" cy="300000"/>
-          </a:xfrm>
-          <a:prstGeom prst="rect">
-            <a:avLst/>
-          </a:prstGeom>
-          <a:noFill/>
-        </p:spPr>
-        <p:txBody>
-          <a:bodyPr wrap="square" anchor="t">
-            <a:spAutoFit/>
-          </a:bodyPr>
-          <a:lstStyle/>
-          <a:p>
-            <a:pPr algn="l">
-              <a:lnSpc>
-                <a:spcPct val="110000"/>
-              </a:lnSpc>
-              <a:spcAft>
-                <a:spcPts val="600"/>
-              </a:spcAft>
-            </a:pPr>
-            <a:r>
               <a:rPr sz="1000" b="0">
                 <a:solidFill>
                   <a:srgbClr val="8A97B5"/>
@@ -15073,7 +16157,7 @@
       </p:sp>
       <p:sp>
         <p:nvSpPr>
-          <p:cNvPr id="13" name="TextBox 12"/>
+          <p:cNvPr id="19" name="TextBox 18"/>
           <p:cNvSpPr txBox="1"/>
           <p:nvPr/>
         </p:nvSpPr>
@@ -15108,7 +16192,637 @@
                 </a:solidFill>
                 <a:latin typeface="微软雅黑"/>
               </a:rPr>
-              <a:t>9 / 18</a:t>
+              <a:t>9 / 20</a:t>
+            </a:r>
+          </a:p>
+        </p:txBody>
+      </p:sp>
+      <p:sp>
+        <p:nvSpPr>
+          <p:cNvPr id="20" name="TextBox 19"/>
+          <p:cNvSpPr txBox="1"/>
+          <p:nvPr/>
+        </p:nvSpPr>
+        <p:spPr>
+          <a:xfrm>
+            <a:off x="457200" y="1389888"/>
+            <a:ext cx="11274552" cy="274320"/>
+          </a:xfrm>
+          <a:prstGeom prst="rect">
+            <a:avLst/>
+          </a:prstGeom>
+          <a:noFill/>
+        </p:spPr>
+        <p:txBody>
+          <a:bodyPr wrap="square">
+            <a:spAutoFit/>
+          </a:bodyPr>
+          <a:lstStyle/>
+          <a:p>
+            <a:r>
+              <a:rPr sz="1050" b="0">
+                <a:solidFill>
+                  <a:srgbClr val="6B7280"/>
+                </a:solidFill>
+                <a:latin typeface="微软雅黑"/>
+              </a:rPr>
+              <a:t>本讲是动手冲刺课：知识点在完整讲解课已细讲——这页把它们浓缩成一张速览卡，边做边对照。</a:t>
+            </a:r>
+          </a:p>
+        </p:txBody>
+      </p:sp>
+      <p:sp>
+        <p:nvSpPr>
+          <p:cNvPr id="21" name="Rectangle 20"/>
+          <p:cNvSpPr/>
+          <p:nvPr/>
+        </p:nvSpPr>
+        <p:spPr>
+          <a:xfrm>
+            <a:off x="457200" y="1783080"/>
+            <a:ext cx="6309360" cy="4114800"/>
+          </a:xfrm>
+          <a:prstGeom prst="rect">
+            <a:avLst/>
+          </a:prstGeom>
+          <a:solidFill>
+            <a:srgbClr val="FFFFFF"/>
+          </a:solidFill>
+          <a:ln>
+            <a:solidFill>
+              <a:srgbClr val="D6DCE4"/>
+            </a:solidFill>
+          </a:ln>
+          <a:effectLst/>
+        </p:spPr>
+        <p:style>
+          <a:lnRef idx="1">
+            <a:schemeClr val="accent1"/>
+          </a:lnRef>
+          <a:fillRef idx="3">
+            <a:schemeClr val="accent1"/>
+          </a:fillRef>
+          <a:effectRef idx="2">
+            <a:schemeClr val="accent1"/>
+          </a:effectRef>
+          <a:fontRef idx="minor">
+            <a:schemeClr val="lt1"/>
+          </a:fontRef>
+        </p:style>
+        <p:txBody>
+          <a:bodyPr rtlCol="0" anchor="ctr" wrap="square"/>
+          <a:lstStyle/>
+          <a:p>
+            <a:pPr algn="ctr"/>
+          </a:p>
+        </p:txBody>
+      </p:sp>
+      <p:sp>
+        <p:nvSpPr>
+          <p:cNvPr id="22" name="Rectangle 21"/>
+          <p:cNvSpPr/>
+          <p:nvPr/>
+        </p:nvSpPr>
+        <p:spPr>
+          <a:xfrm>
+            <a:off x="457200" y="1783080"/>
+            <a:ext cx="6309360" cy="365760"/>
+          </a:xfrm>
+          <a:prstGeom prst="rect">
+            <a:avLst/>
+          </a:prstGeom>
+          <a:solidFill>
+            <a:srgbClr val="2F5D8C"/>
+          </a:solidFill>
+          <a:ln>
+            <a:noFill/>
+          </a:ln>
+          <a:effectLst/>
+        </p:spPr>
+        <p:style>
+          <a:lnRef idx="1">
+            <a:schemeClr val="accent1"/>
+          </a:lnRef>
+          <a:fillRef idx="3">
+            <a:schemeClr val="accent1"/>
+          </a:fillRef>
+          <a:effectRef idx="2">
+            <a:schemeClr val="accent1"/>
+          </a:effectRef>
+          <a:fontRef idx="minor">
+            <a:schemeClr val="lt1"/>
+          </a:fontRef>
+        </p:style>
+        <p:txBody>
+          <a:bodyPr rtlCol="0" anchor="ctr" wrap="square"/>
+          <a:lstStyle/>
+          <a:p>
+            <a:pPr algn="ctr"/>
+          </a:p>
+        </p:txBody>
+      </p:sp>
+      <p:sp>
+        <p:nvSpPr>
+          <p:cNvPr id="23" name="TextBox 22"/>
+          <p:cNvSpPr txBox="1"/>
+          <p:nvPr/>
+        </p:nvSpPr>
+        <p:spPr>
+          <a:xfrm>
+            <a:off x="566928" y="1819656"/>
+            <a:ext cx="6089904" cy="292608"/>
+          </a:xfrm>
+          <a:prstGeom prst="rect">
+            <a:avLst/>
+          </a:prstGeom>
+          <a:noFill/>
+        </p:spPr>
+        <p:txBody>
+          <a:bodyPr wrap="square">
+            <a:spAutoFit/>
+          </a:bodyPr>
+          <a:lstStyle/>
+          <a:p>
+            <a:r>
+              <a:rPr sz="1150" b="1">
+                <a:solidFill>
+                  <a:srgbClr val="FFFFFF"/>
+                </a:solidFill>
+                <a:latin typeface="微软雅黑"/>
+              </a:rPr>
+              <a:t>知识点速览（逐字摘自同周完整讲解课知识卡）</a:t>
+            </a:r>
+          </a:p>
+        </p:txBody>
+      </p:sp>
+      <p:sp>
+        <p:nvSpPr>
+          <p:cNvPr id="24" name="TextBox 23"/>
+          <p:cNvSpPr txBox="1"/>
+          <p:nvPr/>
+        </p:nvSpPr>
+        <p:spPr>
+          <a:xfrm>
+            <a:off x="621792" y="2267712"/>
+            <a:ext cx="6035040" cy="3474720"/>
+          </a:xfrm>
+          <a:prstGeom prst="rect">
+            <a:avLst/>
+          </a:prstGeom>
+          <a:noFill/>
+        </p:spPr>
+        <p:txBody>
+          <a:bodyPr wrap="square">
+            <a:spAutoFit/>
+          </a:bodyPr>
+          <a:lstStyle/>
+          <a:p>
+            <a:r>
+              <a:rPr sz="950" b="0">
+                <a:solidFill>
+                  <a:srgbClr val="2B2F36"/>
+                </a:solidFill>
+                <a:latin typeface="微软雅黑"/>
+              </a:rPr>
+              <a:t>◆ B01 LLM调用本质｜就是HTTP+JSON——OpenAI兼容接口四字段</a:t>
+            </a:r>
+          </a:p>
+          <a:p>
+            <a:r>
+              <a:rPr sz="950" b="0">
+                <a:solidFill>
+                  <a:srgbClr val="2B2F36"/>
+                </a:solidFill>
+                <a:latin typeface="微软雅黑"/>
+              </a:rPr>
+              <a:t>◆ B02 Prompt三模板｜朴素/角色设定/少样本示例——三档递进对比</a:t>
+            </a:r>
+          </a:p>
+          <a:p>
+            <a:r>
+              <a:rPr sz="950" b="0">
+                <a:solidFill>
+                  <a:srgbClr val="2B2F36"/>
+                </a:solidFill>
+                <a:latin typeface="微软雅黑"/>
+              </a:rPr>
+              <a:t>◆ B03 思维链提示｜让模型一步一步想——复杂问题分步解</a:t>
+            </a:r>
+          </a:p>
+          <a:p>
+            <a:r>
+              <a:rPr sz="950" b="0">
+                <a:solidFill>
+                  <a:srgbClr val="2B2F36"/>
+                </a:solidFill>
+                <a:latin typeface="微软雅黑"/>
+              </a:rPr>
+              <a:t>◆ B04 变量控制｜同一问题同一温度只换模板——公平比较的前提</a:t>
+            </a:r>
+          </a:p>
+          <a:p>
+            <a:r>
+              <a:rPr sz="950" b="0">
+                <a:solidFill>
+                  <a:srgbClr val="2B2F36"/>
+                </a:solidFill>
+                <a:latin typeface="微软雅黑"/>
+              </a:rPr>
+              <a:t>◆ B05 容错三件套｜超时重试异常降级日志留痕——外部依赖必设防</a:t>
+            </a:r>
+          </a:p>
+          <a:p>
+            <a:r>
+              <a:rPr sz="950" b="0">
+                <a:solidFill>
+                  <a:srgbClr val="2B2F36"/>
+                </a:solidFill>
+                <a:latin typeface="微软雅黑"/>
+              </a:rPr>
+              <a:t>◆ B06 脱敏红线｜真实工单先抹设备编号人名再上模型</a:t>
+            </a:r>
+          </a:p>
+        </p:txBody>
+      </p:sp>
+      <p:sp>
+        <p:nvSpPr>
+          <p:cNvPr id="25" name="Rectangle 24"/>
+          <p:cNvSpPr/>
+          <p:nvPr/>
+        </p:nvSpPr>
+        <p:spPr>
+          <a:xfrm>
+            <a:off x="6903720" y="1783080"/>
+            <a:ext cx="4828032" cy="1965960"/>
+          </a:xfrm>
+          <a:prstGeom prst="rect">
+            <a:avLst/>
+          </a:prstGeom>
+          <a:solidFill>
+            <a:srgbClr val="FFFFFF"/>
+          </a:solidFill>
+          <a:ln>
+            <a:solidFill>
+              <a:srgbClr val="D6DCE4"/>
+            </a:solidFill>
+          </a:ln>
+          <a:effectLst/>
+        </p:spPr>
+        <p:style>
+          <a:lnRef idx="1">
+            <a:schemeClr val="accent1"/>
+          </a:lnRef>
+          <a:fillRef idx="3">
+            <a:schemeClr val="accent1"/>
+          </a:fillRef>
+          <a:effectRef idx="2">
+            <a:schemeClr val="accent1"/>
+          </a:effectRef>
+          <a:fontRef idx="minor">
+            <a:schemeClr val="lt1"/>
+          </a:fontRef>
+        </p:style>
+        <p:txBody>
+          <a:bodyPr rtlCol="0" anchor="ctr" wrap="square"/>
+          <a:lstStyle/>
+          <a:p>
+            <a:pPr algn="ctr"/>
+          </a:p>
+        </p:txBody>
+      </p:sp>
+      <p:sp>
+        <p:nvSpPr>
+          <p:cNvPr id="26" name="Rectangle 25"/>
+          <p:cNvSpPr/>
+          <p:nvPr/>
+        </p:nvSpPr>
+        <p:spPr>
+          <a:xfrm>
+            <a:off x="6903720" y="1783080"/>
+            <a:ext cx="4828032" cy="365760"/>
+          </a:xfrm>
+          <a:prstGeom prst="rect">
+            <a:avLst/>
+          </a:prstGeom>
+          <a:solidFill>
+            <a:srgbClr val="2E7D46"/>
+          </a:solidFill>
+          <a:ln>
+            <a:noFill/>
+          </a:ln>
+          <a:effectLst/>
+        </p:spPr>
+        <p:style>
+          <a:lnRef idx="1">
+            <a:schemeClr val="accent1"/>
+          </a:lnRef>
+          <a:fillRef idx="3">
+            <a:schemeClr val="accent1"/>
+          </a:fillRef>
+          <a:effectRef idx="2">
+            <a:schemeClr val="accent1"/>
+          </a:effectRef>
+          <a:fontRef idx="minor">
+            <a:schemeClr val="lt1"/>
+          </a:fontRef>
+        </p:style>
+        <p:txBody>
+          <a:bodyPr rtlCol="0" anchor="ctr" wrap="square"/>
+          <a:lstStyle/>
+          <a:p>
+            <a:pPr algn="ctr"/>
+          </a:p>
+        </p:txBody>
+      </p:sp>
+      <p:sp>
+        <p:nvSpPr>
+          <p:cNvPr id="27" name="TextBox 26"/>
+          <p:cNvSpPr txBox="1"/>
+          <p:nvPr/>
+        </p:nvSpPr>
+        <p:spPr>
+          <a:xfrm>
+            <a:off x="7013448" y="1819656"/>
+            <a:ext cx="4608576" cy="292608"/>
+          </a:xfrm>
+          <a:prstGeom prst="rect">
+            <a:avLst/>
+          </a:prstGeom>
+          <a:noFill/>
+        </p:spPr>
+        <p:txBody>
+          <a:bodyPr wrap="square">
+            <a:spAutoFit/>
+          </a:bodyPr>
+          <a:lstStyle/>
+          <a:p>
+            <a:r>
+              <a:rPr sz="1150" b="1">
+                <a:solidFill>
+                  <a:srgbClr val="FFFFFF"/>
+                </a:solidFill>
+                <a:latin typeface="微软雅黑"/>
+              </a:rPr>
+              <a:t>本讲达标线（当堂评分同口径）</a:t>
+            </a:r>
+          </a:p>
+        </p:txBody>
+      </p:sp>
+      <p:sp>
+        <p:nvSpPr>
+          <p:cNvPr id="28" name="TextBox 27"/>
+          <p:cNvSpPr txBox="1"/>
+          <p:nvPr/>
+        </p:nvSpPr>
+        <p:spPr>
+          <a:xfrm>
+            <a:off x="7068312" y="2249424"/>
+            <a:ext cx="4526280" cy="1371600"/>
+          </a:xfrm>
+          <a:prstGeom prst="rect">
+            <a:avLst/>
+          </a:prstGeom>
+          <a:noFill/>
+        </p:spPr>
+        <p:txBody>
+          <a:bodyPr wrap="square">
+            <a:spAutoFit/>
+          </a:bodyPr>
+          <a:lstStyle/>
+          <a:p>
+            <a:r>
+              <a:rPr sz="900" b="0">
+                <a:solidFill>
+                  <a:srgbClr val="2B2F36"/>
+                </a:solidFill>
+                <a:latin typeface="微软雅黑"/>
+              </a:rPr>
+              <a:t>① 及格(D)：对比表完整+提升≥20%</a:t>
+            </a:r>
+          </a:p>
+          <a:p>
+            <a:r>
+              <a:rPr sz="900" b="0">
+                <a:solidFill>
+                  <a:srgbClr val="2B2F36"/>
+                </a:solidFill>
+                <a:latin typeface="微软雅黑"/>
+              </a:rPr>
+              <a:t>② 优秀(B+)：提升≥35%或自创模板</a:t>
+            </a:r>
+          </a:p>
+        </p:txBody>
+      </p:sp>
+      <p:sp>
+        <p:nvSpPr>
+          <p:cNvPr id="29" name="Rectangle 28"/>
+          <p:cNvSpPr/>
+          <p:nvPr/>
+        </p:nvSpPr>
+        <p:spPr>
+          <a:xfrm>
+            <a:off x="6903720" y="3886200"/>
+            <a:ext cx="4828032" cy="2011680"/>
+          </a:xfrm>
+          <a:prstGeom prst="rect">
+            <a:avLst/>
+          </a:prstGeom>
+          <a:solidFill>
+            <a:srgbClr val="FFFFFF"/>
+          </a:solidFill>
+          <a:ln>
+            <a:solidFill>
+              <a:srgbClr val="D6DCE4"/>
+            </a:solidFill>
+          </a:ln>
+          <a:effectLst/>
+        </p:spPr>
+        <p:style>
+          <a:lnRef idx="1">
+            <a:schemeClr val="accent1"/>
+          </a:lnRef>
+          <a:fillRef idx="3">
+            <a:schemeClr val="accent1"/>
+          </a:fillRef>
+          <a:effectRef idx="2">
+            <a:schemeClr val="accent1"/>
+          </a:effectRef>
+          <a:fontRef idx="minor">
+            <a:schemeClr val="lt1"/>
+          </a:fontRef>
+        </p:style>
+        <p:txBody>
+          <a:bodyPr rtlCol="0" anchor="ctr" wrap="square"/>
+          <a:lstStyle/>
+          <a:p>
+            <a:pPr algn="ctr"/>
+          </a:p>
+        </p:txBody>
+      </p:sp>
+      <p:sp>
+        <p:nvSpPr>
+          <p:cNvPr id="30" name="Rectangle 29"/>
+          <p:cNvSpPr/>
+          <p:nvPr/>
+        </p:nvSpPr>
+        <p:spPr>
+          <a:xfrm>
+            <a:off x="6903720" y="3886200"/>
+            <a:ext cx="4828032" cy="365760"/>
+          </a:xfrm>
+          <a:prstGeom prst="rect">
+            <a:avLst/>
+          </a:prstGeom>
+          <a:solidFill>
+            <a:srgbClr val="8A4B2D"/>
+          </a:solidFill>
+          <a:ln>
+            <a:noFill/>
+          </a:ln>
+          <a:effectLst/>
+        </p:spPr>
+        <p:style>
+          <a:lnRef idx="1">
+            <a:schemeClr val="accent1"/>
+          </a:lnRef>
+          <a:fillRef idx="3">
+            <a:schemeClr val="accent1"/>
+          </a:fillRef>
+          <a:effectRef idx="2">
+            <a:schemeClr val="accent1"/>
+          </a:effectRef>
+          <a:fontRef idx="minor">
+            <a:schemeClr val="lt1"/>
+          </a:fontRef>
+        </p:style>
+        <p:txBody>
+          <a:bodyPr rtlCol="0" anchor="ctr" wrap="square"/>
+          <a:lstStyle/>
+          <a:p>
+            <a:pPr algn="ctr"/>
+          </a:p>
+        </p:txBody>
+      </p:sp>
+      <p:sp>
+        <p:nvSpPr>
+          <p:cNvPr id="31" name="TextBox 30"/>
+          <p:cNvSpPr txBox="1"/>
+          <p:nvPr/>
+        </p:nvSpPr>
+        <p:spPr>
+          <a:xfrm>
+            <a:off x="7013448" y="3922776"/>
+            <a:ext cx="4608576" cy="292608"/>
+          </a:xfrm>
+          <a:prstGeom prst="rect">
+            <a:avLst/>
+          </a:prstGeom>
+          <a:noFill/>
+        </p:spPr>
+        <p:txBody>
+          <a:bodyPr wrap="square">
+            <a:spAutoFit/>
+          </a:bodyPr>
+          <a:lstStyle/>
+          <a:p>
+            <a:r>
+              <a:rPr sz="1150" b="1">
+                <a:solidFill>
+                  <a:srgbClr val="FFFFFF"/>
+                </a:solidFill>
+                <a:latin typeface="微软雅黑"/>
+              </a:rPr>
+              <a:t>动手前三个提醒（踩坑点摘录）</a:t>
+            </a:r>
+          </a:p>
+        </p:txBody>
+      </p:sp>
+      <p:sp>
+        <p:nvSpPr>
+          <p:cNvPr id="32" name="TextBox 31"/>
+          <p:cNvSpPr txBox="1"/>
+          <p:nvPr/>
+        </p:nvSpPr>
+        <p:spPr>
+          <a:xfrm>
+            <a:off x="7068312" y="4352544"/>
+            <a:ext cx="4526280" cy="1463040"/>
+          </a:xfrm>
+          <a:prstGeom prst="rect">
+            <a:avLst/>
+          </a:prstGeom>
+          <a:noFill/>
+        </p:spPr>
+        <p:txBody>
+          <a:bodyPr wrap="square">
+            <a:spAutoFit/>
+          </a:bodyPr>
+          <a:lstStyle/>
+          <a:p>
+            <a:r>
+              <a:rPr sz="900" b="0">
+                <a:solidFill>
+                  <a:srgbClr val="2B2F36"/>
+                </a:solidFill>
+                <a:latin typeface="微软雅黑"/>
+              </a:rPr>
+              <a:t>⚠ 先python mock_llm_server.py</a:t>
+            </a:r>
+          </a:p>
+          <a:p>
+            <a:r>
+              <a:rPr sz="900" b="0">
+                <a:solidFill>
+                  <a:srgbClr val="2B2F36"/>
+                </a:solidFill>
+                <a:latin typeface="微软雅黑"/>
+              </a:rPr>
+              <a:t>⚠ temperature为0对比</a:t>
+            </a:r>
+          </a:p>
+          <a:p>
+            <a:r>
+              <a:rPr sz="900" b="0">
+                <a:solidFill>
+                  <a:srgbClr val="2B2F36"/>
+                </a:solidFill>
+                <a:latin typeface="微软雅黑"/>
+              </a:rPr>
+              <a:t>⚠ 换多步推理题集</a:t>
+            </a:r>
+          </a:p>
+        </p:txBody>
+      </p:sp>
+      <p:sp>
+        <p:nvSpPr>
+          <p:cNvPr id="33" name="TextBox 32"/>
+          <p:cNvSpPr txBox="1"/>
+          <p:nvPr/>
+        </p:nvSpPr>
+        <p:spPr>
+          <a:xfrm>
+            <a:off x="457200" y="6281928"/>
+            <a:ext cx="9601200" cy="182880"/>
+          </a:xfrm>
+          <a:prstGeom prst="rect">
+            <a:avLst/>
+          </a:prstGeom>
+          <a:noFill/>
+        </p:spPr>
+        <p:txBody>
+          <a:bodyPr wrap="square">
+            <a:spAutoFit/>
+          </a:bodyPr>
+          <a:lstStyle/>
+          <a:p>
+            <a:r>
+              <a:rPr sz="900" b="0">
+                <a:solidFill>
+                  <a:srgbClr val="6B7280"/>
+                </a:solidFill>
+                <a:latin typeface="微软雅黑"/>
+              </a:rPr>
+              <a:t>素材来源：同周《第17次课-LLM故障诊断（上）：基》知识卡与避坑清单（逐字摘录）</a:t>
             </a:r>
           </a:p>
         </p:txBody>
